--- a/IEP/t2-lesson3-perpendicular-slopes-IEP.pptx
+++ b/IEP/t2-lesson3-perpendicular-slopes-IEP.pptx
@@ -1659,6 +1659,40 @@
           </a:p>
         </p:txBody>
       </p:sp>
+      <p:sp>
+        <p:nvSpPr>
+          <p:cNvPr id="11" name="Slide Number 11"/>
+          <p:cNvSpPr txBox="1"/>
+          <p:nvPr/>
+        </p:nvSpPr>
+        <p:spPr>
+          <a:xfrm>
+            <a:off x="11277295" y="6611112"/>
+            <a:ext cx="685800" cy="201168"/>
+          </a:xfrm>
+          <a:prstGeom prst="rect">
+            <a:avLst/>
+          </a:prstGeom>
+          <a:noFill/>
+        </p:spPr>
+        <p:txBody>
+          <a:bodyPr wrap="none" lIns="0" tIns="0" rIns="0" bIns="0" anchor="b">
+            <a:noAutofit/>
+          </a:bodyPr>
+          <a:lstStyle/>
+          <a:p>
+            <a:pPr algn="r"/>
+            <a:fld id="{5C1A6E0B-3B1F-4D5E-9C7A-2F4B8D6E1A90}" type="slidenum">
+              <a:rPr lang="en-US" sz="1200" dirty="0">
+                <a:solidFill>
+                  <a:srgbClr val="5F6272"/>
+                </a:solidFill>
+              </a:rPr>
+              <a:t>1</a:t>
+            </a:fld>
+          </a:p>
+        </p:txBody>
+      </p:sp>
     </p:spTree>
   </p:cSld>
   <p:clrMapOvr>
@@ -2318,6 +2352,40 @@
               <a:t xml:space="preserve"> + 2</a:t>
             </a:r>
             <a:endParaRPr lang="en-US" sz="2325" dirty="0"/>
+          </a:p>
+        </p:txBody>
+      </p:sp>
+      <p:sp>
+        <p:nvSpPr>
+          <p:cNvPr id="10" name="Slide Number 10"/>
+          <p:cNvSpPr txBox="1"/>
+          <p:nvPr/>
+        </p:nvSpPr>
+        <p:spPr>
+          <a:xfrm>
+            <a:off x="11277295" y="6611112"/>
+            <a:ext cx="685800" cy="201168"/>
+          </a:xfrm>
+          <a:prstGeom prst="rect">
+            <a:avLst/>
+          </a:prstGeom>
+          <a:noFill/>
+        </p:spPr>
+        <p:txBody>
+          <a:bodyPr wrap="none" lIns="0" tIns="0" rIns="0" bIns="0" anchor="b">
+            <a:noAutofit/>
+          </a:bodyPr>
+          <a:lstStyle/>
+          <a:p>
+            <a:pPr algn="r"/>
+            <a:fld id="{5C1A6E0B-3B1F-4D5E-9C7A-2F4B8D6E1A90}" type="slidenum">
+              <a:rPr lang="en-US" sz="1200" dirty="0">
+                <a:solidFill>
+                  <a:srgbClr val="5F6272"/>
+                </a:solidFill>
+              </a:rPr>
+              <a:t>10</a:t>
+            </a:fld>
           </a:p>
         </p:txBody>
       </p:sp>
@@ -3340,6 +3408,40 @@
           </a:p>
         </p:txBody>
       </p:sp>
+      <p:sp>
+        <p:nvSpPr>
+          <p:cNvPr id="13" name="Slide Number 13"/>
+          <p:cNvSpPr txBox="1"/>
+          <p:nvPr/>
+        </p:nvSpPr>
+        <p:spPr>
+          <a:xfrm>
+            <a:off x="11277295" y="6611112"/>
+            <a:ext cx="685800" cy="201168"/>
+          </a:xfrm>
+          <a:prstGeom prst="rect">
+            <a:avLst/>
+          </a:prstGeom>
+          <a:noFill/>
+        </p:spPr>
+        <p:txBody>
+          <a:bodyPr wrap="none" lIns="0" tIns="0" rIns="0" bIns="0" anchor="b">
+            <a:noAutofit/>
+          </a:bodyPr>
+          <a:lstStyle/>
+          <a:p>
+            <a:pPr algn="r"/>
+            <a:fld id="{5C1A6E0B-3B1F-4D5E-9C7A-2F4B8D6E1A90}" type="slidenum">
+              <a:rPr lang="en-US" sz="1200" dirty="0">
+                <a:solidFill>
+                  <a:srgbClr val="5F6272"/>
+                </a:solidFill>
+              </a:rPr>
+              <a:t>11</a:t>
+            </a:fld>
+          </a:p>
+        </p:txBody>
+      </p:sp>
     </p:spTree>
   </p:cSld>
   <p:clrMapOvr>
@@ -3945,6 +4047,40 @@
           </a:p>
         </p:txBody>
       </p:sp>
+      <p:sp>
+        <p:nvSpPr>
+          <p:cNvPr id="6" name="Slide Number 6"/>
+          <p:cNvSpPr txBox="1"/>
+          <p:nvPr/>
+        </p:nvSpPr>
+        <p:spPr>
+          <a:xfrm>
+            <a:off x="11277295" y="6611112"/>
+            <a:ext cx="685800" cy="201168"/>
+          </a:xfrm>
+          <a:prstGeom prst="rect">
+            <a:avLst/>
+          </a:prstGeom>
+          <a:noFill/>
+        </p:spPr>
+        <p:txBody>
+          <a:bodyPr wrap="none" lIns="0" tIns="0" rIns="0" bIns="0" anchor="b">
+            <a:noAutofit/>
+          </a:bodyPr>
+          <a:lstStyle/>
+          <a:p>
+            <a:pPr algn="r"/>
+            <a:fld id="{5C1A6E0B-3B1F-4D5E-9C7A-2F4B8D6E1A90}" type="slidenum">
+              <a:rPr lang="en-US" sz="1200" dirty="0">
+                <a:solidFill>
+                  <a:srgbClr val="5F6272"/>
+                </a:solidFill>
+              </a:rPr>
+              <a:t>12</a:t>
+            </a:fld>
+          </a:p>
+        </p:txBody>
+      </p:sp>
     </p:spTree>
   </p:cSld>
   <p:clrMapOvr>
@@ -4616,6 +4752,40 @@
               <a:t xml:space="preserve">−3</a:t>
             </a:r>
             <a:endParaRPr lang="en-US" sz="2325" dirty="0"/>
+          </a:p>
+        </p:txBody>
+      </p:sp>
+      <p:sp>
+        <p:nvSpPr>
+          <p:cNvPr id="12" name="Slide Number 12"/>
+          <p:cNvSpPr txBox="1"/>
+          <p:nvPr/>
+        </p:nvSpPr>
+        <p:spPr>
+          <a:xfrm>
+            <a:off x="11277295" y="6611112"/>
+            <a:ext cx="685800" cy="201168"/>
+          </a:xfrm>
+          <a:prstGeom prst="rect">
+            <a:avLst/>
+          </a:prstGeom>
+          <a:noFill/>
+        </p:spPr>
+        <p:txBody>
+          <a:bodyPr wrap="none" lIns="0" tIns="0" rIns="0" bIns="0" anchor="b">
+            <a:noAutofit/>
+          </a:bodyPr>
+          <a:lstStyle/>
+          <a:p>
+            <a:pPr algn="r"/>
+            <a:fld id="{5C1A6E0B-3B1F-4D5E-9C7A-2F4B8D6E1A90}" type="slidenum">
+              <a:rPr lang="en-US" sz="1200" dirty="0">
+                <a:solidFill>
+                  <a:srgbClr val="5F6272"/>
+                </a:solidFill>
+              </a:rPr>
+              <a:t>2</a:t>
+            </a:fld>
           </a:p>
         </p:txBody>
       </p:sp>
@@ -5719,6 +5889,40 @@
           </a:p>
         </p:txBody>
       </p:sp>
+      <p:sp>
+        <p:nvSpPr>
+          <p:cNvPr id="12" name="Slide Number 12"/>
+          <p:cNvSpPr txBox="1"/>
+          <p:nvPr/>
+        </p:nvSpPr>
+        <p:spPr>
+          <a:xfrm>
+            <a:off x="11277295" y="6611112"/>
+            <a:ext cx="685800" cy="201168"/>
+          </a:xfrm>
+          <a:prstGeom prst="rect">
+            <a:avLst/>
+          </a:prstGeom>
+          <a:noFill/>
+        </p:spPr>
+        <p:txBody>
+          <a:bodyPr wrap="none" lIns="0" tIns="0" rIns="0" bIns="0" anchor="b">
+            <a:noAutofit/>
+          </a:bodyPr>
+          <a:lstStyle/>
+          <a:p>
+            <a:pPr algn="r"/>
+            <a:fld id="{5C1A6E0B-3B1F-4D5E-9C7A-2F4B8D6E1A90}" type="slidenum">
+              <a:rPr lang="en-US" sz="1200" dirty="0">
+                <a:solidFill>
+                  <a:srgbClr val="5F6272"/>
+                </a:solidFill>
+              </a:rPr>
+              <a:t>3</a:t>
+            </a:fld>
+          </a:p>
+        </p:txBody>
+      </p:sp>
     </p:spTree>
   </p:cSld>
   <p:clrMapOvr>
@@ -6897,6 +7101,40 @@
           </a:p>
         </p:txBody>
       </p:sp>
+      <p:sp>
+        <p:nvSpPr>
+          <p:cNvPr id="16" name="Slide Number 16"/>
+          <p:cNvSpPr txBox="1"/>
+          <p:nvPr/>
+        </p:nvSpPr>
+        <p:spPr>
+          <a:xfrm>
+            <a:off x="11277295" y="6611112"/>
+            <a:ext cx="685800" cy="201168"/>
+          </a:xfrm>
+          <a:prstGeom prst="rect">
+            <a:avLst/>
+          </a:prstGeom>
+          <a:noFill/>
+        </p:spPr>
+        <p:txBody>
+          <a:bodyPr wrap="none" lIns="0" tIns="0" rIns="0" bIns="0" anchor="b">
+            <a:noAutofit/>
+          </a:bodyPr>
+          <a:lstStyle/>
+          <a:p>
+            <a:pPr algn="r"/>
+            <a:fld id="{5C1A6E0B-3B1F-4D5E-9C7A-2F4B8D6E1A90}" type="slidenum">
+              <a:rPr lang="en-US" sz="1200" dirty="0">
+                <a:solidFill>
+                  <a:srgbClr val="5F6272"/>
+                </a:solidFill>
+              </a:rPr>
+              <a:t>4</a:t>
+            </a:fld>
+          </a:p>
+        </p:txBody>
+      </p:sp>
     </p:spTree>
   </p:cSld>
   <p:clrMapOvr>
@@ -7369,6 +7607,40 @@
           </a:p>
         </p:txBody>
       </p:sp>
+      <p:sp>
+        <p:nvSpPr>
+          <p:cNvPr id="8" name="Slide Number 8"/>
+          <p:cNvSpPr txBox="1"/>
+          <p:nvPr/>
+        </p:nvSpPr>
+        <p:spPr>
+          <a:xfrm>
+            <a:off x="11277295" y="6611112"/>
+            <a:ext cx="685800" cy="201168"/>
+          </a:xfrm>
+          <a:prstGeom prst="rect">
+            <a:avLst/>
+          </a:prstGeom>
+          <a:noFill/>
+        </p:spPr>
+        <p:txBody>
+          <a:bodyPr wrap="none" lIns="0" tIns="0" rIns="0" bIns="0" anchor="b">
+            <a:noAutofit/>
+          </a:bodyPr>
+          <a:lstStyle/>
+          <a:p>
+            <a:pPr algn="r"/>
+            <a:fld id="{5C1A6E0B-3B1F-4D5E-9C7A-2F4B8D6E1A90}" type="slidenum">
+              <a:rPr lang="en-US" sz="1200" dirty="0">
+                <a:solidFill>
+                  <a:srgbClr val="5F6272"/>
+                </a:solidFill>
+              </a:rPr>
+              <a:t>5</a:t>
+            </a:fld>
+          </a:p>
+        </p:txBody>
+      </p:sp>
     </p:spTree>
   </p:cSld>
   <p:clrMapOvr>
@@ -8044,6 +8316,40 @@
               <a:t xml:space="preserve">3</a:t>
             </a:r>
             <a:endParaRPr lang="en-US" sz="2325" dirty="0"/>
+          </a:p>
+        </p:txBody>
+      </p:sp>
+      <p:sp>
+        <p:nvSpPr>
+          <p:cNvPr id="12" name="Slide Number 12"/>
+          <p:cNvSpPr txBox="1"/>
+          <p:nvPr/>
+        </p:nvSpPr>
+        <p:spPr>
+          <a:xfrm>
+            <a:off x="11277295" y="6611112"/>
+            <a:ext cx="685800" cy="201168"/>
+          </a:xfrm>
+          <a:prstGeom prst="rect">
+            <a:avLst/>
+          </a:prstGeom>
+          <a:noFill/>
+        </p:spPr>
+        <p:txBody>
+          <a:bodyPr wrap="none" lIns="0" tIns="0" rIns="0" bIns="0" anchor="b">
+            <a:noAutofit/>
+          </a:bodyPr>
+          <a:lstStyle/>
+          <a:p>
+            <a:pPr algn="r"/>
+            <a:fld id="{5C1A6E0B-3B1F-4D5E-9C7A-2F4B8D6E1A90}" type="slidenum">
+              <a:rPr lang="en-US" sz="1200" dirty="0">
+                <a:solidFill>
+                  <a:srgbClr val="5F6272"/>
+                </a:solidFill>
+              </a:rPr>
+              <a:t>6</a:t>
+            </a:fld>
           </a:p>
         </p:txBody>
       </p:sp>
@@ -8924,6 +9230,40 @@
               <a:t xml:space="preserve">−2</a:t>
             </a:r>
             <a:endParaRPr lang="en-US" sz="2325" dirty="0"/>
+          </a:p>
+        </p:txBody>
+      </p:sp>
+      <p:sp>
+        <p:nvSpPr>
+          <p:cNvPr id="13" name="Slide Number 13"/>
+          <p:cNvSpPr txBox="1"/>
+          <p:nvPr/>
+        </p:nvSpPr>
+        <p:spPr>
+          <a:xfrm>
+            <a:off x="11277295" y="6611112"/>
+            <a:ext cx="685800" cy="201168"/>
+          </a:xfrm>
+          <a:prstGeom prst="rect">
+            <a:avLst/>
+          </a:prstGeom>
+          <a:noFill/>
+        </p:spPr>
+        <p:txBody>
+          <a:bodyPr wrap="none" lIns="0" tIns="0" rIns="0" bIns="0" anchor="b">
+            <a:noAutofit/>
+          </a:bodyPr>
+          <a:lstStyle/>
+          <a:p>
+            <a:pPr algn="r"/>
+            <a:fld id="{5C1A6E0B-3B1F-4D5E-9C7A-2F4B8D6E1A90}" type="slidenum">
+              <a:rPr lang="en-US" sz="1200" dirty="0">
+                <a:solidFill>
+                  <a:srgbClr val="5F6272"/>
+                </a:solidFill>
+              </a:rPr>
+              <a:t>7</a:t>
+            </a:fld>
           </a:p>
         </p:txBody>
       </p:sp>
@@ -11267,6 +11607,40 @@
               <a:t xml:space="preserve">(2, −1)</a:t>
             </a:r>
             <a:endParaRPr lang="en-US" sz="1125" dirty="0"/>
+          </a:p>
+        </p:txBody>
+      </p:sp>
+      <p:sp>
+        <p:nvSpPr>
+          <p:cNvPr id="58" name="Slide Number 58"/>
+          <p:cNvSpPr txBox="1"/>
+          <p:nvPr/>
+        </p:nvSpPr>
+        <p:spPr>
+          <a:xfrm>
+            <a:off x="11277295" y="6611112"/>
+            <a:ext cx="685800" cy="201168"/>
+          </a:xfrm>
+          <a:prstGeom prst="rect">
+            <a:avLst/>
+          </a:prstGeom>
+          <a:noFill/>
+        </p:spPr>
+        <p:txBody>
+          <a:bodyPr wrap="none" lIns="0" tIns="0" rIns="0" bIns="0" anchor="b">
+            <a:noAutofit/>
+          </a:bodyPr>
+          <a:lstStyle/>
+          <a:p>
+            <a:pPr algn="r"/>
+            <a:fld id="{5C1A6E0B-3B1F-4D5E-9C7A-2F4B8D6E1A90}" type="slidenum">
+              <a:rPr lang="en-US" sz="1200" dirty="0">
+                <a:solidFill>
+                  <a:srgbClr val="5F6272"/>
+                </a:solidFill>
+              </a:rPr>
+              <a:t>8</a:t>
+            </a:fld>
           </a:p>
         </p:txBody>
       </p:sp>
@@ -12315,6 +12689,40 @@
               <a:t xml:space="preserve"> + 5</a:t>
             </a:r>
             <a:endParaRPr lang="en-US" sz="2325" dirty="0"/>
+          </a:p>
+        </p:txBody>
+      </p:sp>
+      <p:sp>
+        <p:nvSpPr>
+          <p:cNvPr id="9" name="Slide Number 9"/>
+          <p:cNvSpPr txBox="1"/>
+          <p:nvPr/>
+        </p:nvSpPr>
+        <p:spPr>
+          <a:xfrm>
+            <a:off x="11277295" y="6611112"/>
+            <a:ext cx="685800" cy="201168"/>
+          </a:xfrm>
+          <a:prstGeom prst="rect">
+            <a:avLst/>
+          </a:prstGeom>
+          <a:noFill/>
+        </p:spPr>
+        <p:txBody>
+          <a:bodyPr wrap="none" lIns="0" tIns="0" rIns="0" bIns="0" anchor="b">
+            <a:noAutofit/>
+          </a:bodyPr>
+          <a:lstStyle/>
+          <a:p>
+            <a:pPr algn="r"/>
+            <a:fld id="{5C1A6E0B-3B1F-4D5E-9C7A-2F4B8D6E1A90}" type="slidenum">
+              <a:rPr lang="en-US" sz="1200" dirty="0">
+                <a:solidFill>
+                  <a:srgbClr val="5F6272"/>
+                </a:solidFill>
+              </a:rPr>
+              <a:t>9</a:t>
+            </a:fld>
           </a:p>
         </p:txBody>
       </p:sp>

--- a/IEP/t2-lesson3-perpendicular-slopes-IEP.pptx
+++ b/IEP/t2-lesson3-perpendicular-slopes-IEP.pptx
@@ -519,7 +519,7 @@
           <a:p>
             <a:r>
               <a:rPr lang="en-US" dirty="0"/>
-              <a:t>Added for this deck; not from the textbook. Have this up as students walk in; they work silently while you take attendance (about 5 minutes). The same 4 questions are on the online Day 1 bell work. Reveal the answers one at a time. Answer key: 1. Flip the fraction: ⅔ · 3/2 = 1. 2. A 90° counterclockwise rotation maps (x, y) to (−y, x). 3. Slope = (5 − 0) ÷ (8 − 0) = 5/8. 4. In y = mx + b, m = −3.</a:t>
+              <a:t>Have this up as students walk in (about 5 minutes). The same 4 questions are on the online IEP Day 1 bell work, which shows the same formula under each question and these steps after each answer. Click to reveal one answer at a time; read each step aloud and point to where the formula is used.</a:t>
             </a:r>
           </a:p>
         </p:txBody>
@@ -578,7 +578,7 @@
           <a:p>
             <a:r>
               <a:rPr lang="en-US" dirty="0"/>
-              <a:t>Added for this deck; not from the textbook. Have this up as students walk in; they work silently while you take attendance (about 5 minutes). The same 4 questions are on the online Day 2 bell work. Reveal the answers one at a time. Answer key: 1. Perpendicular slopes are negative reciprocals: ⅔ · (−3/2) = −1. 2. On a horizontal line y never changes, so the rise is 0. 3. Every point on a vertical line has the same x-value, here 2. 4. Negative reciprocals multiply to −1.</a:t>
+              <a:t>Have this up as students walk in (about 5 minutes). The same 4 questions are on the online IEP Day 2 bell work, which shows the same formula under each question and these steps after each answer. Click to reveal one answer at a time; read each step aloud and point to where the formula is used.</a:t>
             </a:r>
           </a:p>
         </p:txBody>
@@ -7211,21 +7211,27 @@
       </p:sp>
       <p:sp>
         <p:nvSpPr>
-          <p:cNvPr id="4" name="Shape 4"/>
+          <p:cNvPr id="7" name="Shape 7"/>
           <p:cNvSpPr txBox="1"/>
           <p:nvPr/>
         </p:nvSpPr>
         <p:spPr>
           <a:xfrm>
-            <a:off x="685800" y="1675638"/>
-            <a:ext cx="5143348" cy="352044"/>
-          </a:xfrm>
-          <a:prstGeom prst="rect">
-            <a:avLst/>
-          </a:prstGeom>
-          <a:noFill/>
-          <a:ln>
-            <a:noFill/>
+            <a:off x="685800" y="1618488"/>
+            <a:ext cx="5295748" cy="2042160"/>
+          </a:xfrm>
+          <a:prstGeom prst="roundRect">
+            <a:avLst>
+              <a:gd name="adj" fmla="val 8000"/>
+            </a:avLst>
+          </a:prstGeom>
+          <a:solidFill>
+            <a:srgbClr val="FFFFFF"/>
+          </a:solidFill>
+          <a:ln w="12700">
+            <a:solidFill>
+              <a:srgbClr val="E3E4EC"/>
+            </a:solidFill>
           </a:ln>
         </p:spPr>
         <p:txBody>
@@ -7239,18 +7245,62 @@
                 <a:spcPct val="100000"/>
               </a:lnSpc>
             </a:pPr>
-            <a:r>
-              <a:rPr lang="en-US" sz="1950" dirty="0">
-                <a:solidFill>
-                  <a:srgbClr val="16171D"/>
-                </a:solidFill>
-                <a:latin typeface="Segoe UI"/>
-                <a:cs typeface="Segoe UI"/>
-              </a:rPr>
-              <a:t xml:space="preserve">1. What is the reciprocal of </a:t>
-            </a:r>
-            <a:r>
-              <a:rPr lang="en-US" sz="1950" dirty="0">
+            <a:endParaRPr lang="en-US" sz="1950" dirty="0"/>
+          </a:p>
+        </p:txBody>
+      </p:sp>
+      <p:sp>
+        <p:nvSpPr>
+          <p:cNvPr id="4" name="Shape 4"/>
+          <p:cNvSpPr txBox="1"/>
+          <p:nvPr/>
+        </p:nvSpPr>
+        <p:spPr>
+          <a:xfrm>
+            <a:off x="895350" y="1789938"/>
+            <a:ext cx="4876648" cy="294894"/>
+          </a:xfrm>
+          <a:prstGeom prst="rect">
+            <a:avLst/>
+          </a:prstGeom>
+          <a:noFill/>
+          <a:ln>
+            <a:noFill/>
+          </a:ln>
+        </p:spPr>
+        <p:txBody>
+          <a:bodyPr wrap="square" lIns="36576" tIns="27432" rIns="36576" bIns="27432" anchor="t">
+            <a:noAutofit/>
+          </a:bodyPr>
+          <a:lstStyle/>
+          <a:p>
+            <a:pPr algn="l">
+              <a:lnSpc>
+                <a:spcPct val="100000"/>
+              </a:lnSpc>
+            </a:pPr>
+            <a:r>
+              <a:rPr lang="en-US" sz="1575" dirty="0" b="1">
+                <a:solidFill>
+                  <a:srgbClr val="16171D"/>
+                </a:solidFill>
+                <a:latin typeface="Segoe UI"/>
+                <a:cs typeface="Segoe UI"/>
+              </a:rPr>
+              <a:t xml:space="preserve">1.</a:t>
+            </a:r>
+            <a:r>
+              <a:rPr lang="en-US" sz="1575" dirty="0">
+                <a:solidFill>
+                  <a:srgbClr val="16171D"/>
+                </a:solidFill>
+                <a:latin typeface="Segoe UI"/>
+                <a:cs typeface="Segoe UI"/>
+              </a:rPr>
+              <a:t xml:space="preserve"> What is the reciprocal of </a:t>
+            </a:r>
+            <a:r>
+              <a:rPr lang="en-US" sz="1575" dirty="0">
                 <a:solidFill>
                   <a:srgbClr val="16171D"/>
                 </a:solidFill>
@@ -7260,7 +7310,7 @@
               <a:t xml:space="preserve">⅔</a:t>
             </a:r>
             <a:r>
-              <a:rPr lang="en-US" sz="1950" dirty="0">
+              <a:rPr lang="en-US" sz="1575" dirty="0">
                 <a:solidFill>
                   <a:srgbClr val="16171D"/>
                 </a:solidFill>
@@ -7269,7 +7319,7 @@
               </a:rPr>
               <a:t xml:space="preserve">?</a:t>
             </a:r>
-            <a:endParaRPr lang="en-US" sz="1950" dirty="0"/>
+            <a:endParaRPr lang="en-US" sz="1575" dirty="0"/>
           </a:p>
         </p:txBody>
       </p:sp>
@@ -7281,8 +7331,62 @@
         </p:nvSpPr>
         <p:spPr>
           <a:xfrm>
-            <a:off x="685800" y="2161032"/>
-            <a:ext cx="2410541" cy="518922"/>
+            <a:off x="895350" y="2122932"/>
+            <a:ext cx="4876648" cy="294894"/>
+          </a:xfrm>
+          <a:prstGeom prst="rect">
+            <a:avLst/>
+          </a:prstGeom>
+          <a:noFill/>
+          <a:ln>
+            <a:noFill/>
+          </a:ln>
+        </p:spPr>
+        <p:txBody>
+          <a:bodyPr wrap="square" lIns="36576" tIns="27432" rIns="36576" bIns="27432" anchor="t">
+            <a:noAutofit/>
+          </a:bodyPr>
+          <a:lstStyle/>
+          <a:p>
+            <a:pPr algn="l">
+              <a:lnSpc>
+                <a:spcPct val="100000"/>
+              </a:lnSpc>
+            </a:pPr>
+            <a:r>
+              <a:rPr lang="en-US" sz="1575" dirty="0" b="1">
+                <a:solidFill>
+                  <a:srgbClr val="16171D"/>
+                </a:solidFill>
+                <a:latin typeface="Segoe UI"/>
+                <a:cs typeface="Segoe UI"/>
+              </a:rPr>
+              <a:t xml:space="preserve">Formula:</a:t>
+            </a:r>
+            <a:r>
+              <a:rPr lang="en-US" sz="1575" dirty="0">
+                <a:solidFill>
+                  <a:srgbClr val="16171D"/>
+                </a:solidFill>
+                <a:latin typeface="Segoe UI"/>
+                <a:cs typeface="Segoe UI"/>
+              </a:rPr>
+              <a:t xml:space="preserve"> reciprocal: flip the fraction</a:t>
+            </a:r>
+            <a:endParaRPr lang="en-US" sz="1575" dirty="0"/>
+          </a:p>
+        </p:txBody>
+      </p:sp>
+      <p:sp>
+        <p:nvSpPr>
+          <p:cNvPr id="6" name="Shape 6"/>
+          <p:cNvSpPr txBox="1"/>
+          <p:nvPr/>
+        </p:nvSpPr>
+        <p:spPr>
+          <a:xfrm>
+            <a:off x="895350" y="2455926"/>
+            <a:ext cx="4876648" cy="1033272"/>
           </a:xfrm>
           <a:prstGeom prst="roundRect">
             <a:avLst>
@@ -7318,7 +7422,7 @@
               <a:t xml:space="preserve">ANSWER   </a:t>
             </a:r>
             <a:r>
-              <a:rPr lang="en-US" sz="2325" dirty="0">
+              <a:rPr lang="en-US" sz="1425" dirty="0" b="1">
                 <a:solidFill>
                   <a:srgbClr val="16171D"/>
                 </a:solidFill>
@@ -7327,27 +7431,151 @@
               </a:rPr>
               <a:t xml:space="preserve">3/2</a:t>
             </a:r>
-            <a:endParaRPr lang="en-US" sz="2325" dirty="0"/>
-          </a:p>
-        </p:txBody>
-      </p:sp>
-      <p:sp>
-        <p:nvSpPr>
-          <p:cNvPr id="6" name="Shape 6"/>
+            <a:br>
+              <a:rPr lang="en-US" sz="1425" dirty="0">
+                <a:solidFill>
+                  <a:srgbClr val="16171D"/>
+                </a:solidFill>
+                <a:latin typeface="Segoe UI"/>
+                <a:cs typeface="Segoe UI"/>
+              </a:rPr>
+            </a:br>
+            <a:r>
+              <a:rPr lang="en-US" sz="1425" dirty="0" b="1">
+                <a:solidFill>
+                  <a:srgbClr val="16171D"/>
+                </a:solidFill>
+                <a:latin typeface="Segoe UI"/>
+                <a:cs typeface="Segoe UI"/>
+              </a:rPr>
+              <a:t xml:space="preserve">1.</a:t>
+            </a:r>
+            <a:r>
+              <a:rPr lang="en-US" sz="1425" dirty="0">
+                <a:solidFill>
+                  <a:srgbClr val="16171D"/>
+                </a:solidFill>
+                <a:latin typeface="Segoe UI"/>
+                <a:cs typeface="Segoe UI"/>
+              </a:rPr>
+              <a:t xml:space="preserve"> </a:t>
+            </a:r>
+            <a:r>
+              <a:rPr lang="en-US" sz="1425" dirty="0">
+                <a:solidFill>
+                  <a:srgbClr val="16171D"/>
+                </a:solidFill>
+                <a:latin typeface="Cambria"/>
+                <a:cs typeface="Cambria"/>
+              </a:rPr>
+              <a:t xml:space="preserve">⅔</a:t>
+            </a:r>
+            <a:r>
+              <a:rPr lang="en-US" sz="1425" dirty="0">
+                <a:solidFill>
+                  <a:srgbClr val="16171D"/>
+                </a:solidFill>
+                <a:latin typeface="Segoe UI"/>
+                <a:cs typeface="Segoe UI"/>
+              </a:rPr>
+              <a:t xml:space="preserve"> has 2 on top and 3 on the bottom. Flip them: </a:t>
+            </a:r>
+            <a:r>
+              <a:rPr lang="en-US" sz="1425" dirty="0">
+                <a:solidFill>
+                  <a:srgbClr val="16171D"/>
+                </a:solidFill>
+                <a:latin typeface="Cambria"/>
+                <a:cs typeface="Cambria"/>
+              </a:rPr>
+              <a:t xml:space="preserve">3/2</a:t>
+            </a:r>
+            <a:r>
+              <a:rPr lang="en-US" sz="1425" dirty="0">
+                <a:solidFill>
+                  <a:srgbClr val="16171D"/>
+                </a:solidFill>
+                <a:latin typeface="Segoe UI"/>
+                <a:cs typeface="Segoe UI"/>
+              </a:rPr>
+              <a:t xml:space="preserve">.</a:t>
+            </a:r>
+            <a:br>
+              <a:rPr lang="en-US" sz="1425" dirty="0">
+                <a:solidFill>
+                  <a:srgbClr val="16171D"/>
+                </a:solidFill>
+                <a:latin typeface="Segoe UI"/>
+                <a:cs typeface="Segoe UI"/>
+              </a:rPr>
+            </a:br>
+            <a:r>
+              <a:rPr lang="en-US" sz="1425" dirty="0" b="1">
+                <a:solidFill>
+                  <a:srgbClr val="16171D"/>
+                </a:solidFill>
+                <a:latin typeface="Segoe UI"/>
+                <a:cs typeface="Segoe UI"/>
+              </a:rPr>
+              <a:t xml:space="preserve">2.</a:t>
+            </a:r>
+            <a:r>
+              <a:rPr lang="en-US" sz="1425" dirty="0">
+                <a:solidFill>
+                  <a:srgbClr val="16171D"/>
+                </a:solidFill>
+                <a:latin typeface="Segoe UI"/>
+                <a:cs typeface="Segoe UI"/>
+              </a:rPr>
+              <a:t xml:space="preserve"> Check: </a:t>
+            </a:r>
+            <a:r>
+              <a:rPr lang="en-US" sz="1425" dirty="0">
+                <a:solidFill>
+                  <a:srgbClr val="16171D"/>
+                </a:solidFill>
+                <a:latin typeface="Cambria"/>
+                <a:cs typeface="Cambria"/>
+              </a:rPr>
+              <a:t xml:space="preserve">⅔ · 3/2 = 1</a:t>
+            </a:r>
+            <a:r>
+              <a:rPr lang="en-US" sz="1425" dirty="0">
+                <a:solidFill>
+                  <a:srgbClr val="16171D"/>
+                </a:solidFill>
+                <a:latin typeface="Segoe UI"/>
+                <a:cs typeface="Segoe UI"/>
+              </a:rPr>
+              <a:t xml:space="preserve">.</a:t>
+            </a:r>
+            <a:endParaRPr lang="en-US" sz="1425" dirty="0"/>
+          </a:p>
+        </p:txBody>
+      </p:sp>
+      <p:sp>
+        <p:nvSpPr>
+          <p:cNvPr id="11" name="Shape 11"/>
           <p:cNvSpPr txBox="1"/>
           <p:nvPr/>
         </p:nvSpPr>
         <p:spPr>
           <a:xfrm>
-            <a:off x="685800" y="2946654"/>
-            <a:ext cx="5143348" cy="946404"/>
-          </a:xfrm>
-          <a:prstGeom prst="rect">
-            <a:avLst/>
-          </a:prstGeom>
-          <a:noFill/>
-          <a:ln>
-            <a:noFill/>
+            <a:off x="685800" y="3793998"/>
+            <a:ext cx="5295748" cy="2065020"/>
+          </a:xfrm>
+          <a:prstGeom prst="roundRect">
+            <a:avLst>
+              <a:gd name="adj" fmla="val 8000"/>
+            </a:avLst>
+          </a:prstGeom>
+          <a:solidFill>
+            <a:srgbClr val="FFFFFF"/>
+          </a:solidFill>
+          <a:ln w="12700">
+            <a:solidFill>
+              <a:srgbClr val="E3E4EC"/>
+            </a:solidFill>
           </a:ln>
         </p:spPr>
         <p:txBody>
@@ -7361,18 +7589,62 @@
                 <a:spcPct val="100000"/>
               </a:lnSpc>
             </a:pPr>
-            <a:r>
-              <a:rPr lang="en-US" sz="1950" dirty="0">
-                <a:solidFill>
-                  <a:srgbClr val="16171D"/>
-                </a:solidFill>
-                <a:latin typeface="Segoe UI"/>
-                <a:cs typeface="Segoe UI"/>
-              </a:rPr>
-              <a:t xml:space="preserve">2. Rotate the point </a:t>
-            </a:r>
-            <a:r>
-              <a:rPr lang="en-US" sz="1950" dirty="0">
+            <a:endParaRPr lang="en-US" sz="1950" dirty="0"/>
+          </a:p>
+        </p:txBody>
+      </p:sp>
+      <p:sp>
+        <p:nvSpPr>
+          <p:cNvPr id="8" name="Shape 8"/>
+          <p:cNvSpPr txBox="1"/>
+          <p:nvPr/>
+        </p:nvSpPr>
+        <p:spPr>
+          <a:xfrm>
+            <a:off x="895350" y="3965448"/>
+            <a:ext cx="4876648" cy="534924"/>
+          </a:xfrm>
+          <a:prstGeom prst="rect">
+            <a:avLst/>
+          </a:prstGeom>
+          <a:noFill/>
+          <a:ln>
+            <a:noFill/>
+          </a:ln>
+        </p:spPr>
+        <p:txBody>
+          <a:bodyPr wrap="square" lIns="36576" tIns="27432" rIns="36576" bIns="27432" anchor="t">
+            <a:noAutofit/>
+          </a:bodyPr>
+          <a:lstStyle/>
+          <a:p>
+            <a:pPr algn="l">
+              <a:lnSpc>
+                <a:spcPct val="100000"/>
+              </a:lnSpc>
+            </a:pPr>
+            <a:r>
+              <a:rPr lang="en-US" sz="1575" dirty="0" b="1">
+                <a:solidFill>
+                  <a:srgbClr val="16171D"/>
+                </a:solidFill>
+                <a:latin typeface="Segoe UI"/>
+                <a:cs typeface="Segoe UI"/>
+              </a:rPr>
+              <a:t xml:space="preserve">2.</a:t>
+            </a:r>
+            <a:r>
+              <a:rPr lang="en-US" sz="1575" dirty="0">
+                <a:solidFill>
+                  <a:srgbClr val="16171D"/>
+                </a:solidFill>
+                <a:latin typeface="Segoe UI"/>
+                <a:cs typeface="Segoe UI"/>
+              </a:rPr>
+              <a:t xml:space="preserve"> Rotate the point </a:t>
+            </a:r>
+            <a:r>
+              <a:rPr lang="en-US" sz="1575" dirty="0">
                 <a:solidFill>
                   <a:srgbClr val="16171D"/>
                 </a:solidFill>
@@ -7382,39 +7654,173 @@
               <a:t xml:space="preserve">(8, 5)</a:t>
             </a:r>
             <a:r>
-              <a:rPr lang="en-US" sz="1950" dirty="0">
-                <a:solidFill>
-                  <a:srgbClr val="16171D"/>
-                </a:solidFill>
-                <a:latin typeface="Segoe UI"/>
-                <a:cs typeface="Segoe UI"/>
-              </a:rPr>
-              <a:t xml:space="preserve"> 90° counterclockwise about the origin. Where does it go? </a:t>
-            </a:r>
-            <a:r>
               <a:rPr lang="en-US" sz="1575" dirty="0">
                 <a:solidFill>
-                  <a:srgbClr val="5F6272"/>
-                </a:solidFill>
-                <a:latin typeface="Segoe UI"/>
-                <a:cs typeface="Segoe UI"/>
-              </a:rPr>
-              <a:t xml:space="preserve">(SE p. 306)</a:t>
-            </a:r>
-            <a:endParaRPr lang="en-US" sz="1950" dirty="0"/>
-          </a:p>
-        </p:txBody>
-      </p:sp>
-      <p:sp>
-        <p:nvSpPr>
-          <p:cNvPr id="7" name="Shape 7"/>
+                  <a:srgbClr val="16171D"/>
+                </a:solidFill>
+                <a:latin typeface="Segoe UI"/>
+                <a:cs typeface="Segoe UI"/>
+              </a:rPr>
+              <a:t xml:space="preserve"> 90° counterclockwise about the origin. Where does it go?</a:t>
+            </a:r>
+            <a:endParaRPr lang="en-US" sz="1575" dirty="0"/>
+          </a:p>
+        </p:txBody>
+      </p:sp>
+      <p:sp>
+        <p:nvSpPr>
+          <p:cNvPr id="9" name="Shape 9"/>
           <p:cNvSpPr txBox="1"/>
           <p:nvPr/>
         </p:nvSpPr>
         <p:spPr>
           <a:xfrm>
-            <a:off x="685800" y="4026408"/>
-            <a:ext cx="3073847" cy="518922"/>
+            <a:off x="895350" y="4538472"/>
+            <a:ext cx="4876648" cy="294894"/>
+          </a:xfrm>
+          <a:prstGeom prst="rect">
+            <a:avLst/>
+          </a:prstGeom>
+          <a:noFill/>
+          <a:ln>
+            <a:noFill/>
+          </a:ln>
+        </p:spPr>
+        <p:txBody>
+          <a:bodyPr wrap="square" lIns="36576" tIns="27432" rIns="36576" bIns="27432" anchor="t">
+            <a:noAutofit/>
+          </a:bodyPr>
+          <a:lstStyle/>
+          <a:p>
+            <a:pPr algn="l">
+              <a:lnSpc>
+                <a:spcPct val="100000"/>
+              </a:lnSpc>
+            </a:pPr>
+            <a:r>
+              <a:rPr lang="en-US" sz="1575" dirty="0" b="1">
+                <a:solidFill>
+                  <a:srgbClr val="16171D"/>
+                </a:solidFill>
+                <a:latin typeface="Segoe UI"/>
+                <a:cs typeface="Segoe UI"/>
+              </a:rPr>
+              <a:t xml:space="preserve">Formula:</a:t>
+            </a:r>
+            <a:r>
+              <a:rPr lang="en-US" sz="1575" dirty="0">
+                <a:solidFill>
+                  <a:srgbClr val="16171D"/>
+                </a:solidFill>
+                <a:latin typeface="Segoe UI"/>
+                <a:cs typeface="Segoe UI"/>
+              </a:rPr>
+              <a:t xml:space="preserve"> 90° counterclockwise: </a:t>
+            </a:r>
+            <a:r>
+              <a:rPr lang="en-US" sz="1575" dirty="0">
+                <a:solidFill>
+                  <a:srgbClr val="16171D"/>
+                </a:solidFill>
+                <a:latin typeface="Cambria"/>
+                <a:cs typeface="Cambria"/>
+              </a:rPr>
+              <a:t xml:space="preserve">(</a:t>
+            </a:r>
+            <a:r>
+              <a:rPr lang="en-US" sz="1575" dirty="0" i="1">
+                <a:solidFill>
+                  <a:srgbClr val="16171D"/>
+                </a:solidFill>
+                <a:latin typeface="Cambria"/>
+                <a:cs typeface="Cambria"/>
+              </a:rPr>
+              <a:t xml:space="preserve">x</a:t>
+            </a:r>
+            <a:r>
+              <a:rPr lang="en-US" sz="1575" dirty="0">
+                <a:solidFill>
+                  <a:srgbClr val="16171D"/>
+                </a:solidFill>
+                <a:latin typeface="Cambria"/>
+                <a:cs typeface="Cambria"/>
+              </a:rPr>
+              <a:t xml:space="preserve">, </a:t>
+            </a:r>
+            <a:r>
+              <a:rPr lang="en-US" sz="1575" dirty="0" i="1">
+                <a:solidFill>
+                  <a:srgbClr val="16171D"/>
+                </a:solidFill>
+                <a:latin typeface="Cambria"/>
+                <a:cs typeface="Cambria"/>
+              </a:rPr>
+              <a:t xml:space="preserve">y</a:t>
+            </a:r>
+            <a:r>
+              <a:rPr lang="en-US" sz="1575" dirty="0">
+                <a:solidFill>
+                  <a:srgbClr val="16171D"/>
+                </a:solidFill>
+                <a:latin typeface="Cambria"/>
+                <a:cs typeface="Cambria"/>
+              </a:rPr>
+              <a:t xml:space="preserve">) → (−</a:t>
+            </a:r>
+            <a:r>
+              <a:rPr lang="en-US" sz="1575" dirty="0" i="1">
+                <a:solidFill>
+                  <a:srgbClr val="16171D"/>
+                </a:solidFill>
+                <a:latin typeface="Cambria"/>
+                <a:cs typeface="Cambria"/>
+              </a:rPr>
+              <a:t xml:space="preserve">y</a:t>
+            </a:r>
+            <a:r>
+              <a:rPr lang="en-US" sz="1575" dirty="0">
+                <a:solidFill>
+                  <a:srgbClr val="16171D"/>
+                </a:solidFill>
+                <a:latin typeface="Cambria"/>
+                <a:cs typeface="Cambria"/>
+              </a:rPr>
+              <a:t xml:space="preserve">, </a:t>
+            </a:r>
+            <a:r>
+              <a:rPr lang="en-US" sz="1575" dirty="0" i="1">
+                <a:solidFill>
+                  <a:srgbClr val="16171D"/>
+                </a:solidFill>
+                <a:latin typeface="Cambria"/>
+                <a:cs typeface="Cambria"/>
+              </a:rPr>
+              <a:t xml:space="preserve">x</a:t>
+            </a:r>
+            <a:r>
+              <a:rPr lang="en-US" sz="1575" dirty="0">
+                <a:solidFill>
+                  <a:srgbClr val="16171D"/>
+                </a:solidFill>
+                <a:latin typeface="Cambria"/>
+                <a:cs typeface="Cambria"/>
+              </a:rPr>
+              <a:t xml:space="preserve">)</a:t>
+            </a:r>
+            <a:endParaRPr lang="en-US" sz="1575" dirty="0"/>
+          </a:p>
+        </p:txBody>
+      </p:sp>
+      <p:sp>
+        <p:nvSpPr>
+          <p:cNvPr id="10" name="Shape 10"/>
+          <p:cNvSpPr txBox="1"/>
+          <p:nvPr/>
+        </p:nvSpPr>
+        <p:spPr>
+          <a:xfrm>
+            <a:off x="895350" y="4871466"/>
+            <a:ext cx="2431835" cy="816102"/>
           </a:xfrm>
           <a:prstGeom prst="roundRect">
             <a:avLst>
@@ -7450,7 +7856,7 @@
               <a:t xml:space="preserve">ANSWER   </a:t>
             </a:r>
             <a:r>
-              <a:rPr lang="en-US" sz="2325" dirty="0">
+              <a:rPr lang="en-US" sz="1425" dirty="0" b="1">
                 <a:solidFill>
                   <a:srgbClr val="16171D"/>
                 </a:solidFill>
@@ -7459,27 +7865,211 @@
               </a:rPr>
               <a:t xml:space="preserve">(−5, 8)</a:t>
             </a:r>
-            <a:endParaRPr lang="en-US" sz="2325" dirty="0"/>
-          </a:p>
-        </p:txBody>
-      </p:sp>
-      <p:sp>
-        <p:nvSpPr>
-          <p:cNvPr id="8" name="Shape 8"/>
+            <a:br>
+              <a:rPr lang="en-US" sz="1425" dirty="0">
+                <a:solidFill>
+                  <a:srgbClr val="16171D"/>
+                </a:solidFill>
+                <a:latin typeface="Segoe UI"/>
+                <a:cs typeface="Segoe UI"/>
+              </a:rPr>
+            </a:br>
+            <a:r>
+              <a:rPr lang="en-US" sz="1425" dirty="0" b="1">
+                <a:solidFill>
+                  <a:srgbClr val="16171D"/>
+                </a:solidFill>
+                <a:latin typeface="Segoe UI"/>
+                <a:cs typeface="Segoe UI"/>
+              </a:rPr>
+              <a:t xml:space="preserve">1.</a:t>
+            </a:r>
+            <a:r>
+              <a:rPr lang="en-US" sz="1425" dirty="0">
+                <a:solidFill>
+                  <a:srgbClr val="16171D"/>
+                </a:solidFill>
+                <a:latin typeface="Segoe UI"/>
+                <a:cs typeface="Segoe UI"/>
+              </a:rPr>
+              <a:t xml:space="preserve"> </a:t>
+            </a:r>
+            <a:r>
+              <a:rPr lang="en-US" sz="1425" dirty="0" i="1">
+                <a:solidFill>
+                  <a:srgbClr val="16171D"/>
+                </a:solidFill>
+                <a:latin typeface="Cambria"/>
+                <a:cs typeface="Cambria"/>
+              </a:rPr>
+              <a:t xml:space="preserve">x</a:t>
+            </a:r>
+            <a:r>
+              <a:rPr lang="en-US" sz="1425" dirty="0">
+                <a:solidFill>
+                  <a:srgbClr val="16171D"/>
+                </a:solidFill>
+                <a:latin typeface="Cambria"/>
+                <a:cs typeface="Cambria"/>
+              </a:rPr>
+              <a:t xml:space="preserve"> = 8</a:t>
+            </a:r>
+            <a:r>
+              <a:rPr lang="en-US" sz="1425" dirty="0">
+                <a:solidFill>
+                  <a:srgbClr val="16171D"/>
+                </a:solidFill>
+                <a:latin typeface="Segoe UI"/>
+                <a:cs typeface="Segoe UI"/>
+              </a:rPr>
+              <a:t xml:space="preserve"> and </a:t>
+            </a:r>
+            <a:r>
+              <a:rPr lang="en-US" sz="1425" dirty="0" i="1">
+                <a:solidFill>
+                  <a:srgbClr val="16171D"/>
+                </a:solidFill>
+                <a:latin typeface="Cambria"/>
+                <a:cs typeface="Cambria"/>
+              </a:rPr>
+              <a:t xml:space="preserve">y</a:t>
+            </a:r>
+            <a:r>
+              <a:rPr lang="en-US" sz="1425" dirty="0">
+                <a:solidFill>
+                  <a:srgbClr val="16171D"/>
+                </a:solidFill>
+                <a:latin typeface="Cambria"/>
+                <a:cs typeface="Cambria"/>
+              </a:rPr>
+              <a:t xml:space="preserve"> = 5</a:t>
+            </a:r>
+            <a:r>
+              <a:rPr lang="en-US" sz="1425" dirty="0">
+                <a:solidFill>
+                  <a:srgbClr val="16171D"/>
+                </a:solidFill>
+                <a:latin typeface="Segoe UI"/>
+                <a:cs typeface="Segoe UI"/>
+              </a:rPr>
+              <a:t xml:space="preserve">.</a:t>
+            </a:r>
+            <a:br>
+              <a:rPr lang="en-US" sz="1425" dirty="0">
+                <a:solidFill>
+                  <a:srgbClr val="16171D"/>
+                </a:solidFill>
+                <a:latin typeface="Segoe UI"/>
+                <a:cs typeface="Segoe UI"/>
+              </a:rPr>
+            </a:br>
+            <a:r>
+              <a:rPr lang="en-US" sz="1425" dirty="0" b="1">
+                <a:solidFill>
+                  <a:srgbClr val="16171D"/>
+                </a:solidFill>
+                <a:latin typeface="Segoe UI"/>
+                <a:cs typeface="Segoe UI"/>
+              </a:rPr>
+              <a:t xml:space="preserve">2.</a:t>
+            </a:r>
+            <a:r>
+              <a:rPr lang="en-US" sz="1425" dirty="0">
+                <a:solidFill>
+                  <a:srgbClr val="16171D"/>
+                </a:solidFill>
+                <a:latin typeface="Segoe UI"/>
+                <a:cs typeface="Segoe UI"/>
+              </a:rPr>
+              <a:t xml:space="preserve"> </a:t>
+            </a:r>
+            <a:r>
+              <a:rPr lang="en-US" sz="1425" dirty="0">
+                <a:solidFill>
+                  <a:srgbClr val="16171D"/>
+                </a:solidFill>
+                <a:latin typeface="Cambria"/>
+                <a:cs typeface="Cambria"/>
+              </a:rPr>
+              <a:t xml:space="preserve">(−</a:t>
+            </a:r>
+            <a:r>
+              <a:rPr lang="en-US" sz="1425" dirty="0" i="1">
+                <a:solidFill>
+                  <a:srgbClr val="16171D"/>
+                </a:solidFill>
+                <a:latin typeface="Cambria"/>
+                <a:cs typeface="Cambria"/>
+              </a:rPr>
+              <a:t xml:space="preserve">y</a:t>
+            </a:r>
+            <a:r>
+              <a:rPr lang="en-US" sz="1425" dirty="0">
+                <a:solidFill>
+                  <a:srgbClr val="16171D"/>
+                </a:solidFill>
+                <a:latin typeface="Cambria"/>
+                <a:cs typeface="Cambria"/>
+              </a:rPr>
+              <a:t xml:space="preserve">, </a:t>
+            </a:r>
+            <a:r>
+              <a:rPr lang="en-US" sz="1425" dirty="0" i="1">
+                <a:solidFill>
+                  <a:srgbClr val="16171D"/>
+                </a:solidFill>
+                <a:latin typeface="Cambria"/>
+                <a:cs typeface="Cambria"/>
+              </a:rPr>
+              <a:t xml:space="preserve">x</a:t>
+            </a:r>
+            <a:r>
+              <a:rPr lang="en-US" sz="1425" dirty="0">
+                <a:solidFill>
+                  <a:srgbClr val="16171D"/>
+                </a:solidFill>
+                <a:latin typeface="Cambria"/>
+                <a:cs typeface="Cambria"/>
+              </a:rPr>
+              <a:t xml:space="preserve">) = (−5, 8)</a:t>
+            </a:r>
+            <a:r>
+              <a:rPr lang="en-US" sz="1425" dirty="0">
+                <a:solidFill>
+                  <a:srgbClr val="16171D"/>
+                </a:solidFill>
+                <a:latin typeface="Segoe UI"/>
+                <a:cs typeface="Segoe UI"/>
+              </a:rPr>
+              <a:t xml:space="preserve">.</a:t>
+            </a:r>
+            <a:endParaRPr lang="en-US" sz="1425" dirty="0"/>
+          </a:p>
+        </p:txBody>
+      </p:sp>
+      <p:sp>
+        <p:nvSpPr>
+          <p:cNvPr id="15" name="Shape 15"/>
           <p:cNvSpPr txBox="1"/>
           <p:nvPr/>
         </p:nvSpPr>
         <p:spPr>
           <a:xfrm>
-            <a:off x="6362548" y="1675638"/>
-            <a:ext cx="5143348" cy="649224"/>
-          </a:xfrm>
-          <a:prstGeom prst="rect">
-            <a:avLst/>
-          </a:prstGeom>
-          <a:noFill/>
-          <a:ln>
-            <a:noFill/>
+            <a:off x="6210148" y="1618488"/>
+            <a:ext cx="5295748" cy="2282190"/>
+          </a:xfrm>
+          <a:prstGeom prst="roundRect">
+            <a:avLst>
+              <a:gd name="adj" fmla="val 8000"/>
+            </a:avLst>
+          </a:prstGeom>
+          <a:solidFill>
+            <a:srgbClr val="FFFFFF"/>
+          </a:solidFill>
+          <a:ln w="12700">
+            <a:solidFill>
+              <a:srgbClr val="E3E4EC"/>
+            </a:solidFill>
           </a:ln>
         </p:spPr>
         <p:txBody>
@@ -7493,18 +8083,62 @@
                 <a:spcPct val="100000"/>
               </a:lnSpc>
             </a:pPr>
-            <a:r>
-              <a:rPr lang="en-US" sz="1950" dirty="0">
-                <a:solidFill>
-                  <a:srgbClr val="16171D"/>
-                </a:solidFill>
-                <a:latin typeface="Segoe UI"/>
-                <a:cs typeface="Segoe UI"/>
-              </a:rPr>
-              <a:t xml:space="preserve">3. What is the slope of the segment from </a:t>
-            </a:r>
-            <a:r>
-              <a:rPr lang="en-US" sz="1950" dirty="0">
+            <a:endParaRPr lang="en-US" sz="1950" dirty="0"/>
+          </a:p>
+        </p:txBody>
+      </p:sp>
+      <p:sp>
+        <p:nvSpPr>
+          <p:cNvPr id="12" name="Shape 12"/>
+          <p:cNvSpPr txBox="1"/>
+          <p:nvPr/>
+        </p:nvSpPr>
+        <p:spPr>
+          <a:xfrm>
+            <a:off x="6419698" y="1789938"/>
+            <a:ext cx="4876648" cy="534924"/>
+          </a:xfrm>
+          <a:prstGeom prst="rect">
+            <a:avLst/>
+          </a:prstGeom>
+          <a:noFill/>
+          <a:ln>
+            <a:noFill/>
+          </a:ln>
+        </p:spPr>
+        <p:txBody>
+          <a:bodyPr wrap="square" lIns="36576" tIns="27432" rIns="36576" bIns="27432" anchor="t">
+            <a:noAutofit/>
+          </a:bodyPr>
+          <a:lstStyle/>
+          <a:p>
+            <a:pPr algn="l">
+              <a:lnSpc>
+                <a:spcPct val="100000"/>
+              </a:lnSpc>
+            </a:pPr>
+            <a:r>
+              <a:rPr lang="en-US" sz="1575" dirty="0" b="1">
+                <a:solidFill>
+                  <a:srgbClr val="16171D"/>
+                </a:solidFill>
+                <a:latin typeface="Segoe UI"/>
+                <a:cs typeface="Segoe UI"/>
+              </a:rPr>
+              <a:t xml:space="preserve">3.</a:t>
+            </a:r>
+            <a:r>
+              <a:rPr lang="en-US" sz="1575" dirty="0">
+                <a:solidFill>
+                  <a:srgbClr val="16171D"/>
+                </a:solidFill>
+                <a:latin typeface="Segoe UI"/>
+                <a:cs typeface="Segoe UI"/>
+              </a:rPr>
+              <a:t xml:space="preserve"> What is the slope of the segment from </a:t>
+            </a:r>
+            <a:r>
+              <a:rPr lang="en-US" sz="1575" dirty="0">
                 <a:solidFill>
                   <a:srgbClr val="16171D"/>
                 </a:solidFill>
@@ -7514,7 +8148,7 @@
               <a:t xml:space="preserve">(0, 0)</a:t>
             </a:r>
             <a:r>
-              <a:rPr lang="en-US" sz="1950" dirty="0">
+              <a:rPr lang="en-US" sz="1575" dirty="0">
                 <a:solidFill>
                   <a:srgbClr val="16171D"/>
                 </a:solidFill>
@@ -7524,7 +8158,7 @@
               <a:t xml:space="preserve"> to </a:t>
             </a:r>
             <a:r>
-              <a:rPr lang="en-US" sz="1950" dirty="0">
+              <a:rPr lang="en-US" sz="1575" dirty="0">
                 <a:solidFill>
                   <a:srgbClr val="16171D"/>
                 </a:solidFill>
@@ -7534,39 +8168,183 @@
               <a:t xml:space="preserve">(8, 5)</a:t>
             </a:r>
             <a:r>
-              <a:rPr lang="en-US" sz="1950" dirty="0">
-                <a:solidFill>
-                  <a:srgbClr val="16171D"/>
-                </a:solidFill>
-                <a:latin typeface="Segoe UI"/>
-                <a:cs typeface="Segoe UI"/>
-              </a:rPr>
-              <a:t xml:space="preserve">? </a:t>
-            </a:r>
-            <a:r>
               <a:rPr lang="en-US" sz="1575" dirty="0">
                 <a:solidFill>
-                  <a:srgbClr val="5F6272"/>
-                </a:solidFill>
-                <a:latin typeface="Segoe UI"/>
-                <a:cs typeface="Segoe UI"/>
-              </a:rPr>
-              <a:t xml:space="preserve">(SE p. 306)</a:t>
-            </a:r>
-            <a:endParaRPr lang="en-US" sz="1950" dirty="0"/>
-          </a:p>
-        </p:txBody>
-      </p:sp>
-      <p:sp>
-        <p:nvSpPr>
-          <p:cNvPr id="9" name="Shape 9"/>
+                  <a:srgbClr val="16171D"/>
+                </a:solidFill>
+                <a:latin typeface="Segoe UI"/>
+                <a:cs typeface="Segoe UI"/>
+              </a:rPr>
+              <a:t xml:space="preserve">?</a:t>
+            </a:r>
+            <a:endParaRPr lang="en-US" sz="1575" dirty="0"/>
+          </a:p>
+        </p:txBody>
+      </p:sp>
+      <p:sp>
+        <p:nvSpPr>
+          <p:cNvPr id="13" name="Shape 13"/>
           <p:cNvSpPr txBox="1"/>
           <p:nvPr/>
         </p:nvSpPr>
         <p:spPr>
           <a:xfrm>
-            <a:off x="6362548" y="2458212"/>
-            <a:ext cx="2410541" cy="518922"/>
+            <a:off x="6419698" y="2362962"/>
+            <a:ext cx="4876648" cy="294894"/>
+          </a:xfrm>
+          <a:prstGeom prst="rect">
+            <a:avLst/>
+          </a:prstGeom>
+          <a:noFill/>
+          <a:ln>
+            <a:noFill/>
+          </a:ln>
+        </p:spPr>
+        <p:txBody>
+          <a:bodyPr wrap="square" lIns="36576" tIns="27432" rIns="36576" bIns="27432" anchor="t">
+            <a:noAutofit/>
+          </a:bodyPr>
+          <a:lstStyle/>
+          <a:p>
+            <a:pPr algn="l">
+              <a:lnSpc>
+                <a:spcPct val="100000"/>
+              </a:lnSpc>
+            </a:pPr>
+            <a:r>
+              <a:rPr lang="en-US" sz="1575" dirty="0" b="1">
+                <a:solidFill>
+                  <a:srgbClr val="16171D"/>
+                </a:solidFill>
+                <a:latin typeface="Segoe UI"/>
+                <a:cs typeface="Segoe UI"/>
+              </a:rPr>
+              <a:t xml:space="preserve">Formula:</a:t>
+            </a:r>
+            <a:r>
+              <a:rPr lang="en-US" sz="1575" dirty="0">
+                <a:solidFill>
+                  <a:srgbClr val="16171D"/>
+                </a:solidFill>
+                <a:latin typeface="Segoe UI"/>
+                <a:cs typeface="Segoe UI"/>
+              </a:rPr>
+              <a:t xml:space="preserve"> </a:t>
+            </a:r>
+            <a:r>
+              <a:rPr lang="en-US" sz="1575" dirty="0" i="1">
+                <a:solidFill>
+                  <a:srgbClr val="16171D"/>
+                </a:solidFill>
+                <a:latin typeface="Cambria"/>
+                <a:cs typeface="Cambria"/>
+              </a:rPr>
+              <a:t xml:space="preserve">m</a:t>
+            </a:r>
+            <a:r>
+              <a:rPr lang="en-US" sz="1575" dirty="0">
+                <a:solidFill>
+                  <a:srgbClr val="16171D"/>
+                </a:solidFill>
+                <a:latin typeface="Cambria"/>
+                <a:cs typeface="Cambria"/>
+              </a:rPr>
+              <a:t xml:space="preserve"> = (</a:t>
+            </a:r>
+            <a:r>
+              <a:rPr lang="en-US" sz="1575" dirty="0" i="1">
+                <a:solidFill>
+                  <a:srgbClr val="16171D"/>
+                </a:solidFill>
+                <a:latin typeface="Cambria"/>
+                <a:cs typeface="Cambria"/>
+              </a:rPr>
+              <a:t xml:space="preserve">y</a:t>
+            </a:r>
+            <a:r>
+              <a:rPr lang="en-US" sz="1575" dirty="0">
+                <a:solidFill>
+                  <a:srgbClr val="16171D"/>
+                </a:solidFill>
+                <a:latin typeface="Cambria"/>
+                <a:cs typeface="Cambria"/>
+              </a:rPr>
+              <a:t xml:space="preserve">₂ − </a:t>
+            </a:r>
+            <a:r>
+              <a:rPr lang="en-US" sz="1575" dirty="0" i="1">
+                <a:solidFill>
+                  <a:srgbClr val="16171D"/>
+                </a:solidFill>
+                <a:latin typeface="Cambria"/>
+                <a:cs typeface="Cambria"/>
+              </a:rPr>
+              <a:t xml:space="preserve">y</a:t>
+            </a:r>
+            <a:r>
+              <a:rPr lang="en-US" sz="1575" dirty="0">
+                <a:solidFill>
+                  <a:srgbClr val="16171D"/>
+                </a:solidFill>
+                <a:latin typeface="Cambria"/>
+                <a:cs typeface="Cambria"/>
+              </a:rPr>
+              <a:t xml:space="preserve">₁) ÷ (</a:t>
+            </a:r>
+            <a:r>
+              <a:rPr lang="en-US" sz="1575" dirty="0" i="1">
+                <a:solidFill>
+                  <a:srgbClr val="16171D"/>
+                </a:solidFill>
+                <a:latin typeface="Cambria"/>
+                <a:cs typeface="Cambria"/>
+              </a:rPr>
+              <a:t xml:space="preserve">x</a:t>
+            </a:r>
+            <a:r>
+              <a:rPr lang="en-US" sz="1575" dirty="0">
+                <a:solidFill>
+                  <a:srgbClr val="16171D"/>
+                </a:solidFill>
+                <a:latin typeface="Cambria"/>
+                <a:cs typeface="Cambria"/>
+              </a:rPr>
+              <a:t xml:space="preserve">₂ − </a:t>
+            </a:r>
+            <a:r>
+              <a:rPr lang="en-US" sz="1575" dirty="0" i="1">
+                <a:solidFill>
+                  <a:srgbClr val="16171D"/>
+                </a:solidFill>
+                <a:latin typeface="Cambria"/>
+                <a:cs typeface="Cambria"/>
+              </a:rPr>
+              <a:t xml:space="preserve">x</a:t>
+            </a:r>
+            <a:r>
+              <a:rPr lang="en-US" sz="1575" dirty="0">
+                <a:solidFill>
+                  <a:srgbClr val="16171D"/>
+                </a:solidFill>
+                <a:latin typeface="Cambria"/>
+                <a:cs typeface="Cambria"/>
+              </a:rPr>
+              <a:t xml:space="preserve">₁)</a:t>
+            </a:r>
+            <a:endParaRPr lang="en-US" sz="1575" dirty="0"/>
+          </a:p>
+        </p:txBody>
+      </p:sp>
+      <p:sp>
+        <p:nvSpPr>
+          <p:cNvPr id="14" name="Shape 14"/>
+          <p:cNvSpPr txBox="1"/>
+          <p:nvPr/>
+        </p:nvSpPr>
+        <p:spPr>
+          <a:xfrm>
+            <a:off x="6419698" y="2695956"/>
+            <a:ext cx="3868415" cy="1033272"/>
           </a:xfrm>
           <a:prstGeom prst="roundRect">
             <a:avLst>
@@ -7602,7 +8380,7 @@
               <a:t xml:space="preserve">ANSWER   </a:t>
             </a:r>
             <a:r>
-              <a:rPr lang="en-US" sz="2325" dirty="0">
+              <a:rPr lang="en-US" sz="1425" dirty="0" b="1">
                 <a:solidFill>
                   <a:srgbClr val="16171D"/>
                 </a:solidFill>
@@ -7611,27 +8389,220 @@
               </a:rPr>
               <a:t xml:space="preserve">5/8</a:t>
             </a:r>
-            <a:endParaRPr lang="en-US" sz="2325" dirty="0"/>
-          </a:p>
-        </p:txBody>
-      </p:sp>
-      <p:sp>
-        <p:nvSpPr>
-          <p:cNvPr id="10" name="Shape 10"/>
+            <a:br>
+              <a:rPr lang="en-US" sz="1425" dirty="0">
+                <a:solidFill>
+                  <a:srgbClr val="16171D"/>
+                </a:solidFill>
+                <a:latin typeface="Segoe UI"/>
+                <a:cs typeface="Segoe UI"/>
+              </a:rPr>
+            </a:br>
+            <a:r>
+              <a:rPr lang="en-US" sz="1425" dirty="0" b="1">
+                <a:solidFill>
+                  <a:srgbClr val="16171D"/>
+                </a:solidFill>
+                <a:latin typeface="Segoe UI"/>
+                <a:cs typeface="Segoe UI"/>
+              </a:rPr>
+              <a:t xml:space="preserve">1.</a:t>
+            </a:r>
+            <a:r>
+              <a:rPr lang="en-US" sz="1425" dirty="0">
+                <a:solidFill>
+                  <a:srgbClr val="16171D"/>
+                </a:solidFill>
+                <a:latin typeface="Segoe UI"/>
+                <a:cs typeface="Segoe UI"/>
+              </a:rPr>
+              <a:t xml:space="preserve"> Subtract the </a:t>
+            </a:r>
+            <a:r>
+              <a:rPr lang="en-US" sz="1425" dirty="0" i="1">
+                <a:solidFill>
+                  <a:srgbClr val="16171D"/>
+                </a:solidFill>
+                <a:latin typeface="Cambria"/>
+                <a:cs typeface="Cambria"/>
+              </a:rPr>
+              <a:t xml:space="preserve">y</a:t>
+            </a:r>
+            <a:r>
+              <a:rPr lang="en-US" sz="1425" dirty="0">
+                <a:solidFill>
+                  <a:srgbClr val="16171D"/>
+                </a:solidFill>
+                <a:latin typeface="Segoe UI"/>
+                <a:cs typeface="Segoe UI"/>
+              </a:rPr>
+              <a:t xml:space="preserve">-values: </a:t>
+            </a:r>
+            <a:r>
+              <a:rPr lang="en-US" sz="1425" dirty="0">
+                <a:solidFill>
+                  <a:srgbClr val="16171D"/>
+                </a:solidFill>
+                <a:latin typeface="Cambria"/>
+                <a:cs typeface="Cambria"/>
+              </a:rPr>
+              <a:t xml:space="preserve">5 − 0 = 5</a:t>
+            </a:r>
+            <a:r>
+              <a:rPr lang="en-US" sz="1425" dirty="0">
+                <a:solidFill>
+                  <a:srgbClr val="16171D"/>
+                </a:solidFill>
+                <a:latin typeface="Segoe UI"/>
+                <a:cs typeface="Segoe UI"/>
+              </a:rPr>
+              <a:t xml:space="preserve">.</a:t>
+            </a:r>
+            <a:br>
+              <a:rPr lang="en-US" sz="1425" dirty="0">
+                <a:solidFill>
+                  <a:srgbClr val="16171D"/>
+                </a:solidFill>
+                <a:latin typeface="Segoe UI"/>
+                <a:cs typeface="Segoe UI"/>
+              </a:rPr>
+            </a:br>
+            <a:r>
+              <a:rPr lang="en-US" sz="1425" dirty="0" b="1">
+                <a:solidFill>
+                  <a:srgbClr val="16171D"/>
+                </a:solidFill>
+                <a:latin typeface="Segoe UI"/>
+                <a:cs typeface="Segoe UI"/>
+              </a:rPr>
+              <a:t xml:space="preserve">2.</a:t>
+            </a:r>
+            <a:r>
+              <a:rPr lang="en-US" sz="1425" dirty="0">
+                <a:solidFill>
+                  <a:srgbClr val="16171D"/>
+                </a:solidFill>
+                <a:latin typeface="Segoe UI"/>
+                <a:cs typeface="Segoe UI"/>
+              </a:rPr>
+              <a:t xml:space="preserve"> Subtract the </a:t>
+            </a:r>
+            <a:r>
+              <a:rPr lang="en-US" sz="1425" dirty="0" i="1">
+                <a:solidFill>
+                  <a:srgbClr val="16171D"/>
+                </a:solidFill>
+                <a:latin typeface="Cambria"/>
+                <a:cs typeface="Cambria"/>
+              </a:rPr>
+              <a:t xml:space="preserve">x</a:t>
+            </a:r>
+            <a:r>
+              <a:rPr lang="en-US" sz="1425" dirty="0">
+                <a:solidFill>
+                  <a:srgbClr val="16171D"/>
+                </a:solidFill>
+                <a:latin typeface="Segoe UI"/>
+                <a:cs typeface="Segoe UI"/>
+              </a:rPr>
+              <a:t xml:space="preserve">-values: </a:t>
+            </a:r>
+            <a:r>
+              <a:rPr lang="en-US" sz="1425" dirty="0">
+                <a:solidFill>
+                  <a:srgbClr val="16171D"/>
+                </a:solidFill>
+                <a:latin typeface="Cambria"/>
+                <a:cs typeface="Cambria"/>
+              </a:rPr>
+              <a:t xml:space="preserve">8 − 0 = 8</a:t>
+            </a:r>
+            <a:r>
+              <a:rPr lang="en-US" sz="1425" dirty="0">
+                <a:solidFill>
+                  <a:srgbClr val="16171D"/>
+                </a:solidFill>
+                <a:latin typeface="Segoe UI"/>
+                <a:cs typeface="Segoe UI"/>
+              </a:rPr>
+              <a:t xml:space="preserve">.</a:t>
+            </a:r>
+            <a:br>
+              <a:rPr lang="en-US" sz="1425" dirty="0">
+                <a:solidFill>
+                  <a:srgbClr val="16171D"/>
+                </a:solidFill>
+                <a:latin typeface="Segoe UI"/>
+                <a:cs typeface="Segoe UI"/>
+              </a:rPr>
+            </a:br>
+            <a:r>
+              <a:rPr lang="en-US" sz="1425" dirty="0" b="1">
+                <a:solidFill>
+                  <a:srgbClr val="16171D"/>
+                </a:solidFill>
+                <a:latin typeface="Segoe UI"/>
+                <a:cs typeface="Segoe UI"/>
+              </a:rPr>
+              <a:t xml:space="preserve">3.</a:t>
+            </a:r>
+            <a:r>
+              <a:rPr lang="en-US" sz="1425" dirty="0">
+                <a:solidFill>
+                  <a:srgbClr val="16171D"/>
+                </a:solidFill>
+                <a:latin typeface="Segoe UI"/>
+                <a:cs typeface="Segoe UI"/>
+              </a:rPr>
+              <a:t xml:space="preserve"> Divide: </a:t>
+            </a:r>
+            <a:r>
+              <a:rPr lang="en-US" sz="1425" dirty="0">
+                <a:solidFill>
+                  <a:srgbClr val="16171D"/>
+                </a:solidFill>
+                <a:latin typeface="Cambria"/>
+                <a:cs typeface="Cambria"/>
+              </a:rPr>
+              <a:t xml:space="preserve">5 ÷ 8 = 5/8</a:t>
+            </a:r>
+            <a:r>
+              <a:rPr lang="en-US" sz="1425" dirty="0">
+                <a:solidFill>
+                  <a:srgbClr val="16171D"/>
+                </a:solidFill>
+                <a:latin typeface="Segoe UI"/>
+                <a:cs typeface="Segoe UI"/>
+              </a:rPr>
+              <a:t xml:space="preserve">.</a:t>
+            </a:r>
+            <a:endParaRPr lang="en-US" sz="1425" dirty="0"/>
+          </a:p>
+        </p:txBody>
+      </p:sp>
+      <p:sp>
+        <p:nvSpPr>
+          <p:cNvPr id="19" name="Shape 19"/>
           <p:cNvSpPr txBox="1"/>
           <p:nvPr/>
         </p:nvSpPr>
         <p:spPr>
           <a:xfrm>
-            <a:off x="6362548" y="3243834"/>
-            <a:ext cx="5143348" cy="352044"/>
-          </a:xfrm>
-          <a:prstGeom prst="rect">
-            <a:avLst/>
-          </a:prstGeom>
-          <a:noFill/>
-          <a:ln>
-            <a:noFill/>
+            <a:off x="6210148" y="4034028"/>
+            <a:ext cx="5295748" cy="2042160"/>
+          </a:xfrm>
+          <a:prstGeom prst="roundRect">
+            <a:avLst>
+              <a:gd name="adj" fmla="val 8000"/>
+            </a:avLst>
+          </a:prstGeom>
+          <a:solidFill>
+            <a:srgbClr val="FFFFFF"/>
+          </a:solidFill>
+          <a:ln w="12700">
+            <a:solidFill>
+              <a:srgbClr val="E3E4EC"/>
+            </a:solidFill>
           </a:ln>
         </p:spPr>
         <p:txBody>
@@ -7645,18 +8616,62 @@
                 <a:spcPct val="100000"/>
               </a:lnSpc>
             </a:pPr>
-            <a:r>
-              <a:rPr lang="en-US" sz="1950" dirty="0">
-                <a:solidFill>
-                  <a:srgbClr val="16171D"/>
-                </a:solidFill>
-                <a:latin typeface="Segoe UI"/>
-                <a:cs typeface="Segoe UI"/>
-              </a:rPr>
-              <a:t xml:space="preserve">4. What is the slope of </a:t>
-            </a:r>
-            <a:r>
-              <a:rPr lang="en-US" sz="1950" dirty="0" i="1">
+            <a:endParaRPr lang="en-US" sz="1950" dirty="0"/>
+          </a:p>
+        </p:txBody>
+      </p:sp>
+      <p:sp>
+        <p:nvSpPr>
+          <p:cNvPr id="16" name="Shape 16"/>
+          <p:cNvSpPr txBox="1"/>
+          <p:nvPr/>
+        </p:nvSpPr>
+        <p:spPr>
+          <a:xfrm>
+            <a:off x="6419698" y="4205478"/>
+            <a:ext cx="4876648" cy="294894"/>
+          </a:xfrm>
+          <a:prstGeom prst="rect">
+            <a:avLst/>
+          </a:prstGeom>
+          <a:noFill/>
+          <a:ln>
+            <a:noFill/>
+          </a:ln>
+        </p:spPr>
+        <p:txBody>
+          <a:bodyPr wrap="square" lIns="36576" tIns="27432" rIns="36576" bIns="27432" anchor="t">
+            <a:noAutofit/>
+          </a:bodyPr>
+          <a:lstStyle/>
+          <a:p>
+            <a:pPr algn="l">
+              <a:lnSpc>
+                <a:spcPct val="100000"/>
+              </a:lnSpc>
+            </a:pPr>
+            <a:r>
+              <a:rPr lang="en-US" sz="1575" dirty="0" b="1">
+                <a:solidFill>
+                  <a:srgbClr val="16171D"/>
+                </a:solidFill>
+                <a:latin typeface="Segoe UI"/>
+                <a:cs typeface="Segoe UI"/>
+              </a:rPr>
+              <a:t xml:space="preserve">4.</a:t>
+            </a:r>
+            <a:r>
+              <a:rPr lang="en-US" sz="1575" dirty="0">
+                <a:solidFill>
+                  <a:srgbClr val="16171D"/>
+                </a:solidFill>
+                <a:latin typeface="Segoe UI"/>
+                <a:cs typeface="Segoe UI"/>
+              </a:rPr>
+              <a:t xml:space="preserve"> What is the slope of </a:t>
+            </a:r>
+            <a:r>
+              <a:rPr lang="en-US" sz="1575" dirty="0" i="1">
                 <a:solidFill>
                   <a:srgbClr val="16171D"/>
                 </a:solidFill>
@@ -7666,7 +8681,7 @@
               <a:t xml:space="preserve">y</a:t>
             </a:r>
             <a:r>
-              <a:rPr lang="en-US" sz="1950" dirty="0">
+              <a:rPr lang="en-US" sz="1575" dirty="0">
                 <a:solidFill>
                   <a:srgbClr val="16171D"/>
                 </a:solidFill>
@@ -7676,7 +8691,7 @@
               <a:t xml:space="preserve"> = −3</a:t>
             </a:r>
             <a:r>
-              <a:rPr lang="en-US" sz="1950" dirty="0" i="1">
+              <a:rPr lang="en-US" sz="1575" dirty="0" i="1">
                 <a:solidFill>
                   <a:srgbClr val="16171D"/>
                 </a:solidFill>
@@ -7686,7 +8701,7 @@
               <a:t xml:space="preserve">x</a:t>
             </a:r>
             <a:r>
-              <a:rPr lang="en-US" sz="1950" dirty="0">
+              <a:rPr lang="en-US" sz="1575" dirty="0">
                 <a:solidFill>
                   <a:srgbClr val="16171D"/>
                 </a:solidFill>
@@ -7696,7 +8711,7 @@
               <a:t xml:space="preserve"> + 5</a:t>
             </a:r>
             <a:r>
-              <a:rPr lang="en-US" sz="1950" dirty="0">
+              <a:rPr lang="en-US" sz="1575" dirty="0">
                 <a:solidFill>
                   <a:srgbClr val="16171D"/>
                 </a:solidFill>
@@ -7705,20 +8720,154 @@
               </a:rPr>
               <a:t xml:space="preserve">?</a:t>
             </a:r>
-            <a:endParaRPr lang="en-US" sz="1950" dirty="0"/>
-          </a:p>
-        </p:txBody>
-      </p:sp>
-      <p:sp>
-        <p:nvSpPr>
-          <p:cNvPr id="11" name="Shape 11"/>
+            <a:endParaRPr lang="en-US" sz="1575" dirty="0"/>
+          </a:p>
+        </p:txBody>
+      </p:sp>
+      <p:sp>
+        <p:nvSpPr>
+          <p:cNvPr id="17" name="Shape 17"/>
           <p:cNvSpPr txBox="1"/>
           <p:nvPr/>
         </p:nvSpPr>
         <p:spPr>
           <a:xfrm>
-            <a:off x="6362548" y="3729228"/>
-            <a:ext cx="2244715" cy="518922"/>
+            <a:off x="6419698" y="4538472"/>
+            <a:ext cx="4876648" cy="294894"/>
+          </a:xfrm>
+          <a:prstGeom prst="rect">
+            <a:avLst/>
+          </a:prstGeom>
+          <a:noFill/>
+          <a:ln>
+            <a:noFill/>
+          </a:ln>
+        </p:spPr>
+        <p:txBody>
+          <a:bodyPr wrap="square" lIns="36576" tIns="27432" rIns="36576" bIns="27432" anchor="t">
+            <a:noAutofit/>
+          </a:bodyPr>
+          <a:lstStyle/>
+          <a:p>
+            <a:pPr algn="l">
+              <a:lnSpc>
+                <a:spcPct val="100000"/>
+              </a:lnSpc>
+            </a:pPr>
+            <a:r>
+              <a:rPr lang="en-US" sz="1575" dirty="0" b="1">
+                <a:solidFill>
+                  <a:srgbClr val="16171D"/>
+                </a:solidFill>
+                <a:latin typeface="Segoe UI"/>
+                <a:cs typeface="Segoe UI"/>
+              </a:rPr>
+              <a:t xml:space="preserve">Formula:</a:t>
+            </a:r>
+            <a:r>
+              <a:rPr lang="en-US" sz="1575" dirty="0">
+                <a:solidFill>
+                  <a:srgbClr val="16171D"/>
+                </a:solidFill>
+                <a:latin typeface="Segoe UI"/>
+                <a:cs typeface="Segoe UI"/>
+              </a:rPr>
+              <a:t xml:space="preserve"> </a:t>
+            </a:r>
+            <a:r>
+              <a:rPr lang="en-US" sz="1575" dirty="0" i="1">
+                <a:solidFill>
+                  <a:srgbClr val="16171D"/>
+                </a:solidFill>
+                <a:latin typeface="Cambria"/>
+                <a:cs typeface="Cambria"/>
+              </a:rPr>
+              <a:t xml:space="preserve">y</a:t>
+            </a:r>
+            <a:r>
+              <a:rPr lang="en-US" sz="1575" dirty="0">
+                <a:solidFill>
+                  <a:srgbClr val="16171D"/>
+                </a:solidFill>
+                <a:latin typeface="Cambria"/>
+                <a:cs typeface="Cambria"/>
+              </a:rPr>
+              <a:t xml:space="preserve"> = </a:t>
+            </a:r>
+            <a:r>
+              <a:rPr lang="en-US" sz="1575" dirty="0" i="1">
+                <a:solidFill>
+                  <a:srgbClr val="16171D"/>
+                </a:solidFill>
+                <a:latin typeface="Cambria"/>
+                <a:cs typeface="Cambria"/>
+              </a:rPr>
+              <a:t xml:space="preserve">m</a:t>
+            </a:r>
+            <a:r>
+              <a:rPr lang="en-US" sz="1575" dirty="0" i="1">
+                <a:solidFill>
+                  <a:srgbClr val="16171D"/>
+                </a:solidFill>
+                <a:latin typeface="Cambria"/>
+                <a:cs typeface="Cambria"/>
+              </a:rPr>
+              <a:t xml:space="preserve">x</a:t>
+            </a:r>
+            <a:r>
+              <a:rPr lang="en-US" sz="1575" dirty="0">
+                <a:solidFill>
+                  <a:srgbClr val="16171D"/>
+                </a:solidFill>
+                <a:latin typeface="Cambria"/>
+                <a:cs typeface="Cambria"/>
+              </a:rPr>
+              <a:t xml:space="preserve"> + </a:t>
+            </a:r>
+            <a:r>
+              <a:rPr lang="en-US" sz="1575" dirty="0" i="1">
+                <a:solidFill>
+                  <a:srgbClr val="16171D"/>
+                </a:solidFill>
+                <a:latin typeface="Cambria"/>
+                <a:cs typeface="Cambria"/>
+              </a:rPr>
+              <a:t xml:space="preserve">b</a:t>
+            </a:r>
+            <a:r>
+              <a:rPr lang="en-US" sz="1575" dirty="0">
+                <a:solidFill>
+                  <a:srgbClr val="16171D"/>
+                </a:solidFill>
+                <a:latin typeface="Segoe UI"/>
+                <a:cs typeface="Segoe UI"/>
+              </a:rPr>
+              <a:t xml:space="preserve">, slope </a:t>
+            </a:r>
+            <a:r>
+              <a:rPr lang="en-US" sz="1575" dirty="0" i="1">
+                <a:solidFill>
+                  <a:srgbClr val="16171D"/>
+                </a:solidFill>
+                <a:latin typeface="Cambria"/>
+                <a:cs typeface="Cambria"/>
+              </a:rPr>
+              <a:t xml:space="preserve">m</a:t>
+            </a:r>
+            <a:endParaRPr lang="en-US" sz="1575" dirty="0"/>
+          </a:p>
+        </p:txBody>
+      </p:sp>
+      <p:sp>
+        <p:nvSpPr>
+          <p:cNvPr id="18" name="Shape 18"/>
+          <p:cNvSpPr txBox="1"/>
+          <p:nvPr/>
+        </p:nvSpPr>
+        <p:spPr>
+          <a:xfrm>
+            <a:off x="6419698" y="4871466"/>
+            <a:ext cx="4876648" cy="1033272"/>
           </a:xfrm>
           <a:prstGeom prst="roundRect">
             <a:avLst>
@@ -7754,7 +8903,7 @@
               <a:t xml:space="preserve">ANSWER   </a:t>
             </a:r>
             <a:r>
-              <a:rPr lang="en-US" sz="2325" dirty="0">
+              <a:rPr lang="en-US" sz="1425" dirty="0" b="1">
                 <a:solidFill>
                   <a:srgbClr val="16171D"/>
                 </a:solidFill>
@@ -7763,13 +8912,271 @@
               </a:rPr>
               <a:t xml:space="preserve">−3</a:t>
             </a:r>
-            <a:endParaRPr lang="en-US" sz="2325" dirty="0"/>
-          </a:p>
-        </p:txBody>
-      </p:sp>
-      <p:sp>
-        <p:nvSpPr>
-          <p:cNvPr id="12" name="Slide Number 12"/>
+            <a:br>
+              <a:rPr lang="en-US" sz="1425" dirty="0">
+                <a:solidFill>
+                  <a:srgbClr val="16171D"/>
+                </a:solidFill>
+                <a:latin typeface="Segoe UI"/>
+                <a:cs typeface="Segoe UI"/>
+              </a:rPr>
+            </a:br>
+            <a:r>
+              <a:rPr lang="en-US" sz="1425" dirty="0" b="1">
+                <a:solidFill>
+                  <a:srgbClr val="16171D"/>
+                </a:solidFill>
+                <a:latin typeface="Segoe UI"/>
+                <a:cs typeface="Segoe UI"/>
+              </a:rPr>
+              <a:t xml:space="preserve">1.</a:t>
+            </a:r>
+            <a:r>
+              <a:rPr lang="en-US" sz="1425" dirty="0">
+                <a:solidFill>
+                  <a:srgbClr val="16171D"/>
+                </a:solidFill>
+                <a:latin typeface="Segoe UI"/>
+                <a:cs typeface="Segoe UI"/>
+              </a:rPr>
+              <a:t xml:space="preserve"> Match </a:t>
+            </a:r>
+            <a:r>
+              <a:rPr lang="en-US" sz="1425" dirty="0" i="1">
+                <a:solidFill>
+                  <a:srgbClr val="16171D"/>
+                </a:solidFill>
+                <a:latin typeface="Cambria"/>
+                <a:cs typeface="Cambria"/>
+              </a:rPr>
+              <a:t xml:space="preserve">y</a:t>
+            </a:r>
+            <a:r>
+              <a:rPr lang="en-US" sz="1425" dirty="0">
+                <a:solidFill>
+                  <a:srgbClr val="16171D"/>
+                </a:solidFill>
+                <a:latin typeface="Cambria"/>
+                <a:cs typeface="Cambria"/>
+              </a:rPr>
+              <a:t xml:space="preserve"> = −3</a:t>
+            </a:r>
+            <a:r>
+              <a:rPr lang="en-US" sz="1425" dirty="0" i="1">
+                <a:solidFill>
+                  <a:srgbClr val="16171D"/>
+                </a:solidFill>
+                <a:latin typeface="Cambria"/>
+                <a:cs typeface="Cambria"/>
+              </a:rPr>
+              <a:t xml:space="preserve">x</a:t>
+            </a:r>
+            <a:r>
+              <a:rPr lang="en-US" sz="1425" dirty="0">
+                <a:solidFill>
+                  <a:srgbClr val="16171D"/>
+                </a:solidFill>
+                <a:latin typeface="Cambria"/>
+                <a:cs typeface="Cambria"/>
+              </a:rPr>
+              <a:t xml:space="preserve"> + 5</a:t>
+            </a:r>
+            <a:r>
+              <a:rPr lang="en-US" sz="1425" dirty="0">
+                <a:solidFill>
+                  <a:srgbClr val="16171D"/>
+                </a:solidFill>
+                <a:latin typeface="Segoe UI"/>
+                <a:cs typeface="Segoe UI"/>
+              </a:rPr>
+              <a:t xml:space="preserve"> to </a:t>
+            </a:r>
+            <a:r>
+              <a:rPr lang="en-US" sz="1425" dirty="0" i="1">
+                <a:solidFill>
+                  <a:srgbClr val="16171D"/>
+                </a:solidFill>
+                <a:latin typeface="Cambria"/>
+                <a:cs typeface="Cambria"/>
+              </a:rPr>
+              <a:t xml:space="preserve">y</a:t>
+            </a:r>
+            <a:r>
+              <a:rPr lang="en-US" sz="1425" dirty="0">
+                <a:solidFill>
+                  <a:srgbClr val="16171D"/>
+                </a:solidFill>
+                <a:latin typeface="Cambria"/>
+                <a:cs typeface="Cambria"/>
+              </a:rPr>
+              <a:t xml:space="preserve"> = </a:t>
+            </a:r>
+            <a:r>
+              <a:rPr lang="en-US" sz="1425" dirty="0" i="1">
+                <a:solidFill>
+                  <a:srgbClr val="16171D"/>
+                </a:solidFill>
+                <a:latin typeface="Cambria"/>
+                <a:cs typeface="Cambria"/>
+              </a:rPr>
+              <a:t xml:space="preserve">m</a:t>
+            </a:r>
+            <a:r>
+              <a:rPr lang="en-US" sz="1425" dirty="0" i="1">
+                <a:solidFill>
+                  <a:srgbClr val="16171D"/>
+                </a:solidFill>
+                <a:latin typeface="Cambria"/>
+                <a:cs typeface="Cambria"/>
+              </a:rPr>
+              <a:t xml:space="preserve">x</a:t>
+            </a:r>
+            <a:r>
+              <a:rPr lang="en-US" sz="1425" dirty="0">
+                <a:solidFill>
+                  <a:srgbClr val="16171D"/>
+                </a:solidFill>
+                <a:latin typeface="Cambria"/>
+                <a:cs typeface="Cambria"/>
+              </a:rPr>
+              <a:t xml:space="preserve"> + </a:t>
+            </a:r>
+            <a:r>
+              <a:rPr lang="en-US" sz="1425" dirty="0" i="1">
+                <a:solidFill>
+                  <a:srgbClr val="16171D"/>
+                </a:solidFill>
+                <a:latin typeface="Cambria"/>
+                <a:cs typeface="Cambria"/>
+              </a:rPr>
+              <a:t xml:space="preserve">b</a:t>
+            </a:r>
+            <a:r>
+              <a:rPr lang="en-US" sz="1425" dirty="0">
+                <a:solidFill>
+                  <a:srgbClr val="16171D"/>
+                </a:solidFill>
+                <a:latin typeface="Segoe UI"/>
+                <a:cs typeface="Segoe UI"/>
+              </a:rPr>
+              <a:t xml:space="preserve">: </a:t>
+            </a:r>
+            <a:r>
+              <a:rPr lang="en-US" sz="1425" dirty="0" i="1">
+                <a:solidFill>
+                  <a:srgbClr val="16171D"/>
+                </a:solidFill>
+                <a:latin typeface="Cambria"/>
+                <a:cs typeface="Cambria"/>
+              </a:rPr>
+              <a:t xml:space="preserve">m</a:t>
+            </a:r>
+            <a:r>
+              <a:rPr lang="en-US" sz="1425" dirty="0">
+                <a:solidFill>
+                  <a:srgbClr val="16171D"/>
+                </a:solidFill>
+                <a:latin typeface="Cambria"/>
+                <a:cs typeface="Cambria"/>
+              </a:rPr>
+              <a:t xml:space="preserve"> = −3</a:t>
+            </a:r>
+            <a:r>
+              <a:rPr lang="en-US" sz="1425" dirty="0">
+                <a:solidFill>
+                  <a:srgbClr val="16171D"/>
+                </a:solidFill>
+                <a:latin typeface="Segoe UI"/>
+                <a:cs typeface="Segoe UI"/>
+              </a:rPr>
+              <a:t xml:space="preserve"> and </a:t>
+            </a:r>
+            <a:r>
+              <a:rPr lang="en-US" sz="1425" dirty="0" i="1">
+                <a:solidFill>
+                  <a:srgbClr val="16171D"/>
+                </a:solidFill>
+                <a:latin typeface="Cambria"/>
+                <a:cs typeface="Cambria"/>
+              </a:rPr>
+              <a:t xml:space="preserve">b</a:t>
+            </a:r>
+            <a:r>
+              <a:rPr lang="en-US" sz="1425" dirty="0">
+                <a:solidFill>
+                  <a:srgbClr val="16171D"/>
+                </a:solidFill>
+                <a:latin typeface="Cambria"/>
+                <a:cs typeface="Cambria"/>
+              </a:rPr>
+              <a:t xml:space="preserve"> = 5</a:t>
+            </a:r>
+            <a:r>
+              <a:rPr lang="en-US" sz="1425" dirty="0">
+                <a:solidFill>
+                  <a:srgbClr val="16171D"/>
+                </a:solidFill>
+                <a:latin typeface="Segoe UI"/>
+                <a:cs typeface="Segoe UI"/>
+              </a:rPr>
+              <a:t xml:space="preserve">.</a:t>
+            </a:r>
+            <a:br>
+              <a:rPr lang="en-US" sz="1425" dirty="0">
+                <a:solidFill>
+                  <a:srgbClr val="16171D"/>
+                </a:solidFill>
+                <a:latin typeface="Segoe UI"/>
+                <a:cs typeface="Segoe UI"/>
+              </a:rPr>
+            </a:br>
+            <a:r>
+              <a:rPr lang="en-US" sz="1425" dirty="0" b="1">
+                <a:solidFill>
+                  <a:srgbClr val="16171D"/>
+                </a:solidFill>
+                <a:latin typeface="Segoe UI"/>
+                <a:cs typeface="Segoe UI"/>
+              </a:rPr>
+              <a:t xml:space="preserve">2.</a:t>
+            </a:r>
+            <a:r>
+              <a:rPr lang="en-US" sz="1425" dirty="0">
+                <a:solidFill>
+                  <a:srgbClr val="16171D"/>
+                </a:solidFill>
+                <a:latin typeface="Segoe UI"/>
+                <a:cs typeface="Segoe UI"/>
+              </a:rPr>
+              <a:t xml:space="preserve"> The slope is </a:t>
+            </a:r>
+            <a:r>
+              <a:rPr lang="en-US" sz="1425" dirty="0">
+                <a:solidFill>
+                  <a:srgbClr val="16171D"/>
+                </a:solidFill>
+                <a:latin typeface="Cambria"/>
+                <a:cs typeface="Cambria"/>
+              </a:rPr>
+              <a:t xml:space="preserve">−3</a:t>
+            </a:r>
+            <a:r>
+              <a:rPr lang="en-US" sz="1425" dirty="0">
+                <a:solidFill>
+                  <a:srgbClr val="16171D"/>
+                </a:solidFill>
+                <a:latin typeface="Segoe UI"/>
+                <a:cs typeface="Segoe UI"/>
+              </a:rPr>
+              <a:t xml:space="preserve">.</a:t>
+            </a:r>
+            <a:endParaRPr lang="en-US" sz="1425" dirty="0"/>
+          </a:p>
+        </p:txBody>
+      </p:sp>
+      <p:sp>
+        <p:nvSpPr>
+          <p:cNvPr id="20" name="Slide Number 20"/>
           <p:cNvSpPr txBox="1"/>
           <p:nvPr/>
         </p:nvSpPr>
@@ -7843,7 +9250,7 @@
                                           </p:stCondLst>
                                         </p:cTn>
                                         <p:tgtEl>
-                                          <p:spTgt spid="5"/>
+                                          <p:spTgt spid="6"/>
                                         </p:tgtEl>
                                         <p:attrNameLst>
                                           <p:attrName>style.visibility</p:attrName>
@@ -7857,7 +9264,7 @@
                                       <p:cBhvr>
                                         <p:cTn id="4" dur="500"/>
                                         <p:tgtEl>
-                                          <p:spTgt spid="5"/>
+                                          <p:spTgt spid="6"/>
                                         </p:tgtEl>
                                       </p:cBhvr>
                                     </p:animEffect>
@@ -7865,7 +9272,7 @@
                                       <p:cBhvr>
                                         <p:cTn id="5" dur="500" fill="hold"/>
                                         <p:tgtEl>
-                                          <p:spTgt spid="5"/>
+                                          <p:spTgt spid="6"/>
                                         </p:tgtEl>
                                         <p:attrNameLst>
                                           <p:attrName>ppt_w</p:attrName>
@@ -7888,7 +9295,7 @@
                                       <p:cBhvr>
                                         <p:cTn id="6" dur="500" fill="hold"/>
                                         <p:tgtEl>
-                                          <p:spTgt spid="5"/>
+                                          <p:spTgt spid="6"/>
                                         </p:tgtEl>
                                         <p:attrNameLst>
                                           <p:attrName>ppt_h</p:attrName>
@@ -7942,7 +9349,7 @@
                                           </p:stCondLst>
                                         </p:cTn>
                                         <p:tgtEl>
-                                          <p:spTgt spid="7"/>
+                                          <p:spTgt spid="10"/>
                                         </p:tgtEl>
                                         <p:attrNameLst>
                                           <p:attrName>style.visibility</p:attrName>
@@ -7956,7 +9363,7 @@
                                       <p:cBhvr>
                                         <p:cTn id="11" dur="500"/>
                                         <p:tgtEl>
-                                          <p:spTgt spid="7"/>
+                                          <p:spTgt spid="10"/>
                                         </p:tgtEl>
                                       </p:cBhvr>
                                     </p:animEffect>
@@ -7964,7 +9371,7 @@
                                       <p:cBhvr>
                                         <p:cTn id="12" dur="500" fill="hold"/>
                                         <p:tgtEl>
-                                          <p:spTgt spid="7"/>
+                                          <p:spTgt spid="10"/>
                                         </p:tgtEl>
                                         <p:attrNameLst>
                                           <p:attrName>ppt_w</p:attrName>
@@ -7987,7 +9394,7 @@
                                       <p:cBhvr>
                                         <p:cTn id="13" dur="500" fill="hold"/>
                                         <p:tgtEl>
-                                          <p:spTgt spid="7"/>
+                                          <p:spTgt spid="10"/>
                                         </p:tgtEl>
                                         <p:attrNameLst>
                                           <p:attrName>ppt_h</p:attrName>
@@ -8041,7 +9448,7 @@
                                           </p:stCondLst>
                                         </p:cTn>
                                         <p:tgtEl>
-                                          <p:spTgt spid="9"/>
+                                          <p:spTgt spid="14"/>
                                         </p:tgtEl>
                                         <p:attrNameLst>
                                           <p:attrName>style.visibility</p:attrName>
@@ -8055,7 +9462,7 @@
                                       <p:cBhvr>
                                         <p:cTn id="18" dur="500"/>
                                         <p:tgtEl>
-                                          <p:spTgt spid="9"/>
+                                          <p:spTgt spid="14"/>
                                         </p:tgtEl>
                                       </p:cBhvr>
                                     </p:animEffect>
@@ -8063,7 +9470,7 @@
                                       <p:cBhvr>
                                         <p:cTn id="19" dur="500" fill="hold"/>
                                         <p:tgtEl>
-                                          <p:spTgt spid="9"/>
+                                          <p:spTgt spid="14"/>
                                         </p:tgtEl>
                                         <p:attrNameLst>
                                           <p:attrName>ppt_w</p:attrName>
@@ -8086,7 +9493,7 @@
                                       <p:cBhvr>
                                         <p:cTn id="20" dur="500" fill="hold"/>
                                         <p:tgtEl>
-                                          <p:spTgt spid="9"/>
+                                          <p:spTgt spid="14"/>
                                         </p:tgtEl>
                                         <p:attrNameLst>
                                           <p:attrName>ppt_h</p:attrName>
@@ -8140,7 +9547,7 @@
                                           </p:stCondLst>
                                         </p:cTn>
                                         <p:tgtEl>
-                                          <p:spTgt spid="11"/>
+                                          <p:spTgt spid="18"/>
                                         </p:tgtEl>
                                         <p:attrNameLst>
                                           <p:attrName>style.visibility</p:attrName>
@@ -8154,7 +9561,7 @@
                                       <p:cBhvr>
                                         <p:cTn id="25" dur="500"/>
                                         <p:tgtEl>
-                                          <p:spTgt spid="11"/>
+                                          <p:spTgt spid="18"/>
                                         </p:tgtEl>
                                       </p:cBhvr>
                                     </p:animEffect>
@@ -8162,7 +9569,7 @@
                                       <p:cBhvr>
                                         <p:cTn id="26" dur="500" fill="hold"/>
                                         <p:tgtEl>
-                                          <p:spTgt spid="11"/>
+                                          <p:spTgt spid="18"/>
                                         </p:tgtEl>
                                         <p:attrNameLst>
                                           <p:attrName>ppt_w</p:attrName>
@@ -8185,7 +9592,7 @@
                                       <p:cBhvr>
                                         <p:cTn id="27" dur="500" fill="hold"/>
                                         <p:tgtEl>
-                                          <p:spTgt spid="11"/>
+                                          <p:spTgt spid="18"/>
                                         </p:tgtEl>
                                         <p:attrNameLst>
                                           <p:attrName>ppt_h</p:attrName>
@@ -8293,7 +9700,7 @@
                 <a:latin typeface="Segoe UI"/>
                 <a:cs typeface="Segoe UI"/>
               </a:rPr>
-              <a:t xml:space="preserve">Day 2 · Bell Work · Review of Day 1</a:t>
+              <a:t xml:space="preserve">Day 2 · Bell Work · Review</a:t>
             </a:r>
             <a:endParaRPr lang="en-US" sz="1200" dirty="0"/>
           </a:p>
@@ -8345,21 +9752,27 @@
       </p:sp>
       <p:sp>
         <p:nvSpPr>
-          <p:cNvPr id="4" name="Shape 4"/>
+          <p:cNvPr id="7" name="Shape 7"/>
           <p:cNvSpPr txBox="1"/>
           <p:nvPr/>
         </p:nvSpPr>
         <p:spPr>
           <a:xfrm>
-            <a:off x="685800" y="1675638"/>
-            <a:ext cx="5143348" cy="946404"/>
-          </a:xfrm>
-          <a:prstGeom prst="rect">
-            <a:avLst/>
-          </a:prstGeom>
-          <a:noFill/>
-          <a:ln>
-            <a:noFill/>
+            <a:off x="685800" y="1618488"/>
+            <a:ext cx="5295748" cy="2282190"/>
+          </a:xfrm>
+          <a:prstGeom prst="roundRect">
+            <a:avLst>
+              <a:gd name="adj" fmla="val 8000"/>
+            </a:avLst>
+          </a:prstGeom>
+          <a:solidFill>
+            <a:srgbClr val="FFFFFF"/>
+          </a:solidFill>
+          <a:ln w="12700">
+            <a:solidFill>
+              <a:srgbClr val="E3E4EC"/>
+            </a:solidFill>
           </a:ln>
         </p:spPr>
         <p:txBody>
@@ -8373,18 +9786,62 @@
                 <a:spcPct val="100000"/>
               </a:lnSpc>
             </a:pPr>
-            <a:r>
-              <a:rPr lang="en-US" sz="1950" dirty="0">
-                <a:solidFill>
-                  <a:srgbClr val="16171D"/>
-                </a:solidFill>
-                <a:latin typeface="Segoe UI"/>
-                <a:cs typeface="Segoe UI"/>
-              </a:rPr>
-              <a:t xml:space="preserve">1. Line </a:t>
-            </a:r>
-            <a:r>
-              <a:rPr lang="en-US" sz="1950" dirty="0" i="1">
+            <a:endParaRPr lang="en-US" sz="1950" dirty="0"/>
+          </a:p>
+        </p:txBody>
+      </p:sp>
+      <p:sp>
+        <p:nvSpPr>
+          <p:cNvPr id="4" name="Shape 4"/>
+          <p:cNvSpPr txBox="1"/>
+          <p:nvPr/>
+        </p:nvSpPr>
+        <p:spPr>
+          <a:xfrm>
+            <a:off x="895350" y="1789938"/>
+            <a:ext cx="4876648" cy="534924"/>
+          </a:xfrm>
+          <a:prstGeom prst="rect">
+            <a:avLst/>
+          </a:prstGeom>
+          <a:noFill/>
+          <a:ln>
+            <a:noFill/>
+          </a:ln>
+        </p:spPr>
+        <p:txBody>
+          <a:bodyPr wrap="square" lIns="36576" tIns="27432" rIns="36576" bIns="27432" anchor="t">
+            <a:noAutofit/>
+          </a:bodyPr>
+          <a:lstStyle/>
+          <a:p>
+            <a:pPr algn="l">
+              <a:lnSpc>
+                <a:spcPct val="100000"/>
+              </a:lnSpc>
+            </a:pPr>
+            <a:r>
+              <a:rPr lang="en-US" sz="1575" dirty="0" b="1">
+                <a:solidFill>
+                  <a:srgbClr val="16171D"/>
+                </a:solidFill>
+                <a:latin typeface="Segoe UI"/>
+                <a:cs typeface="Segoe UI"/>
+              </a:rPr>
+              <a:t xml:space="preserve">1.</a:t>
+            </a:r>
+            <a:r>
+              <a:rPr lang="en-US" sz="1575" dirty="0">
+                <a:solidFill>
+                  <a:srgbClr val="16171D"/>
+                </a:solidFill>
+                <a:latin typeface="Segoe UI"/>
+                <a:cs typeface="Segoe UI"/>
+              </a:rPr>
+              <a:t xml:space="preserve"> Line </a:t>
+            </a:r>
+            <a:r>
+              <a:rPr lang="en-US" sz="1575" dirty="0" i="1">
                 <a:solidFill>
                   <a:srgbClr val="16171D"/>
                 </a:solidFill>
@@ -8394,7 +9851,7 @@
               <a:t xml:space="preserve">j</a:t>
             </a:r>
             <a:r>
-              <a:rPr lang="en-US" sz="1950" dirty="0">
+              <a:rPr lang="en-US" sz="1575" dirty="0">
                 <a:solidFill>
                   <a:srgbClr val="16171D"/>
                 </a:solidFill>
@@ -8404,7 +9861,7 @@
               <a:t xml:space="preserve"> has slope </a:t>
             </a:r>
             <a:r>
-              <a:rPr lang="en-US" sz="1950" dirty="0">
+              <a:rPr lang="en-US" sz="1575" dirty="0">
                 <a:solidFill>
                   <a:srgbClr val="16171D"/>
                 </a:solidFill>
@@ -8414,7 +9871,7 @@
               <a:t xml:space="preserve">⅔</a:t>
             </a:r>
             <a:r>
-              <a:rPr lang="en-US" sz="1950" dirty="0">
+              <a:rPr lang="en-US" sz="1575" dirty="0">
                 <a:solidFill>
                   <a:srgbClr val="16171D"/>
                 </a:solidFill>
@@ -8424,7 +9881,7 @@
               <a:t xml:space="preserve">. Line </a:t>
             </a:r>
             <a:r>
-              <a:rPr lang="en-US" sz="1950" dirty="0" i="1">
+              <a:rPr lang="en-US" sz="1575" dirty="0" i="1">
                 <a:solidFill>
                   <a:srgbClr val="16171D"/>
                 </a:solidFill>
@@ -8434,7 +9891,7 @@
               <a:t xml:space="preserve">k</a:t>
             </a:r>
             <a:r>
-              <a:rPr lang="en-US" sz="1950" dirty="0">
+              <a:rPr lang="en-US" sz="1575" dirty="0">
                 <a:solidFill>
                   <a:srgbClr val="16171D"/>
                 </a:solidFill>
@@ -8444,7 +9901,7 @@
               <a:t xml:space="preserve"> is perpendicular to it. What is the slope of </a:t>
             </a:r>
             <a:r>
-              <a:rPr lang="en-US" sz="1950" dirty="0" i="1">
+              <a:rPr lang="en-US" sz="1575" dirty="0" i="1">
                 <a:solidFill>
                   <a:srgbClr val="16171D"/>
                 </a:solidFill>
@@ -8454,26 +9911,16 @@
               <a:t xml:space="preserve">k</a:t>
             </a:r>
             <a:r>
-              <a:rPr lang="en-US" sz="1950" dirty="0">
-                <a:solidFill>
-                  <a:srgbClr val="16171D"/>
-                </a:solidFill>
-                <a:latin typeface="Segoe UI"/>
-                <a:cs typeface="Segoe UI"/>
-              </a:rPr>
-              <a:t xml:space="preserve">? </a:t>
-            </a:r>
-            <a:r>
               <a:rPr lang="en-US" sz="1575" dirty="0">
                 <a:solidFill>
-                  <a:srgbClr val="5F6272"/>
-                </a:solidFill>
-                <a:latin typeface="Segoe UI"/>
-                <a:cs typeface="Segoe UI"/>
-              </a:rPr>
-              <a:t xml:space="preserve">(SE p. 309)</a:t>
-            </a:r>
-            <a:endParaRPr lang="en-US" sz="1950" dirty="0"/>
+                  <a:srgbClr val="16171D"/>
+                </a:solidFill>
+                <a:latin typeface="Segoe UI"/>
+                <a:cs typeface="Segoe UI"/>
+              </a:rPr>
+              <a:t xml:space="preserve">?</a:t>
+            </a:r>
+            <a:endParaRPr lang="en-US" sz="1575" dirty="0"/>
           </a:p>
         </p:txBody>
       </p:sp>
@@ -8485,8 +9932,62 @@
         </p:nvSpPr>
         <p:spPr>
           <a:xfrm>
-            <a:off x="685800" y="2755392"/>
-            <a:ext cx="2576368" cy="518922"/>
+            <a:off x="895350" y="2362962"/>
+            <a:ext cx="4876648" cy="294894"/>
+          </a:xfrm>
+          <a:prstGeom prst="rect">
+            <a:avLst/>
+          </a:prstGeom>
+          <a:noFill/>
+          <a:ln>
+            <a:noFill/>
+          </a:ln>
+        </p:spPr>
+        <p:txBody>
+          <a:bodyPr wrap="square" lIns="36576" tIns="27432" rIns="36576" bIns="27432" anchor="t">
+            <a:noAutofit/>
+          </a:bodyPr>
+          <a:lstStyle/>
+          <a:p>
+            <a:pPr algn="l">
+              <a:lnSpc>
+                <a:spcPct val="100000"/>
+              </a:lnSpc>
+            </a:pPr>
+            <a:r>
+              <a:rPr lang="en-US" sz="1575" dirty="0" b="1">
+                <a:solidFill>
+                  <a:srgbClr val="16171D"/>
+                </a:solidFill>
+                <a:latin typeface="Segoe UI"/>
+                <a:cs typeface="Segoe UI"/>
+              </a:rPr>
+              <a:t xml:space="preserve">Formula:</a:t>
+            </a:r>
+            <a:r>
+              <a:rPr lang="en-US" sz="1575" dirty="0">
+                <a:solidFill>
+                  <a:srgbClr val="16171D"/>
+                </a:solidFill>
+                <a:latin typeface="Segoe UI"/>
+                <a:cs typeface="Segoe UI"/>
+              </a:rPr>
+              <a:t xml:space="preserve"> perpendicular: flip and change the sign</a:t>
+            </a:r>
+            <a:endParaRPr lang="en-US" sz="1575" dirty="0"/>
+          </a:p>
+        </p:txBody>
+      </p:sp>
+      <p:sp>
+        <p:nvSpPr>
+          <p:cNvPr id="6" name="Shape 6"/>
+          <p:cNvSpPr txBox="1"/>
+          <p:nvPr/>
+        </p:nvSpPr>
+        <p:spPr>
+          <a:xfrm>
+            <a:off x="895350" y="2695956"/>
+            <a:ext cx="2910695" cy="1033272"/>
           </a:xfrm>
           <a:prstGeom prst="roundRect">
             <a:avLst>
@@ -8522,7 +10023,7 @@
               <a:t xml:space="preserve">ANSWER   </a:t>
             </a:r>
             <a:r>
-              <a:rPr lang="en-US" sz="2325" dirty="0">
+              <a:rPr lang="en-US" sz="1425" dirty="0" b="1">
                 <a:solidFill>
                   <a:srgbClr val="16171D"/>
                 </a:solidFill>
@@ -8531,27 +10032,200 @@
               </a:rPr>
               <a:t xml:space="preserve">−3/2</a:t>
             </a:r>
-            <a:endParaRPr lang="en-US" sz="2325" dirty="0"/>
-          </a:p>
-        </p:txBody>
-      </p:sp>
-      <p:sp>
-        <p:nvSpPr>
-          <p:cNvPr id="6" name="Shape 6"/>
+            <a:br>
+              <a:rPr lang="en-US" sz="1425" dirty="0">
+                <a:solidFill>
+                  <a:srgbClr val="16171D"/>
+                </a:solidFill>
+                <a:latin typeface="Segoe UI"/>
+                <a:cs typeface="Segoe UI"/>
+              </a:rPr>
+            </a:br>
+            <a:r>
+              <a:rPr lang="en-US" sz="1425" dirty="0" b="1">
+                <a:solidFill>
+                  <a:srgbClr val="16171D"/>
+                </a:solidFill>
+                <a:latin typeface="Segoe UI"/>
+                <a:cs typeface="Segoe UI"/>
+              </a:rPr>
+              <a:t xml:space="preserve">1.</a:t>
+            </a:r>
+            <a:r>
+              <a:rPr lang="en-US" sz="1425" dirty="0">
+                <a:solidFill>
+                  <a:srgbClr val="16171D"/>
+                </a:solidFill>
+                <a:latin typeface="Segoe UI"/>
+                <a:cs typeface="Segoe UI"/>
+              </a:rPr>
+              <a:t xml:space="preserve"> Flip </a:t>
+            </a:r>
+            <a:r>
+              <a:rPr lang="en-US" sz="1425" dirty="0">
+                <a:solidFill>
+                  <a:srgbClr val="16171D"/>
+                </a:solidFill>
+                <a:latin typeface="Cambria"/>
+                <a:cs typeface="Cambria"/>
+              </a:rPr>
+              <a:t xml:space="preserve">⅔</a:t>
+            </a:r>
+            <a:r>
+              <a:rPr lang="en-US" sz="1425" dirty="0">
+                <a:solidFill>
+                  <a:srgbClr val="16171D"/>
+                </a:solidFill>
+                <a:latin typeface="Segoe UI"/>
+                <a:cs typeface="Segoe UI"/>
+              </a:rPr>
+              <a:t xml:space="preserve">: </a:t>
+            </a:r>
+            <a:r>
+              <a:rPr lang="en-US" sz="1425" dirty="0">
+                <a:solidFill>
+                  <a:srgbClr val="16171D"/>
+                </a:solidFill>
+                <a:latin typeface="Cambria"/>
+                <a:cs typeface="Cambria"/>
+              </a:rPr>
+              <a:t xml:space="preserve">3/2</a:t>
+            </a:r>
+            <a:r>
+              <a:rPr lang="en-US" sz="1425" dirty="0">
+                <a:solidFill>
+                  <a:srgbClr val="16171D"/>
+                </a:solidFill>
+                <a:latin typeface="Segoe UI"/>
+                <a:cs typeface="Segoe UI"/>
+              </a:rPr>
+              <a:t xml:space="preserve">.</a:t>
+            </a:r>
+            <a:br>
+              <a:rPr lang="en-US" sz="1425" dirty="0">
+                <a:solidFill>
+                  <a:srgbClr val="16171D"/>
+                </a:solidFill>
+                <a:latin typeface="Segoe UI"/>
+                <a:cs typeface="Segoe UI"/>
+              </a:rPr>
+            </a:br>
+            <a:r>
+              <a:rPr lang="en-US" sz="1425" dirty="0" b="1">
+                <a:solidFill>
+                  <a:srgbClr val="16171D"/>
+                </a:solidFill>
+                <a:latin typeface="Segoe UI"/>
+                <a:cs typeface="Segoe UI"/>
+              </a:rPr>
+              <a:t xml:space="preserve">2.</a:t>
+            </a:r>
+            <a:r>
+              <a:rPr lang="en-US" sz="1425" dirty="0">
+                <a:solidFill>
+                  <a:srgbClr val="16171D"/>
+                </a:solidFill>
+                <a:latin typeface="Segoe UI"/>
+                <a:cs typeface="Segoe UI"/>
+              </a:rPr>
+              <a:t xml:space="preserve"> Change the sign: </a:t>
+            </a:r>
+            <a:r>
+              <a:rPr lang="en-US" sz="1425" dirty="0">
+                <a:solidFill>
+                  <a:srgbClr val="16171D"/>
+                </a:solidFill>
+                <a:latin typeface="Cambria"/>
+                <a:cs typeface="Cambria"/>
+              </a:rPr>
+              <a:t xml:space="preserve">−3/2</a:t>
+            </a:r>
+            <a:r>
+              <a:rPr lang="en-US" sz="1425" dirty="0">
+                <a:solidFill>
+                  <a:srgbClr val="16171D"/>
+                </a:solidFill>
+                <a:latin typeface="Segoe UI"/>
+                <a:cs typeface="Segoe UI"/>
+              </a:rPr>
+              <a:t xml:space="preserve">.</a:t>
+            </a:r>
+            <a:br>
+              <a:rPr lang="en-US" sz="1425" dirty="0">
+                <a:solidFill>
+                  <a:srgbClr val="16171D"/>
+                </a:solidFill>
+                <a:latin typeface="Segoe UI"/>
+                <a:cs typeface="Segoe UI"/>
+              </a:rPr>
+            </a:br>
+            <a:r>
+              <a:rPr lang="en-US" sz="1425" dirty="0" b="1">
+                <a:solidFill>
+                  <a:srgbClr val="16171D"/>
+                </a:solidFill>
+                <a:latin typeface="Segoe UI"/>
+                <a:cs typeface="Segoe UI"/>
+              </a:rPr>
+              <a:t xml:space="preserve">3.</a:t>
+            </a:r>
+            <a:r>
+              <a:rPr lang="en-US" sz="1425" dirty="0">
+                <a:solidFill>
+                  <a:srgbClr val="16171D"/>
+                </a:solidFill>
+                <a:latin typeface="Segoe UI"/>
+                <a:cs typeface="Segoe UI"/>
+              </a:rPr>
+              <a:t xml:space="preserve"> Check: </a:t>
+            </a:r>
+            <a:r>
+              <a:rPr lang="en-US" sz="1425" dirty="0">
+                <a:solidFill>
+                  <a:srgbClr val="16171D"/>
+                </a:solidFill>
+                <a:latin typeface="Cambria"/>
+                <a:cs typeface="Cambria"/>
+              </a:rPr>
+              <a:t xml:space="preserve">⅔ · (−3/2) = −1</a:t>
+            </a:r>
+            <a:r>
+              <a:rPr lang="en-US" sz="1425" dirty="0">
+                <a:solidFill>
+                  <a:srgbClr val="16171D"/>
+                </a:solidFill>
+                <a:latin typeface="Segoe UI"/>
+                <a:cs typeface="Segoe UI"/>
+              </a:rPr>
+              <a:t xml:space="preserve">.</a:t>
+            </a:r>
+            <a:endParaRPr lang="en-US" sz="1425" dirty="0"/>
+          </a:p>
+        </p:txBody>
+      </p:sp>
+      <p:sp>
+        <p:nvSpPr>
+          <p:cNvPr id="11" name="Shape 11"/>
           <p:cNvSpPr txBox="1"/>
           <p:nvPr/>
         </p:nvSpPr>
         <p:spPr>
           <a:xfrm>
-            <a:off x="685800" y="3541014"/>
-            <a:ext cx="5143348" cy="649224"/>
-          </a:xfrm>
-          <a:prstGeom prst="rect">
-            <a:avLst/>
-          </a:prstGeom>
-          <a:noFill/>
-          <a:ln>
-            <a:noFill/>
+            <a:off x="685800" y="4034028"/>
+            <a:ext cx="5295748" cy="2042160"/>
+          </a:xfrm>
+          <a:prstGeom prst="roundRect">
+            <a:avLst>
+              <a:gd name="adj" fmla="val 8000"/>
+            </a:avLst>
+          </a:prstGeom>
+          <a:solidFill>
+            <a:srgbClr val="FFFFFF"/>
+          </a:solidFill>
+          <a:ln w="12700">
+            <a:solidFill>
+              <a:srgbClr val="E3E4EC"/>
+            </a:solidFill>
           </a:ln>
         </p:spPr>
         <p:txBody>
@@ -8565,40 +10239,128 @@
                 <a:spcPct val="100000"/>
               </a:lnSpc>
             </a:pPr>
-            <a:r>
-              <a:rPr lang="en-US" sz="1950" dirty="0">
-                <a:solidFill>
-                  <a:srgbClr val="16171D"/>
-                </a:solidFill>
-                <a:latin typeface="Segoe UI"/>
-                <a:cs typeface="Segoe UI"/>
-              </a:rPr>
-              <a:t xml:space="preserve">2. What is the slope of any horizontal line? </a:t>
+            <a:endParaRPr lang="en-US" sz="1950" dirty="0"/>
+          </a:p>
+        </p:txBody>
+      </p:sp>
+      <p:sp>
+        <p:nvSpPr>
+          <p:cNvPr id="8" name="Shape 8"/>
+          <p:cNvSpPr txBox="1"/>
+          <p:nvPr/>
+        </p:nvSpPr>
+        <p:spPr>
+          <a:xfrm>
+            <a:off x="895350" y="4205478"/>
+            <a:ext cx="4876648" cy="294894"/>
+          </a:xfrm>
+          <a:prstGeom prst="rect">
+            <a:avLst/>
+          </a:prstGeom>
+          <a:noFill/>
+          <a:ln>
+            <a:noFill/>
+          </a:ln>
+        </p:spPr>
+        <p:txBody>
+          <a:bodyPr wrap="square" lIns="36576" tIns="27432" rIns="36576" bIns="27432" anchor="t">
+            <a:noAutofit/>
+          </a:bodyPr>
+          <a:lstStyle/>
+          <a:p>
+            <a:pPr algn="l">
+              <a:lnSpc>
+                <a:spcPct val="100000"/>
+              </a:lnSpc>
+            </a:pPr>
+            <a:r>
+              <a:rPr lang="en-US" sz="1575" dirty="0" b="1">
+                <a:solidFill>
+                  <a:srgbClr val="16171D"/>
+                </a:solidFill>
+                <a:latin typeface="Segoe UI"/>
+                <a:cs typeface="Segoe UI"/>
+              </a:rPr>
+              <a:t xml:space="preserve">2.</a:t>
             </a:r>
             <a:r>
               <a:rPr lang="en-US" sz="1575" dirty="0">
                 <a:solidFill>
-                  <a:srgbClr val="5F6272"/>
-                </a:solidFill>
-                <a:latin typeface="Segoe UI"/>
-                <a:cs typeface="Segoe UI"/>
-              </a:rPr>
-              <a:t xml:space="preserve">(SE p. 310)</a:t>
-            </a:r>
-            <a:endParaRPr lang="en-US" sz="1950" dirty="0"/>
-          </a:p>
-        </p:txBody>
-      </p:sp>
-      <p:sp>
-        <p:nvSpPr>
-          <p:cNvPr id="7" name="Shape 7"/>
+                  <a:srgbClr val="16171D"/>
+                </a:solidFill>
+                <a:latin typeface="Segoe UI"/>
+                <a:cs typeface="Segoe UI"/>
+              </a:rPr>
+              <a:t xml:space="preserve"> What is the slope of any horizontal line?</a:t>
+            </a:r>
+            <a:endParaRPr lang="en-US" sz="1575" dirty="0"/>
+          </a:p>
+        </p:txBody>
+      </p:sp>
+      <p:sp>
+        <p:nvSpPr>
+          <p:cNvPr id="9" name="Shape 9"/>
           <p:cNvSpPr txBox="1"/>
           <p:nvPr/>
         </p:nvSpPr>
         <p:spPr>
           <a:xfrm>
-            <a:off x="685800" y="4323588"/>
-            <a:ext cx="2078888" cy="518922"/>
+            <a:off x="895350" y="4538472"/>
+            <a:ext cx="4876648" cy="294894"/>
+          </a:xfrm>
+          <a:prstGeom prst="rect">
+            <a:avLst/>
+          </a:prstGeom>
+          <a:noFill/>
+          <a:ln>
+            <a:noFill/>
+          </a:ln>
+        </p:spPr>
+        <p:txBody>
+          <a:bodyPr wrap="square" lIns="36576" tIns="27432" rIns="36576" bIns="27432" anchor="t">
+            <a:noAutofit/>
+          </a:bodyPr>
+          <a:lstStyle/>
+          <a:p>
+            <a:pPr algn="l">
+              <a:lnSpc>
+                <a:spcPct val="100000"/>
+              </a:lnSpc>
+            </a:pPr>
+            <a:r>
+              <a:rPr lang="en-US" sz="1575" dirty="0" b="1">
+                <a:solidFill>
+                  <a:srgbClr val="16171D"/>
+                </a:solidFill>
+                <a:latin typeface="Segoe UI"/>
+                <a:cs typeface="Segoe UI"/>
+              </a:rPr>
+              <a:t xml:space="preserve">Formula:</a:t>
+            </a:r>
+            <a:r>
+              <a:rPr lang="en-US" sz="1575" dirty="0">
+                <a:solidFill>
+                  <a:srgbClr val="16171D"/>
+                </a:solidFill>
+                <a:latin typeface="Segoe UI"/>
+                <a:cs typeface="Segoe UI"/>
+              </a:rPr>
+              <a:t xml:space="preserve"> slope = rise ÷ run</a:t>
+            </a:r>
+            <a:endParaRPr lang="en-US" sz="1575" dirty="0"/>
+          </a:p>
+        </p:txBody>
+      </p:sp>
+      <p:sp>
+        <p:nvSpPr>
+          <p:cNvPr id="10" name="Shape 10"/>
+          <p:cNvSpPr txBox="1"/>
+          <p:nvPr/>
+        </p:nvSpPr>
+        <p:spPr>
+          <a:xfrm>
+            <a:off x="895350" y="4871466"/>
+            <a:ext cx="4876648" cy="1033272"/>
           </a:xfrm>
           <a:prstGeom prst="roundRect">
             <a:avLst>
@@ -8634,7 +10396,7 @@
               <a:t xml:space="preserve">ANSWER   </a:t>
             </a:r>
             <a:r>
-              <a:rPr lang="en-US" sz="2325" dirty="0">
+              <a:rPr lang="en-US" sz="1425" dirty="0" b="1">
                 <a:solidFill>
                   <a:srgbClr val="16171D"/>
                 </a:solidFill>
@@ -8643,27 +10405,151 @@
               </a:rPr>
               <a:t xml:space="preserve">0</a:t>
             </a:r>
-            <a:endParaRPr lang="en-US" sz="2325" dirty="0"/>
-          </a:p>
-        </p:txBody>
-      </p:sp>
-      <p:sp>
-        <p:nvSpPr>
-          <p:cNvPr id="8" name="Shape 8"/>
+            <a:br>
+              <a:rPr lang="en-US" sz="1425" dirty="0">
+                <a:solidFill>
+                  <a:srgbClr val="16171D"/>
+                </a:solidFill>
+                <a:latin typeface="Segoe UI"/>
+                <a:cs typeface="Segoe UI"/>
+              </a:rPr>
+            </a:br>
+            <a:r>
+              <a:rPr lang="en-US" sz="1425" dirty="0" b="1">
+                <a:solidFill>
+                  <a:srgbClr val="16171D"/>
+                </a:solidFill>
+                <a:latin typeface="Segoe UI"/>
+                <a:cs typeface="Segoe UI"/>
+              </a:rPr>
+              <a:t xml:space="preserve">1.</a:t>
+            </a:r>
+            <a:r>
+              <a:rPr lang="en-US" sz="1425" dirty="0">
+                <a:solidFill>
+                  <a:srgbClr val="16171D"/>
+                </a:solidFill>
+                <a:latin typeface="Segoe UI"/>
+                <a:cs typeface="Segoe UI"/>
+              </a:rPr>
+              <a:t xml:space="preserve"> A horizontal line is flat: it never goes up or down, so the rise is 0.</a:t>
+            </a:r>
+            <a:br>
+              <a:rPr lang="en-US" sz="1425" dirty="0">
+                <a:solidFill>
+                  <a:srgbClr val="16171D"/>
+                </a:solidFill>
+                <a:latin typeface="Segoe UI"/>
+                <a:cs typeface="Segoe UI"/>
+              </a:rPr>
+            </a:br>
+            <a:r>
+              <a:rPr lang="en-US" sz="1425" dirty="0" b="1">
+                <a:solidFill>
+                  <a:srgbClr val="16171D"/>
+                </a:solidFill>
+                <a:latin typeface="Segoe UI"/>
+                <a:cs typeface="Segoe UI"/>
+              </a:rPr>
+              <a:t xml:space="preserve">2.</a:t>
+            </a:r>
+            <a:r>
+              <a:rPr lang="en-US" sz="1425" dirty="0">
+                <a:solidFill>
+                  <a:srgbClr val="16171D"/>
+                </a:solidFill>
+                <a:latin typeface="Segoe UI"/>
+                <a:cs typeface="Segoe UI"/>
+              </a:rPr>
+              <a:t xml:space="preserve"> </a:t>
+            </a:r>
+            <a:r>
+              <a:rPr lang="en-US" sz="1425" dirty="0">
+                <a:solidFill>
+                  <a:srgbClr val="16171D"/>
+                </a:solidFill>
+                <a:latin typeface="Cambria"/>
+                <a:cs typeface="Cambria"/>
+              </a:rPr>
+              <a:t xml:space="preserve">0 ÷ </a:t>
+            </a:r>
+            <a:r>
+              <a:rPr lang="en-US" sz="1425" dirty="0" i="1">
+                <a:solidFill>
+                  <a:srgbClr val="16171D"/>
+                </a:solidFill>
+                <a:latin typeface="Cambria"/>
+                <a:cs typeface="Cambria"/>
+              </a:rPr>
+              <a:t xml:space="preserve">r</a:t>
+            </a:r>
+            <a:r>
+              <a:rPr lang="en-US" sz="1425" dirty="0" i="1">
+                <a:solidFill>
+                  <a:srgbClr val="16171D"/>
+                </a:solidFill>
+                <a:latin typeface="Cambria"/>
+                <a:cs typeface="Cambria"/>
+              </a:rPr>
+              <a:t xml:space="preserve">u</a:t>
+            </a:r>
+            <a:r>
+              <a:rPr lang="en-US" sz="1425" dirty="0" i="1">
+                <a:solidFill>
+                  <a:srgbClr val="16171D"/>
+                </a:solidFill>
+                <a:latin typeface="Cambria"/>
+                <a:cs typeface="Cambria"/>
+              </a:rPr>
+              <a:t xml:space="preserve">n</a:t>
+            </a:r>
+            <a:r>
+              <a:rPr lang="en-US" sz="1425" dirty="0">
+                <a:solidFill>
+                  <a:srgbClr val="16171D"/>
+                </a:solidFill>
+                <a:latin typeface="Cambria"/>
+                <a:cs typeface="Cambria"/>
+              </a:rPr>
+              <a:t xml:space="preserve"> = 0</a:t>
+            </a:r>
+            <a:r>
+              <a:rPr lang="en-US" sz="1425" dirty="0">
+                <a:solidFill>
+                  <a:srgbClr val="16171D"/>
+                </a:solidFill>
+                <a:latin typeface="Segoe UI"/>
+                <a:cs typeface="Segoe UI"/>
+              </a:rPr>
+              <a:t xml:space="preserve">. The slope is 0.</a:t>
+            </a:r>
+            <a:endParaRPr lang="en-US" sz="1425" dirty="0"/>
+          </a:p>
+        </p:txBody>
+      </p:sp>
+      <p:sp>
+        <p:nvSpPr>
+          <p:cNvPr id="15" name="Shape 15"/>
           <p:cNvSpPr txBox="1"/>
           <p:nvPr/>
         </p:nvSpPr>
         <p:spPr>
           <a:xfrm>
-            <a:off x="6362548" y="1675638"/>
-            <a:ext cx="5143348" cy="649224"/>
-          </a:xfrm>
-          <a:prstGeom prst="rect">
-            <a:avLst/>
-          </a:prstGeom>
-          <a:noFill/>
-          <a:ln>
-            <a:noFill/>
+            <a:off x="6210148" y="1618488"/>
+            <a:ext cx="5295748" cy="2065020"/>
+          </a:xfrm>
+          <a:prstGeom prst="roundRect">
+            <a:avLst>
+              <a:gd name="adj" fmla="val 8000"/>
+            </a:avLst>
+          </a:prstGeom>
+          <a:solidFill>
+            <a:srgbClr val="FFFFFF"/>
+          </a:solidFill>
+          <a:ln w="12700">
+            <a:solidFill>
+              <a:srgbClr val="E3E4EC"/>
+            </a:solidFill>
           </a:ln>
         </p:spPr>
         <p:txBody>
@@ -8677,18 +10563,62 @@
                 <a:spcPct val="100000"/>
               </a:lnSpc>
             </a:pPr>
-            <a:r>
-              <a:rPr lang="en-US" sz="1950" dirty="0">
-                <a:solidFill>
-                  <a:srgbClr val="16171D"/>
-                </a:solidFill>
-                <a:latin typeface="Segoe UI"/>
-                <a:cs typeface="Segoe UI"/>
-              </a:rPr>
-              <a:t xml:space="preserve">3. Which is the equation of the vertical line through </a:t>
-            </a:r>
-            <a:r>
-              <a:rPr lang="en-US" sz="1950" dirty="0">
+            <a:endParaRPr lang="en-US" sz="1950" dirty="0"/>
+          </a:p>
+        </p:txBody>
+      </p:sp>
+      <p:sp>
+        <p:nvSpPr>
+          <p:cNvPr id="12" name="Shape 12"/>
+          <p:cNvSpPr txBox="1"/>
+          <p:nvPr/>
+        </p:nvSpPr>
+        <p:spPr>
+          <a:xfrm>
+            <a:off x="6419698" y="1789938"/>
+            <a:ext cx="4876648" cy="534924"/>
+          </a:xfrm>
+          <a:prstGeom prst="rect">
+            <a:avLst/>
+          </a:prstGeom>
+          <a:noFill/>
+          <a:ln>
+            <a:noFill/>
+          </a:ln>
+        </p:spPr>
+        <p:txBody>
+          <a:bodyPr wrap="square" lIns="36576" tIns="27432" rIns="36576" bIns="27432" anchor="t">
+            <a:noAutofit/>
+          </a:bodyPr>
+          <a:lstStyle/>
+          <a:p>
+            <a:pPr algn="l">
+              <a:lnSpc>
+                <a:spcPct val="100000"/>
+              </a:lnSpc>
+            </a:pPr>
+            <a:r>
+              <a:rPr lang="en-US" sz="1575" dirty="0" b="1">
+                <a:solidFill>
+                  <a:srgbClr val="16171D"/>
+                </a:solidFill>
+                <a:latin typeface="Segoe UI"/>
+                <a:cs typeface="Segoe UI"/>
+              </a:rPr>
+              <a:t xml:space="preserve">3.</a:t>
+            </a:r>
+            <a:r>
+              <a:rPr lang="en-US" sz="1575" dirty="0">
+                <a:solidFill>
+                  <a:srgbClr val="16171D"/>
+                </a:solidFill>
+                <a:latin typeface="Segoe UI"/>
+                <a:cs typeface="Segoe UI"/>
+              </a:rPr>
+              <a:t xml:space="preserve"> Which is the equation of the vertical line through </a:t>
+            </a:r>
+            <a:r>
+              <a:rPr lang="en-US" sz="1575" dirty="0">
                 <a:solidFill>
                   <a:srgbClr val="16171D"/>
                 </a:solidFill>
@@ -8698,39 +10628,113 @@
               <a:t xml:space="preserve">(2, −1)</a:t>
             </a:r>
             <a:r>
-              <a:rPr lang="en-US" sz="1950" dirty="0">
-                <a:solidFill>
-                  <a:srgbClr val="16171D"/>
-                </a:solidFill>
-                <a:latin typeface="Segoe UI"/>
-                <a:cs typeface="Segoe UI"/>
-              </a:rPr>
-              <a:t xml:space="preserve">? </a:t>
-            </a:r>
-            <a:r>
               <a:rPr lang="en-US" sz="1575" dirty="0">
                 <a:solidFill>
-                  <a:srgbClr val="5F6272"/>
-                </a:solidFill>
-                <a:latin typeface="Segoe UI"/>
-                <a:cs typeface="Segoe UI"/>
-              </a:rPr>
-              <a:t xml:space="preserve">(SE p. 311)</a:t>
-            </a:r>
-            <a:endParaRPr lang="en-US" sz="1950" dirty="0"/>
-          </a:p>
-        </p:txBody>
-      </p:sp>
-      <p:sp>
-        <p:nvSpPr>
-          <p:cNvPr id="9" name="Shape 9"/>
+                  <a:srgbClr val="16171D"/>
+                </a:solidFill>
+                <a:latin typeface="Segoe UI"/>
+                <a:cs typeface="Segoe UI"/>
+              </a:rPr>
+              <a:t xml:space="preserve">?</a:t>
+            </a:r>
+            <a:endParaRPr lang="en-US" sz="1575" dirty="0"/>
+          </a:p>
+        </p:txBody>
+      </p:sp>
+      <p:sp>
+        <p:nvSpPr>
+          <p:cNvPr id="13" name="Shape 13"/>
           <p:cNvSpPr txBox="1"/>
           <p:nvPr/>
         </p:nvSpPr>
         <p:spPr>
           <a:xfrm>
-            <a:off x="6362548" y="2458212"/>
-            <a:ext cx="2742194" cy="518922"/>
+            <a:off x="6419698" y="2362962"/>
+            <a:ext cx="4876648" cy="294894"/>
+          </a:xfrm>
+          <a:prstGeom prst="rect">
+            <a:avLst/>
+          </a:prstGeom>
+          <a:noFill/>
+          <a:ln>
+            <a:noFill/>
+          </a:ln>
+        </p:spPr>
+        <p:txBody>
+          <a:bodyPr wrap="square" lIns="36576" tIns="27432" rIns="36576" bIns="27432" anchor="t">
+            <a:noAutofit/>
+          </a:bodyPr>
+          <a:lstStyle/>
+          <a:p>
+            <a:pPr algn="l">
+              <a:lnSpc>
+                <a:spcPct val="100000"/>
+              </a:lnSpc>
+            </a:pPr>
+            <a:r>
+              <a:rPr lang="en-US" sz="1575" dirty="0" b="1">
+                <a:solidFill>
+                  <a:srgbClr val="16171D"/>
+                </a:solidFill>
+                <a:latin typeface="Segoe UI"/>
+                <a:cs typeface="Segoe UI"/>
+              </a:rPr>
+              <a:t xml:space="preserve">Formula:</a:t>
+            </a:r>
+            <a:r>
+              <a:rPr lang="en-US" sz="1575" dirty="0">
+                <a:solidFill>
+                  <a:srgbClr val="16171D"/>
+                </a:solidFill>
+                <a:latin typeface="Segoe UI"/>
+                <a:cs typeface="Segoe UI"/>
+              </a:rPr>
+              <a:t xml:space="preserve"> vertical line: </a:t>
+            </a:r>
+            <a:r>
+              <a:rPr lang="en-US" sz="1575" dirty="0" i="1">
+                <a:solidFill>
+                  <a:srgbClr val="16171D"/>
+                </a:solidFill>
+                <a:latin typeface="Cambria"/>
+                <a:cs typeface="Cambria"/>
+              </a:rPr>
+              <a:t xml:space="preserve">x</a:t>
+            </a:r>
+            <a:r>
+              <a:rPr lang="en-US" sz="1575" dirty="0">
+                <a:solidFill>
+                  <a:srgbClr val="16171D"/>
+                </a:solidFill>
+                <a:latin typeface="Cambria"/>
+                <a:cs typeface="Cambria"/>
+              </a:rPr>
+              <a:t xml:space="preserve"> =</a:t>
+            </a:r>
+            <a:r>
+              <a:rPr lang="en-US" sz="1575" dirty="0">
+                <a:solidFill>
+                  <a:srgbClr val="16171D"/>
+                </a:solidFill>
+                <a:latin typeface="Segoe UI"/>
+                <a:cs typeface="Segoe UI"/>
+              </a:rPr>
+              <a:t xml:space="preserve"> a number</a:t>
+            </a:r>
+            <a:endParaRPr lang="en-US" sz="1575" dirty="0"/>
+          </a:p>
+        </p:txBody>
+      </p:sp>
+      <p:sp>
+        <p:nvSpPr>
+          <p:cNvPr id="14" name="Shape 14"/>
+          <p:cNvSpPr txBox="1"/>
+          <p:nvPr/>
+        </p:nvSpPr>
+        <p:spPr>
+          <a:xfrm>
+            <a:off x="6419698" y="2695956"/>
+            <a:ext cx="4730363" cy="816102"/>
           </a:xfrm>
           <a:prstGeom prst="roundRect">
             <a:avLst>
@@ -8766,7 +10770,7 @@
               <a:t xml:space="preserve">ANSWER   </a:t>
             </a:r>
             <a:r>
-              <a:rPr lang="en-US" sz="2325" dirty="0" i="1">
+              <a:rPr lang="en-US" sz="1425" dirty="0" b="1" i="1">
                 <a:solidFill>
                   <a:srgbClr val="16171D"/>
                 </a:solidFill>
@@ -8776,7 +10780,7 @@
               <a:t xml:space="preserve">x</a:t>
             </a:r>
             <a:r>
-              <a:rPr lang="en-US" sz="2325" dirty="0">
+              <a:rPr lang="en-US" sz="1425" dirty="0" b="1">
                 <a:solidFill>
                   <a:srgbClr val="16171D"/>
                 </a:solidFill>
@@ -8785,27 +10789,171 @@
               </a:rPr>
               <a:t xml:space="preserve"> = 2</a:t>
             </a:r>
-            <a:endParaRPr lang="en-US" sz="2325" dirty="0"/>
-          </a:p>
-        </p:txBody>
-      </p:sp>
-      <p:sp>
-        <p:nvSpPr>
-          <p:cNvPr id="10" name="Shape 10"/>
+            <a:br>
+              <a:rPr lang="en-US" sz="1425" dirty="0">
+                <a:solidFill>
+                  <a:srgbClr val="16171D"/>
+                </a:solidFill>
+                <a:latin typeface="Segoe UI"/>
+                <a:cs typeface="Segoe UI"/>
+              </a:rPr>
+            </a:br>
+            <a:r>
+              <a:rPr lang="en-US" sz="1425" dirty="0" b="1">
+                <a:solidFill>
+                  <a:srgbClr val="16171D"/>
+                </a:solidFill>
+                <a:latin typeface="Segoe UI"/>
+                <a:cs typeface="Segoe UI"/>
+              </a:rPr>
+              <a:t xml:space="preserve">1.</a:t>
+            </a:r>
+            <a:r>
+              <a:rPr lang="en-US" sz="1425" dirty="0">
+                <a:solidFill>
+                  <a:srgbClr val="16171D"/>
+                </a:solidFill>
+                <a:latin typeface="Segoe UI"/>
+                <a:cs typeface="Segoe UI"/>
+              </a:rPr>
+              <a:t xml:space="preserve"> On a vertical line, </a:t>
+            </a:r>
+            <a:r>
+              <a:rPr lang="en-US" sz="1425" dirty="0" i="1">
+                <a:solidFill>
+                  <a:srgbClr val="16171D"/>
+                </a:solidFill>
+                <a:latin typeface="Cambria"/>
+                <a:cs typeface="Cambria"/>
+              </a:rPr>
+              <a:t xml:space="preserve">x</a:t>
+            </a:r>
+            <a:r>
+              <a:rPr lang="en-US" sz="1425" dirty="0">
+                <a:solidFill>
+                  <a:srgbClr val="16171D"/>
+                </a:solidFill>
+                <a:latin typeface="Segoe UI"/>
+                <a:cs typeface="Segoe UI"/>
+              </a:rPr>
+              <a:t xml:space="preserve"> never changes.</a:t>
+            </a:r>
+            <a:br>
+              <a:rPr lang="en-US" sz="1425" dirty="0">
+                <a:solidFill>
+                  <a:srgbClr val="16171D"/>
+                </a:solidFill>
+                <a:latin typeface="Segoe UI"/>
+                <a:cs typeface="Segoe UI"/>
+              </a:rPr>
+            </a:br>
+            <a:r>
+              <a:rPr lang="en-US" sz="1425" dirty="0" b="1">
+                <a:solidFill>
+                  <a:srgbClr val="16171D"/>
+                </a:solidFill>
+                <a:latin typeface="Segoe UI"/>
+                <a:cs typeface="Segoe UI"/>
+              </a:rPr>
+              <a:t xml:space="preserve">2.</a:t>
+            </a:r>
+            <a:r>
+              <a:rPr lang="en-US" sz="1425" dirty="0">
+                <a:solidFill>
+                  <a:srgbClr val="16171D"/>
+                </a:solidFill>
+                <a:latin typeface="Segoe UI"/>
+                <a:cs typeface="Segoe UI"/>
+              </a:rPr>
+              <a:t xml:space="preserve"> The point has </a:t>
+            </a:r>
+            <a:r>
+              <a:rPr lang="en-US" sz="1425" dirty="0" i="1">
+                <a:solidFill>
+                  <a:srgbClr val="16171D"/>
+                </a:solidFill>
+                <a:latin typeface="Cambria"/>
+                <a:cs typeface="Cambria"/>
+              </a:rPr>
+              <a:t xml:space="preserve">x</a:t>
+            </a:r>
+            <a:r>
+              <a:rPr lang="en-US" sz="1425" dirty="0">
+                <a:solidFill>
+                  <a:srgbClr val="16171D"/>
+                </a:solidFill>
+                <a:latin typeface="Cambria"/>
+                <a:cs typeface="Cambria"/>
+              </a:rPr>
+              <a:t xml:space="preserve"> = 2</a:t>
+            </a:r>
+            <a:r>
+              <a:rPr lang="en-US" sz="1425" dirty="0">
+                <a:solidFill>
+                  <a:srgbClr val="16171D"/>
+                </a:solidFill>
+                <a:latin typeface="Segoe UI"/>
+                <a:cs typeface="Segoe UI"/>
+              </a:rPr>
+              <a:t xml:space="preserve">, so the line is </a:t>
+            </a:r>
+            <a:r>
+              <a:rPr lang="en-US" sz="1425" dirty="0" i="1">
+                <a:solidFill>
+                  <a:srgbClr val="16171D"/>
+                </a:solidFill>
+                <a:latin typeface="Cambria"/>
+                <a:cs typeface="Cambria"/>
+              </a:rPr>
+              <a:t xml:space="preserve">x</a:t>
+            </a:r>
+            <a:r>
+              <a:rPr lang="en-US" sz="1425" dirty="0">
+                <a:solidFill>
+                  <a:srgbClr val="16171D"/>
+                </a:solidFill>
+                <a:latin typeface="Cambria"/>
+                <a:cs typeface="Cambria"/>
+              </a:rPr>
+              <a:t xml:space="preserve"> = 2</a:t>
+            </a:r>
+            <a:r>
+              <a:rPr lang="en-US" sz="1425" dirty="0">
+                <a:solidFill>
+                  <a:srgbClr val="16171D"/>
+                </a:solidFill>
+                <a:latin typeface="Segoe UI"/>
+                <a:cs typeface="Segoe UI"/>
+              </a:rPr>
+              <a:t xml:space="preserve">.</a:t>
+            </a:r>
+            <a:endParaRPr lang="en-US" sz="1425" dirty="0"/>
+          </a:p>
+        </p:txBody>
+      </p:sp>
+      <p:sp>
+        <p:nvSpPr>
+          <p:cNvPr id="19" name="Shape 19"/>
           <p:cNvSpPr txBox="1"/>
           <p:nvPr/>
         </p:nvSpPr>
         <p:spPr>
           <a:xfrm>
-            <a:off x="6362548" y="3243834"/>
-            <a:ext cx="5143348" cy="946404"/>
-          </a:xfrm>
-          <a:prstGeom prst="rect">
-            <a:avLst/>
-          </a:prstGeom>
-          <a:noFill/>
-          <a:ln>
-            <a:noFill/>
+            <a:off x="6210148" y="3816858"/>
+            <a:ext cx="5295748" cy="2065020"/>
+          </a:xfrm>
+          <a:prstGeom prst="roundRect">
+            <a:avLst>
+              <a:gd name="adj" fmla="val 8000"/>
+            </a:avLst>
+          </a:prstGeom>
+          <a:solidFill>
+            <a:srgbClr val="FFFFFF"/>
+          </a:solidFill>
+          <a:ln w="12700">
+            <a:solidFill>
+              <a:srgbClr val="E3E4EC"/>
+            </a:solidFill>
           </a:ln>
         </p:spPr>
         <p:txBody>
@@ -8819,40 +10967,168 @@
                 <a:spcPct val="100000"/>
               </a:lnSpc>
             </a:pPr>
-            <a:r>
-              <a:rPr lang="en-US" sz="1950" dirty="0">
-                <a:solidFill>
-                  <a:srgbClr val="16171D"/>
-                </a:solidFill>
-                <a:latin typeface="Segoe UI"/>
-                <a:cs typeface="Segoe UI"/>
-              </a:rPr>
-              <a:t xml:space="preserve">4. What is the product of the slopes of two perpendicular lines (neither vertical)? </a:t>
+            <a:endParaRPr lang="en-US" sz="1950" dirty="0"/>
+          </a:p>
+        </p:txBody>
+      </p:sp>
+      <p:sp>
+        <p:nvSpPr>
+          <p:cNvPr id="16" name="Shape 16"/>
+          <p:cNvSpPr txBox="1"/>
+          <p:nvPr/>
+        </p:nvSpPr>
+        <p:spPr>
+          <a:xfrm>
+            <a:off x="6419698" y="3988308"/>
+            <a:ext cx="4876648" cy="534924"/>
+          </a:xfrm>
+          <a:prstGeom prst="rect">
+            <a:avLst/>
+          </a:prstGeom>
+          <a:noFill/>
+          <a:ln>
+            <a:noFill/>
+          </a:ln>
+        </p:spPr>
+        <p:txBody>
+          <a:bodyPr wrap="square" lIns="36576" tIns="27432" rIns="36576" bIns="27432" anchor="t">
+            <a:noAutofit/>
+          </a:bodyPr>
+          <a:lstStyle/>
+          <a:p>
+            <a:pPr algn="l">
+              <a:lnSpc>
+                <a:spcPct val="100000"/>
+              </a:lnSpc>
+            </a:pPr>
+            <a:r>
+              <a:rPr lang="en-US" sz="1575" dirty="0" b="1">
+                <a:solidFill>
+                  <a:srgbClr val="16171D"/>
+                </a:solidFill>
+                <a:latin typeface="Segoe UI"/>
+                <a:cs typeface="Segoe UI"/>
+              </a:rPr>
+              <a:t xml:space="preserve">4.</a:t>
             </a:r>
             <a:r>
               <a:rPr lang="en-US" sz="1575" dirty="0">
                 <a:solidFill>
-                  <a:srgbClr val="5F6272"/>
-                </a:solidFill>
-                <a:latin typeface="Segoe UI"/>
-                <a:cs typeface="Segoe UI"/>
-              </a:rPr>
-              <a:t xml:space="preserve">(SE p. 308)</a:t>
-            </a:r>
-            <a:endParaRPr lang="en-US" sz="1950" dirty="0"/>
-          </a:p>
-        </p:txBody>
-      </p:sp>
-      <p:sp>
-        <p:nvSpPr>
-          <p:cNvPr id="11" name="Shape 11"/>
+                  <a:srgbClr val="16171D"/>
+                </a:solidFill>
+                <a:latin typeface="Segoe UI"/>
+                <a:cs typeface="Segoe UI"/>
+              </a:rPr>
+              <a:t xml:space="preserve"> What is the product of the slopes of two perpendicular lines (neither vertical)?</a:t>
+            </a:r>
+            <a:endParaRPr lang="en-US" sz="1575" dirty="0"/>
+          </a:p>
+        </p:txBody>
+      </p:sp>
+      <p:sp>
+        <p:nvSpPr>
+          <p:cNvPr id="17" name="Shape 17"/>
           <p:cNvSpPr txBox="1"/>
           <p:nvPr/>
         </p:nvSpPr>
         <p:spPr>
           <a:xfrm>
-            <a:off x="6362548" y="4323588"/>
-            <a:ext cx="2244715" cy="518922"/>
+            <a:off x="6419698" y="4561332"/>
+            <a:ext cx="4876648" cy="294894"/>
+          </a:xfrm>
+          <a:prstGeom prst="rect">
+            <a:avLst/>
+          </a:prstGeom>
+          <a:noFill/>
+          <a:ln>
+            <a:noFill/>
+          </a:ln>
+        </p:spPr>
+        <p:txBody>
+          <a:bodyPr wrap="square" lIns="36576" tIns="27432" rIns="36576" bIns="27432" anchor="t">
+            <a:noAutofit/>
+          </a:bodyPr>
+          <a:lstStyle/>
+          <a:p>
+            <a:pPr algn="l">
+              <a:lnSpc>
+                <a:spcPct val="100000"/>
+              </a:lnSpc>
+            </a:pPr>
+            <a:r>
+              <a:rPr lang="en-US" sz="1575" dirty="0" b="1">
+                <a:solidFill>
+                  <a:srgbClr val="16171D"/>
+                </a:solidFill>
+                <a:latin typeface="Segoe UI"/>
+                <a:cs typeface="Segoe UI"/>
+              </a:rPr>
+              <a:t xml:space="preserve">Formula:</a:t>
+            </a:r>
+            <a:r>
+              <a:rPr lang="en-US" sz="1575" dirty="0">
+                <a:solidFill>
+                  <a:srgbClr val="16171D"/>
+                </a:solidFill>
+                <a:latin typeface="Segoe UI"/>
+                <a:cs typeface="Segoe UI"/>
+              </a:rPr>
+              <a:t xml:space="preserve"> </a:t>
+            </a:r>
+            <a:r>
+              <a:rPr lang="en-US" sz="1575" dirty="0" i="1">
+                <a:solidFill>
+                  <a:srgbClr val="16171D"/>
+                </a:solidFill>
+                <a:latin typeface="Cambria"/>
+                <a:cs typeface="Cambria"/>
+              </a:rPr>
+              <a:t xml:space="preserve">m</a:t>
+            </a:r>
+            <a:r>
+              <a:rPr lang="en-US" sz="1575" dirty="0">
+                <a:solidFill>
+                  <a:srgbClr val="16171D"/>
+                </a:solidFill>
+                <a:latin typeface="Cambria"/>
+                <a:cs typeface="Cambria"/>
+              </a:rPr>
+              <a:t xml:space="preserve">₁ · </a:t>
+            </a:r>
+            <a:r>
+              <a:rPr lang="en-US" sz="1575" dirty="0" i="1">
+                <a:solidFill>
+                  <a:srgbClr val="16171D"/>
+                </a:solidFill>
+                <a:latin typeface="Cambria"/>
+                <a:cs typeface="Cambria"/>
+              </a:rPr>
+              <a:t xml:space="preserve">m</a:t>
+            </a:r>
+            <a:r>
+              <a:rPr lang="en-US" sz="1575" dirty="0">
+                <a:solidFill>
+                  <a:srgbClr val="16171D"/>
+                </a:solidFill>
+                <a:latin typeface="Cambria"/>
+                <a:cs typeface="Cambria"/>
+              </a:rPr>
+              <a:t xml:space="preserve">₂ = −1</a:t>
+            </a:r>
+            <a:endParaRPr lang="en-US" sz="1575" dirty="0"/>
+          </a:p>
+        </p:txBody>
+      </p:sp>
+      <p:sp>
+        <p:nvSpPr>
+          <p:cNvPr id="18" name="Shape 18"/>
+          <p:cNvSpPr txBox="1"/>
+          <p:nvPr/>
+        </p:nvSpPr>
+        <p:spPr>
+          <a:xfrm>
+            <a:off x="6419698" y="4894326"/>
+            <a:ext cx="4826135" cy="816102"/>
           </a:xfrm>
           <a:prstGeom prst="roundRect">
             <a:avLst>
@@ -8888,7 +11164,7 @@
               <a:t xml:space="preserve">ANSWER   </a:t>
             </a:r>
             <a:r>
-              <a:rPr lang="en-US" sz="2325" dirty="0">
+              <a:rPr lang="en-US" sz="1425" dirty="0" b="1">
                 <a:solidFill>
                   <a:srgbClr val="16171D"/>
                 </a:solidFill>
@@ -8897,13 +11173,151 @@
               </a:rPr>
               <a:t xml:space="preserve">−1</a:t>
             </a:r>
-            <a:endParaRPr lang="en-US" sz="2325" dirty="0"/>
-          </a:p>
-        </p:txBody>
-      </p:sp>
-      <p:sp>
-        <p:nvSpPr>
-          <p:cNvPr id="12" name="Slide Number 12"/>
+            <a:br>
+              <a:rPr lang="en-US" sz="1425" dirty="0">
+                <a:solidFill>
+                  <a:srgbClr val="16171D"/>
+                </a:solidFill>
+                <a:latin typeface="Segoe UI"/>
+                <a:cs typeface="Segoe UI"/>
+              </a:rPr>
+            </a:br>
+            <a:r>
+              <a:rPr lang="en-US" sz="1425" dirty="0" b="1">
+                <a:solidFill>
+                  <a:srgbClr val="16171D"/>
+                </a:solidFill>
+                <a:latin typeface="Segoe UI"/>
+                <a:cs typeface="Segoe UI"/>
+              </a:rPr>
+              <a:t xml:space="preserve">1.</a:t>
+            </a:r>
+            <a:r>
+              <a:rPr lang="en-US" sz="1425" dirty="0">
+                <a:solidFill>
+                  <a:srgbClr val="16171D"/>
+                </a:solidFill>
+                <a:latin typeface="Segoe UI"/>
+                <a:cs typeface="Segoe UI"/>
+              </a:rPr>
+              <a:t xml:space="preserve"> Example: slopes </a:t>
+            </a:r>
+            <a:r>
+              <a:rPr lang="en-US" sz="1425" dirty="0">
+                <a:solidFill>
+                  <a:srgbClr val="16171D"/>
+                </a:solidFill>
+                <a:latin typeface="Cambria"/>
+                <a:cs typeface="Cambria"/>
+              </a:rPr>
+              <a:t xml:space="preserve">2</a:t>
+            </a:r>
+            <a:r>
+              <a:rPr lang="en-US" sz="1425" dirty="0">
+                <a:solidFill>
+                  <a:srgbClr val="16171D"/>
+                </a:solidFill>
+                <a:latin typeface="Segoe UI"/>
+                <a:cs typeface="Segoe UI"/>
+              </a:rPr>
+              <a:t xml:space="preserve"> and </a:t>
+            </a:r>
+            <a:r>
+              <a:rPr lang="en-US" sz="1425" dirty="0">
+                <a:solidFill>
+                  <a:srgbClr val="16171D"/>
+                </a:solidFill>
+                <a:latin typeface="Cambria"/>
+                <a:cs typeface="Cambria"/>
+              </a:rPr>
+              <a:t xml:space="preserve">−½</a:t>
+            </a:r>
+            <a:r>
+              <a:rPr lang="en-US" sz="1425" dirty="0">
+                <a:solidFill>
+                  <a:srgbClr val="16171D"/>
+                </a:solidFill>
+                <a:latin typeface="Segoe UI"/>
+                <a:cs typeface="Segoe UI"/>
+              </a:rPr>
+              <a:t xml:space="preserve"> are perpendicular.</a:t>
+            </a:r>
+            <a:br>
+              <a:rPr lang="en-US" sz="1425" dirty="0">
+                <a:solidFill>
+                  <a:srgbClr val="16171D"/>
+                </a:solidFill>
+                <a:latin typeface="Segoe UI"/>
+                <a:cs typeface="Segoe UI"/>
+              </a:rPr>
+            </a:br>
+            <a:r>
+              <a:rPr lang="en-US" sz="1425" dirty="0" b="1">
+                <a:solidFill>
+                  <a:srgbClr val="16171D"/>
+                </a:solidFill>
+                <a:latin typeface="Segoe UI"/>
+                <a:cs typeface="Segoe UI"/>
+              </a:rPr>
+              <a:t xml:space="preserve">2.</a:t>
+            </a:r>
+            <a:r>
+              <a:rPr lang="en-US" sz="1425" dirty="0">
+                <a:solidFill>
+                  <a:srgbClr val="16171D"/>
+                </a:solidFill>
+                <a:latin typeface="Segoe UI"/>
+                <a:cs typeface="Segoe UI"/>
+              </a:rPr>
+              <a:t xml:space="preserve"> </a:t>
+            </a:r>
+            <a:r>
+              <a:rPr lang="en-US" sz="1425" dirty="0">
+                <a:solidFill>
+                  <a:srgbClr val="16171D"/>
+                </a:solidFill>
+                <a:latin typeface="Cambria"/>
+                <a:cs typeface="Cambria"/>
+              </a:rPr>
+              <a:t xml:space="preserve">2 · (−½) = −1</a:t>
+            </a:r>
+            <a:r>
+              <a:rPr lang="en-US" sz="1425" dirty="0">
+                <a:solidFill>
+                  <a:srgbClr val="16171D"/>
+                </a:solidFill>
+                <a:latin typeface="Segoe UI"/>
+                <a:cs typeface="Segoe UI"/>
+              </a:rPr>
+              <a:t xml:space="preserve">. The product is always </a:t>
+            </a:r>
+            <a:r>
+              <a:rPr lang="en-US" sz="1425" dirty="0">
+                <a:solidFill>
+                  <a:srgbClr val="16171D"/>
+                </a:solidFill>
+                <a:latin typeface="Cambria"/>
+                <a:cs typeface="Cambria"/>
+              </a:rPr>
+              <a:t xml:space="preserve">−1</a:t>
+            </a:r>
+            <a:r>
+              <a:rPr lang="en-US" sz="1425" dirty="0">
+                <a:solidFill>
+                  <a:srgbClr val="16171D"/>
+                </a:solidFill>
+                <a:latin typeface="Segoe UI"/>
+                <a:cs typeface="Segoe UI"/>
+              </a:rPr>
+              <a:t xml:space="preserve">.</a:t>
+            </a:r>
+            <a:endParaRPr lang="en-US" sz="1425" dirty="0"/>
+          </a:p>
+        </p:txBody>
+      </p:sp>
+      <p:sp>
+        <p:nvSpPr>
+          <p:cNvPr id="20" name="Slide Number 20"/>
           <p:cNvSpPr txBox="1"/>
           <p:nvPr/>
         </p:nvSpPr>
@@ -8977,7 +11391,7 @@
                                           </p:stCondLst>
                                         </p:cTn>
                                         <p:tgtEl>
-                                          <p:spTgt spid="5"/>
+                                          <p:spTgt spid="6"/>
                                         </p:tgtEl>
                                         <p:attrNameLst>
                                           <p:attrName>style.visibility</p:attrName>
@@ -8991,7 +11405,7 @@
                                       <p:cBhvr>
                                         <p:cTn id="4" dur="500"/>
                                         <p:tgtEl>
-                                          <p:spTgt spid="5"/>
+                                          <p:spTgt spid="6"/>
                                         </p:tgtEl>
                                       </p:cBhvr>
                                     </p:animEffect>
@@ -8999,7 +11413,7 @@
                                       <p:cBhvr>
                                         <p:cTn id="5" dur="500" fill="hold"/>
                                         <p:tgtEl>
-                                          <p:spTgt spid="5"/>
+                                          <p:spTgt spid="6"/>
                                         </p:tgtEl>
                                         <p:attrNameLst>
                                           <p:attrName>ppt_w</p:attrName>
@@ -9022,7 +11436,7 @@
                                       <p:cBhvr>
                                         <p:cTn id="6" dur="500" fill="hold"/>
                                         <p:tgtEl>
-                                          <p:spTgt spid="5"/>
+                                          <p:spTgt spid="6"/>
                                         </p:tgtEl>
                                         <p:attrNameLst>
                                           <p:attrName>ppt_h</p:attrName>
@@ -9076,7 +11490,7 @@
                                           </p:stCondLst>
                                         </p:cTn>
                                         <p:tgtEl>
-                                          <p:spTgt spid="7"/>
+                                          <p:spTgt spid="10"/>
                                         </p:tgtEl>
                                         <p:attrNameLst>
                                           <p:attrName>style.visibility</p:attrName>
@@ -9090,7 +11504,7 @@
                                       <p:cBhvr>
                                         <p:cTn id="11" dur="500"/>
                                         <p:tgtEl>
-                                          <p:spTgt spid="7"/>
+                                          <p:spTgt spid="10"/>
                                         </p:tgtEl>
                                       </p:cBhvr>
                                     </p:animEffect>
@@ -9098,7 +11512,7 @@
                                       <p:cBhvr>
                                         <p:cTn id="12" dur="500" fill="hold"/>
                                         <p:tgtEl>
-                                          <p:spTgt spid="7"/>
+                                          <p:spTgt spid="10"/>
                                         </p:tgtEl>
                                         <p:attrNameLst>
                                           <p:attrName>ppt_w</p:attrName>
@@ -9121,7 +11535,7 @@
                                       <p:cBhvr>
                                         <p:cTn id="13" dur="500" fill="hold"/>
                                         <p:tgtEl>
-                                          <p:spTgt spid="7"/>
+                                          <p:spTgt spid="10"/>
                                         </p:tgtEl>
                                         <p:attrNameLst>
                                           <p:attrName>ppt_h</p:attrName>
@@ -9175,7 +11589,7 @@
                                           </p:stCondLst>
                                         </p:cTn>
                                         <p:tgtEl>
-                                          <p:spTgt spid="9"/>
+                                          <p:spTgt spid="14"/>
                                         </p:tgtEl>
                                         <p:attrNameLst>
                                           <p:attrName>style.visibility</p:attrName>
@@ -9189,7 +11603,7 @@
                                       <p:cBhvr>
                                         <p:cTn id="18" dur="500"/>
                                         <p:tgtEl>
-                                          <p:spTgt spid="9"/>
+                                          <p:spTgt spid="14"/>
                                         </p:tgtEl>
                                       </p:cBhvr>
                                     </p:animEffect>
@@ -9197,7 +11611,7 @@
                                       <p:cBhvr>
                                         <p:cTn id="19" dur="500" fill="hold"/>
                                         <p:tgtEl>
-                                          <p:spTgt spid="9"/>
+                                          <p:spTgt spid="14"/>
                                         </p:tgtEl>
                                         <p:attrNameLst>
                                           <p:attrName>ppt_w</p:attrName>
@@ -9220,7 +11634,7 @@
                                       <p:cBhvr>
                                         <p:cTn id="20" dur="500" fill="hold"/>
                                         <p:tgtEl>
-                                          <p:spTgt spid="9"/>
+                                          <p:spTgt spid="14"/>
                                         </p:tgtEl>
                                         <p:attrNameLst>
                                           <p:attrName>ppt_h</p:attrName>
@@ -9274,7 +11688,7 @@
                                           </p:stCondLst>
                                         </p:cTn>
                                         <p:tgtEl>
-                                          <p:spTgt spid="11"/>
+                                          <p:spTgt spid="18"/>
                                         </p:tgtEl>
                                         <p:attrNameLst>
                                           <p:attrName>style.visibility</p:attrName>
@@ -9288,7 +11702,7 @@
                                       <p:cBhvr>
                                         <p:cTn id="25" dur="500"/>
                                         <p:tgtEl>
-                                          <p:spTgt spid="11"/>
+                                          <p:spTgt spid="18"/>
                                         </p:tgtEl>
                                       </p:cBhvr>
                                     </p:animEffect>
@@ -9296,7 +11710,7 @@
                                       <p:cBhvr>
                                         <p:cTn id="26" dur="500" fill="hold"/>
                                         <p:tgtEl>
-                                          <p:spTgt spid="11"/>
+                                          <p:spTgt spid="18"/>
                                         </p:tgtEl>
                                         <p:attrNameLst>
                                           <p:attrName>ppt_w</p:attrName>
@@ -9319,7 +11733,7 @@
                                       <p:cBhvr>
                                         <p:cTn id="27" dur="500" fill="hold"/>
                                         <p:tgtEl>
-                                          <p:spTgt spid="11"/>
+                                          <p:spTgt spid="18"/>
                                         </p:tgtEl>
                                         <p:attrNameLst>
                                           <p:attrName>ppt_h</p:attrName>

--- a/IEP/t2-lesson3-perpendicular-slopes-IEP.pptx
+++ b/IEP/t2-lesson3-perpendicular-slopes-IEP.pptx
@@ -404,7 +404,7 @@
           <a:p>
             <a:r>
               <a:rPr lang="en-US" dirty="0"/>
-              <a:t>Give students time to try all items before revealing. Students may use the steps slide and their notes.</a:t>
+              <a:t>Give students time to try all items before revealing. Students may use the steps slide and their notes. After each answer, click once per step and read it aloud so students can find where their work went wrong.</a:t>
             </a:r>
           </a:p>
         </p:txBody>
@@ -5846,14 +5846,14 @@
       </p:sp>
       <p:sp>
         <p:nvSpPr>
-          <p:cNvPr id="6" name="Shape 6"/>
+          <p:cNvPr id="9" name="Shape 9"/>
           <p:cNvSpPr txBox="1"/>
           <p:nvPr/>
         </p:nvSpPr>
         <p:spPr>
           <a:xfrm>
             <a:off x="685800" y="1618488"/>
-            <a:ext cx="10820095" cy="1309116"/>
+            <a:ext cx="3479698" cy="2776728"/>
           </a:xfrm>
           <a:prstGeom prst="roundRect">
             <a:avLst>
@@ -5893,7 +5893,7 @@
         <p:spPr>
           <a:xfrm>
             <a:off x="895350" y="1789938"/>
-            <a:ext cx="10400995" cy="352044"/>
+            <a:ext cx="3060598" cy="649224"/>
           </a:xfrm>
           <a:prstGeom prst="rect">
             <a:avLst/>
@@ -5976,7 +5976,7 @@
         </p:nvSpPr>
         <p:spPr>
           <a:xfrm>
-            <a:off x="895350" y="2237232"/>
+            <a:off x="895350" y="2534412"/>
             <a:ext cx="2576368" cy="518922"/>
           </a:xfrm>
           <a:prstGeom prst="roundRect">
@@ -6058,14 +6058,176 @@
       </p:sp>
       <p:sp>
         <p:nvSpPr>
-          <p:cNvPr id="9" name="Shape 9"/>
+          <p:cNvPr id="6" name="Shape 6"/>
           <p:cNvSpPr txBox="1"/>
           <p:nvPr/>
         </p:nvSpPr>
         <p:spPr>
           <a:xfrm>
-            <a:off x="685800" y="3060954"/>
-            <a:ext cx="10820095" cy="1309116"/>
+            <a:off x="895350" y="3148584"/>
+            <a:ext cx="3060598" cy="294894"/>
+          </a:xfrm>
+          <a:prstGeom prst="rect">
+            <a:avLst/>
+          </a:prstGeom>
+          <a:noFill/>
+          <a:ln>
+            <a:noFill/>
+          </a:ln>
+        </p:spPr>
+        <p:txBody>
+          <a:bodyPr wrap="square" lIns="36576" tIns="27432" rIns="36576" bIns="27432" anchor="t">
+            <a:noAutofit/>
+          </a:bodyPr>
+          <a:lstStyle/>
+          <a:p>
+            <a:pPr algn="l">
+              <a:lnSpc>
+                <a:spcPct val="100000"/>
+              </a:lnSpc>
+            </a:pPr>
+            <a:r>
+              <a:rPr lang="en-US" sz="1575" dirty="0" b="1">
+                <a:solidFill>
+                  <a:srgbClr val="16171D"/>
+                </a:solidFill>
+                <a:latin typeface="Segoe UI"/>
+                <a:cs typeface="Segoe UI"/>
+              </a:rPr>
+              <a:t xml:space="preserve">1.</a:t>
+            </a:r>
+            <a:r>
+              <a:rPr lang="en-US" sz="1575" dirty="0">
+                <a:solidFill>
+                  <a:srgbClr val="16171D"/>
+                </a:solidFill>
+                <a:latin typeface="Segoe UI"/>
+                <a:cs typeface="Segoe UI"/>
+              </a:rPr>
+              <a:t xml:space="preserve"> Flip 3/4: 4/3.</a:t>
+            </a:r>
+            <a:endParaRPr lang="en-US" sz="1575" dirty="0"/>
+          </a:p>
+        </p:txBody>
+      </p:sp>
+      <p:sp>
+        <p:nvSpPr>
+          <p:cNvPr id="7" name="Shape 7"/>
+          <p:cNvSpPr txBox="1"/>
+          <p:nvPr/>
+        </p:nvSpPr>
+        <p:spPr>
+          <a:xfrm>
+            <a:off x="895350" y="3538728"/>
+            <a:ext cx="3060598" cy="294894"/>
+          </a:xfrm>
+          <a:prstGeom prst="rect">
+            <a:avLst/>
+          </a:prstGeom>
+          <a:noFill/>
+          <a:ln>
+            <a:noFill/>
+          </a:ln>
+        </p:spPr>
+        <p:txBody>
+          <a:bodyPr wrap="square" lIns="36576" tIns="27432" rIns="36576" bIns="27432" anchor="t">
+            <a:noAutofit/>
+          </a:bodyPr>
+          <a:lstStyle/>
+          <a:p>
+            <a:pPr algn="l">
+              <a:lnSpc>
+                <a:spcPct val="100000"/>
+              </a:lnSpc>
+            </a:pPr>
+            <a:r>
+              <a:rPr lang="en-US" sz="1575" dirty="0" b="1">
+                <a:solidFill>
+                  <a:srgbClr val="16171D"/>
+                </a:solidFill>
+                <a:latin typeface="Segoe UI"/>
+                <a:cs typeface="Segoe UI"/>
+              </a:rPr>
+              <a:t xml:space="preserve">2.</a:t>
+            </a:r>
+            <a:r>
+              <a:rPr lang="en-US" sz="1575" dirty="0">
+                <a:solidFill>
+                  <a:srgbClr val="16171D"/>
+                </a:solidFill>
+                <a:latin typeface="Segoe UI"/>
+                <a:cs typeface="Segoe UI"/>
+              </a:rPr>
+              <a:t xml:space="preserve"> Change the sign: −4/3.</a:t>
+            </a:r>
+            <a:endParaRPr lang="en-US" sz="1575" dirty="0"/>
+          </a:p>
+        </p:txBody>
+      </p:sp>
+      <p:sp>
+        <p:nvSpPr>
+          <p:cNvPr id="8" name="Shape 8"/>
+          <p:cNvSpPr txBox="1"/>
+          <p:nvPr/>
+        </p:nvSpPr>
+        <p:spPr>
+          <a:xfrm>
+            <a:off x="895350" y="3928872"/>
+            <a:ext cx="3060598" cy="294894"/>
+          </a:xfrm>
+          <a:prstGeom prst="rect">
+            <a:avLst/>
+          </a:prstGeom>
+          <a:noFill/>
+          <a:ln>
+            <a:noFill/>
+          </a:ln>
+        </p:spPr>
+        <p:txBody>
+          <a:bodyPr wrap="square" lIns="36576" tIns="27432" rIns="36576" bIns="27432" anchor="t">
+            <a:noAutofit/>
+          </a:bodyPr>
+          <a:lstStyle/>
+          <a:p>
+            <a:pPr algn="l">
+              <a:lnSpc>
+                <a:spcPct val="100000"/>
+              </a:lnSpc>
+            </a:pPr>
+            <a:r>
+              <a:rPr lang="en-US" sz="1575" dirty="0" b="1">
+                <a:solidFill>
+                  <a:srgbClr val="16171D"/>
+                </a:solidFill>
+                <a:latin typeface="Segoe UI"/>
+                <a:cs typeface="Segoe UI"/>
+              </a:rPr>
+              <a:t xml:space="preserve">3.</a:t>
+            </a:r>
+            <a:r>
+              <a:rPr lang="en-US" sz="1575" dirty="0">
+                <a:solidFill>
+                  <a:srgbClr val="16171D"/>
+                </a:solidFill>
+                <a:latin typeface="Segoe UI"/>
+                <a:cs typeface="Segoe UI"/>
+              </a:rPr>
+              <a:t xml:space="preserve"> Check: 3/4 · (−4/3) = −1.</a:t>
+            </a:r>
+            <a:endParaRPr lang="en-US" sz="1575" dirty="0"/>
+          </a:p>
+        </p:txBody>
+      </p:sp>
+      <p:sp>
+        <p:nvSpPr>
+          <p:cNvPr id="14" name="Shape 14"/>
+          <p:cNvSpPr txBox="1"/>
+          <p:nvPr/>
+        </p:nvSpPr>
+        <p:spPr>
+          <a:xfrm>
+            <a:off x="4355998" y="1618488"/>
+            <a:ext cx="3479698" cy="2866644"/>
           </a:xfrm>
           <a:prstGeom prst="roundRect">
             <a:avLst>
@@ -6098,14 +6260,14 @@
       </p:sp>
       <p:sp>
         <p:nvSpPr>
-          <p:cNvPr id="7" name="Shape 7"/>
+          <p:cNvPr id="10" name="Shape 10"/>
           <p:cNvSpPr txBox="1"/>
           <p:nvPr/>
         </p:nvSpPr>
         <p:spPr>
           <a:xfrm>
-            <a:off x="895350" y="3232404"/>
-            <a:ext cx="10400995" cy="352044"/>
+            <a:off x="4565548" y="1789938"/>
+            <a:ext cx="3060598" cy="649224"/>
           </a:xfrm>
           <a:prstGeom prst="rect">
             <a:avLst/>
@@ -6142,13 +6304,13 @@
       </p:sp>
       <p:sp>
         <p:nvSpPr>
-          <p:cNvPr id="8" name="Shape 8"/>
+          <p:cNvPr id="11" name="Shape 11"/>
           <p:cNvSpPr txBox="1"/>
           <p:nvPr/>
         </p:nvSpPr>
         <p:spPr>
           <a:xfrm>
-            <a:off x="895350" y="3679698"/>
+            <a:off x="4565548" y="2534412"/>
             <a:ext cx="2742194" cy="518922"/>
           </a:xfrm>
           <a:prstGeom prst="roundRect">
@@ -6216,8 +6378,116 @@
         </p:nvSpPr>
         <p:spPr>
           <a:xfrm>
-            <a:off x="685800" y="4503420"/>
-            <a:ext cx="10820095" cy="1309116"/>
+            <a:off x="4565548" y="3148584"/>
+            <a:ext cx="3060598" cy="534924"/>
+          </a:xfrm>
+          <a:prstGeom prst="rect">
+            <a:avLst/>
+          </a:prstGeom>
+          <a:noFill/>
+          <a:ln>
+            <a:noFill/>
+          </a:ln>
+        </p:spPr>
+        <p:txBody>
+          <a:bodyPr wrap="square" lIns="36576" tIns="27432" rIns="36576" bIns="27432" anchor="t">
+            <a:noAutofit/>
+          </a:bodyPr>
+          <a:lstStyle/>
+          <a:p>
+            <a:pPr algn="l">
+              <a:lnSpc>
+                <a:spcPct val="100000"/>
+              </a:lnSpc>
+            </a:pPr>
+            <a:r>
+              <a:rPr lang="en-US" sz="1575" dirty="0" b="1">
+                <a:solidFill>
+                  <a:srgbClr val="16171D"/>
+                </a:solidFill>
+                <a:latin typeface="Segoe UI"/>
+                <a:cs typeface="Segoe UI"/>
+              </a:rPr>
+              <a:t xml:space="preserve">1.</a:t>
+            </a:r>
+            <a:r>
+              <a:rPr lang="en-US" sz="1575" dirty="0">
+                <a:solidFill>
+                  <a:srgbClr val="16171D"/>
+                </a:solidFill>
+                <a:latin typeface="Segoe UI"/>
+                <a:cs typeface="Segoe UI"/>
+              </a:rPr>
+              <a:t xml:space="preserve"> On a vertical line, x never changes.</a:t>
+            </a:r>
+            <a:endParaRPr lang="en-US" sz="1575" dirty="0"/>
+          </a:p>
+        </p:txBody>
+      </p:sp>
+      <p:sp>
+        <p:nvSpPr>
+          <p:cNvPr id="13" name="Shape 13"/>
+          <p:cNvSpPr txBox="1"/>
+          <p:nvPr/>
+        </p:nvSpPr>
+        <p:spPr>
+          <a:xfrm>
+            <a:off x="4565548" y="3778758"/>
+            <a:ext cx="3060598" cy="534924"/>
+          </a:xfrm>
+          <a:prstGeom prst="rect">
+            <a:avLst/>
+          </a:prstGeom>
+          <a:noFill/>
+          <a:ln>
+            <a:noFill/>
+          </a:ln>
+        </p:spPr>
+        <p:txBody>
+          <a:bodyPr wrap="square" lIns="36576" tIns="27432" rIns="36576" bIns="27432" anchor="t">
+            <a:noAutofit/>
+          </a:bodyPr>
+          <a:lstStyle/>
+          <a:p>
+            <a:pPr algn="l">
+              <a:lnSpc>
+                <a:spcPct val="100000"/>
+              </a:lnSpc>
+            </a:pPr>
+            <a:r>
+              <a:rPr lang="en-US" sz="1575" dirty="0" b="1">
+                <a:solidFill>
+                  <a:srgbClr val="16171D"/>
+                </a:solidFill>
+                <a:latin typeface="Segoe UI"/>
+                <a:cs typeface="Segoe UI"/>
+              </a:rPr>
+              <a:t xml:space="preserve">2.</a:t>
+            </a:r>
+            <a:r>
+              <a:rPr lang="en-US" sz="1575" dirty="0">
+                <a:solidFill>
+                  <a:srgbClr val="16171D"/>
+                </a:solidFill>
+                <a:latin typeface="Segoe UI"/>
+                <a:cs typeface="Segoe UI"/>
+              </a:rPr>
+              <a:t xml:space="preserve"> The point has x = 5, so the line is x = 5.</a:t>
+            </a:r>
+            <a:endParaRPr lang="en-US" sz="1575" dirty="0"/>
+          </a:p>
+        </p:txBody>
+      </p:sp>
+      <p:sp>
+        <p:nvSpPr>
+          <p:cNvPr id="20" name="Shape 20"/>
+          <p:cNvSpPr txBox="1"/>
+          <p:nvPr/>
+        </p:nvSpPr>
+        <p:spPr>
+          <a:xfrm>
+            <a:off x="8026197" y="1618488"/>
+            <a:ext cx="3479698" cy="3611118"/>
           </a:xfrm>
           <a:prstGeom prst="roundRect">
             <a:avLst>
@@ -6250,14 +6520,14 @@
       </p:sp>
       <p:sp>
         <p:nvSpPr>
-          <p:cNvPr id="10" name="Shape 10"/>
+          <p:cNvPr id="15" name="Shape 15"/>
           <p:cNvSpPr txBox="1"/>
           <p:nvPr/>
         </p:nvSpPr>
         <p:spPr>
           <a:xfrm>
-            <a:off x="895350" y="4674870"/>
-            <a:ext cx="10400995" cy="352044"/>
+            <a:off x="8235747" y="1789938"/>
+            <a:ext cx="3060598" cy="649224"/>
           </a:xfrm>
           <a:prstGeom prst="rect">
             <a:avLst/>
@@ -6334,14 +6604,14 @@
       </p:sp>
       <p:sp>
         <p:nvSpPr>
-          <p:cNvPr id="11" name="Shape 11"/>
+          <p:cNvPr id="16" name="Shape 16"/>
           <p:cNvSpPr txBox="1"/>
           <p:nvPr/>
         </p:nvSpPr>
         <p:spPr>
           <a:xfrm>
-            <a:off x="895350" y="5122164"/>
-            <a:ext cx="3405500" cy="518922"/>
+            <a:off x="8235747" y="2534412"/>
+            <a:ext cx="3060598" cy="873252"/>
           </a:xfrm>
           <a:prstGeom prst="roundRect">
             <a:avLst>
@@ -6422,7 +6692,169 @@
       </p:sp>
       <p:sp>
         <p:nvSpPr>
-          <p:cNvPr id="13" name="Slide Number 13"/>
+          <p:cNvPr id="17" name="Shape 17"/>
+          <p:cNvSpPr txBox="1"/>
+          <p:nvPr/>
+        </p:nvSpPr>
+        <p:spPr>
+          <a:xfrm>
+            <a:off x="8235747" y="3502914"/>
+            <a:ext cx="3060598" cy="294894"/>
+          </a:xfrm>
+          <a:prstGeom prst="rect">
+            <a:avLst/>
+          </a:prstGeom>
+          <a:noFill/>
+          <a:ln>
+            <a:noFill/>
+          </a:ln>
+        </p:spPr>
+        <p:txBody>
+          <a:bodyPr wrap="square" lIns="36576" tIns="27432" rIns="36576" bIns="27432" anchor="t">
+            <a:noAutofit/>
+          </a:bodyPr>
+          <a:lstStyle/>
+          <a:p>
+            <a:pPr algn="l">
+              <a:lnSpc>
+                <a:spcPct val="100000"/>
+              </a:lnSpc>
+            </a:pPr>
+            <a:r>
+              <a:rPr lang="en-US" sz="1575" dirty="0" b="1">
+                <a:solidFill>
+                  <a:srgbClr val="16171D"/>
+                </a:solidFill>
+                <a:latin typeface="Segoe UI"/>
+                <a:cs typeface="Segoe UI"/>
+              </a:rPr>
+              <a:t xml:space="preserve">1.</a:t>
+            </a:r>
+            <a:r>
+              <a:rPr lang="en-US" sz="1575" dirty="0">
+                <a:solidFill>
+                  <a:srgbClr val="16171D"/>
+                </a:solidFill>
+                <a:latin typeface="Segoe UI"/>
+                <a:cs typeface="Segoe UI"/>
+              </a:rPr>
+              <a:t xml:space="preserve"> The slope of y = −x is −1.</a:t>
+            </a:r>
+            <a:endParaRPr lang="en-US" sz="1575" dirty="0"/>
+          </a:p>
+        </p:txBody>
+      </p:sp>
+      <p:sp>
+        <p:nvSpPr>
+          <p:cNvPr id="18" name="Shape 18"/>
+          <p:cNvSpPr txBox="1"/>
+          <p:nvPr/>
+        </p:nvSpPr>
+        <p:spPr>
+          <a:xfrm>
+            <a:off x="8235747" y="3893058"/>
+            <a:ext cx="3060598" cy="534924"/>
+          </a:xfrm>
+          <a:prstGeom prst="rect">
+            <a:avLst/>
+          </a:prstGeom>
+          <a:noFill/>
+          <a:ln>
+            <a:noFill/>
+          </a:ln>
+        </p:spPr>
+        <p:txBody>
+          <a:bodyPr wrap="square" lIns="36576" tIns="27432" rIns="36576" bIns="27432" anchor="t">
+            <a:noAutofit/>
+          </a:bodyPr>
+          <a:lstStyle/>
+          <a:p>
+            <a:pPr algn="l">
+              <a:lnSpc>
+                <a:spcPct val="100000"/>
+              </a:lnSpc>
+            </a:pPr>
+            <a:r>
+              <a:rPr lang="en-US" sz="1575" dirty="0" b="1">
+                <a:solidFill>
+                  <a:srgbClr val="16171D"/>
+                </a:solidFill>
+                <a:latin typeface="Segoe UI"/>
+                <a:cs typeface="Segoe UI"/>
+              </a:rPr>
+              <a:t xml:space="preserve">2.</a:t>
+            </a:r>
+            <a:r>
+              <a:rPr lang="en-US" sz="1575" dirty="0">
+                <a:solidFill>
+                  <a:srgbClr val="16171D"/>
+                </a:solidFill>
+                <a:latin typeface="Segoe UI"/>
+                <a:cs typeface="Segoe UI"/>
+              </a:rPr>
+              <a:t xml:space="preserve"> Flip and change the sign: −1 becomes 1.</a:t>
+            </a:r>
+            <a:endParaRPr lang="en-US" sz="1575" dirty="0"/>
+          </a:p>
+        </p:txBody>
+      </p:sp>
+      <p:sp>
+        <p:nvSpPr>
+          <p:cNvPr id="19" name="Shape 19"/>
+          <p:cNvSpPr txBox="1"/>
+          <p:nvPr/>
+        </p:nvSpPr>
+        <p:spPr>
+          <a:xfrm>
+            <a:off x="8235747" y="4523232"/>
+            <a:ext cx="3060598" cy="534924"/>
+          </a:xfrm>
+          <a:prstGeom prst="rect">
+            <a:avLst/>
+          </a:prstGeom>
+          <a:noFill/>
+          <a:ln>
+            <a:noFill/>
+          </a:ln>
+        </p:spPr>
+        <p:txBody>
+          <a:bodyPr wrap="square" lIns="36576" tIns="27432" rIns="36576" bIns="27432" anchor="t">
+            <a:noAutofit/>
+          </a:bodyPr>
+          <a:lstStyle/>
+          <a:p>
+            <a:pPr algn="l">
+              <a:lnSpc>
+                <a:spcPct val="100000"/>
+              </a:lnSpc>
+            </a:pPr>
+            <a:r>
+              <a:rPr lang="en-US" sz="1575" dirty="0" b="1">
+                <a:solidFill>
+                  <a:srgbClr val="16171D"/>
+                </a:solidFill>
+                <a:latin typeface="Segoe UI"/>
+                <a:cs typeface="Segoe UI"/>
+              </a:rPr>
+              <a:t xml:space="preserve">3.</a:t>
+            </a:r>
+            <a:r>
+              <a:rPr lang="en-US" sz="1575" dirty="0">
+                <a:solidFill>
+                  <a:srgbClr val="16171D"/>
+                </a:solidFill>
+                <a:latin typeface="Segoe UI"/>
+                <a:cs typeface="Segoe UI"/>
+              </a:rPr>
+              <a:t xml:space="preserve"> (0, 3) is on the y-axis, so b = 3: y = x + 3.</a:t>
+            </a:r>
+            <a:endParaRPr lang="en-US" sz="1575" dirty="0"/>
+          </a:p>
+        </p:txBody>
+      </p:sp>
+      <p:sp>
+        <p:nvSpPr>
+          <p:cNvPr id="21" name="Slide Number 21"/>
           <p:cNvSpPr txBox="1"/>
           <p:nvPr/>
         </p:nvSpPr>
@@ -6582,7 +7014,7 @@
                             </p:stCondLst>
                             <p:childTnLst>
                               <p:par>
-                                <p:cTn id="14" presetID="53" presetClass="entr" presetSubtype="16" fill="hold" nodeType="clickEffect">
+                                <p:cTn id="14" presetID="42" presetClass="entr" presetSubtype="0" fill="hold" nodeType="clickEffect">
                                   <p:stCondLst>
                                     <p:cond delay="0"/>
                                   </p:stCondLst>
@@ -6590,6 +7022,204 @@
                                     <p:set>
                                       <p:cBhvr>
                                         <p:cTn id="10" dur="1" fill="hold">
+                                          <p:stCondLst>
+                                            <p:cond delay="0"/>
+                                          </p:stCondLst>
+                                        </p:cTn>
+                                        <p:tgtEl>
+                                          <p:spTgt spid="6"/>
+                                        </p:tgtEl>
+                                        <p:attrNameLst>
+                                          <p:attrName>style.visibility</p:attrName>
+                                        </p:attrNameLst>
+                                      </p:cBhvr>
+                                      <p:to>
+                                        <p:strVal val="visible"/>
+                                      </p:to>
+                                    </p:set>
+                                    <p:animEffect transition="in" filter="fade">
+                                      <p:cBhvr>
+                                        <p:cTn id="11" dur="500"/>
+                                        <p:tgtEl>
+                                          <p:spTgt spid="6"/>
+                                        </p:tgtEl>
+                                      </p:cBhvr>
+                                    </p:animEffect>
+                                    <p:anim calcmode="lin" valueType="num">
+                                      <p:cBhvr>
+                                        <p:cTn id="12" dur="500" fill="hold"/>
+                                        <p:tgtEl>
+                                          <p:spTgt spid="6"/>
+                                        </p:tgtEl>
+                                        <p:attrNameLst>
+                                          <p:attrName>ppt_x</p:attrName>
+                                        </p:attrNameLst>
+                                      </p:cBhvr>
+                                      <p:tavLst>
+                                        <p:tav tm="0">
+                                          <p:val>
+                                            <p:strVal val="#ppt_x"/>
+                                          </p:val>
+                                        </p:tav>
+                                        <p:tav tm="100000">
+                                          <p:val>
+                                            <p:strVal val="#ppt_x"/>
+                                          </p:val>
+                                        </p:tav>
+                                      </p:tavLst>
+                                    </p:anim>
+                                    <p:anim calcmode="lin" valueType="num">
+                                      <p:cBhvr>
+                                        <p:cTn id="13" dur="500" fill="hold"/>
+                                        <p:tgtEl>
+                                          <p:spTgt spid="6"/>
+                                        </p:tgtEl>
+                                        <p:attrNameLst>
+                                          <p:attrName>ppt_y</p:attrName>
+                                        </p:attrNameLst>
+                                      </p:cBhvr>
+                                      <p:tavLst>
+                                        <p:tav tm="0">
+                                          <p:val>
+                                            <p:strVal val="#ppt_y+.1"/>
+                                          </p:val>
+                                        </p:tav>
+                                        <p:tav tm="100000">
+                                          <p:val>
+                                            <p:strVal val="#ppt_y"/>
+                                          </p:val>
+                                        </p:tav>
+                                      </p:tavLst>
+                                    </p:anim>
+                                  </p:childTnLst>
+                                </p:cTn>
+                              </p:par>
+                            </p:childTnLst>
+                          </p:cTn>
+                        </p:par>
+                      </p:childTnLst>
+                    </p:cTn>
+                  </p:par>
+                  <p:par>
+                    <p:cTn id="22" fill="hold">
+                      <p:stCondLst>
+                        <p:cond delay="indefinite"/>
+                      </p:stCondLst>
+                      <p:childTnLst>
+                        <p:par>
+                          <p:cTn id="23" fill="hold">
+                            <p:stCondLst>
+                              <p:cond delay="0"/>
+                            </p:stCondLst>
+                            <p:childTnLst>
+                              <p:par>
+                                <p:cTn id="21" presetID="42" presetClass="entr" presetSubtype="0" fill="hold" nodeType="clickEffect">
+                                  <p:stCondLst>
+                                    <p:cond delay="0"/>
+                                  </p:stCondLst>
+                                  <p:childTnLst>
+                                    <p:set>
+                                      <p:cBhvr>
+                                        <p:cTn id="17" dur="1" fill="hold">
+                                          <p:stCondLst>
+                                            <p:cond delay="0"/>
+                                          </p:stCondLst>
+                                        </p:cTn>
+                                        <p:tgtEl>
+                                          <p:spTgt spid="7"/>
+                                        </p:tgtEl>
+                                        <p:attrNameLst>
+                                          <p:attrName>style.visibility</p:attrName>
+                                        </p:attrNameLst>
+                                      </p:cBhvr>
+                                      <p:to>
+                                        <p:strVal val="visible"/>
+                                      </p:to>
+                                    </p:set>
+                                    <p:animEffect transition="in" filter="fade">
+                                      <p:cBhvr>
+                                        <p:cTn id="18" dur="500"/>
+                                        <p:tgtEl>
+                                          <p:spTgt spid="7"/>
+                                        </p:tgtEl>
+                                      </p:cBhvr>
+                                    </p:animEffect>
+                                    <p:anim calcmode="lin" valueType="num">
+                                      <p:cBhvr>
+                                        <p:cTn id="19" dur="500" fill="hold"/>
+                                        <p:tgtEl>
+                                          <p:spTgt spid="7"/>
+                                        </p:tgtEl>
+                                        <p:attrNameLst>
+                                          <p:attrName>ppt_x</p:attrName>
+                                        </p:attrNameLst>
+                                      </p:cBhvr>
+                                      <p:tavLst>
+                                        <p:tav tm="0">
+                                          <p:val>
+                                            <p:strVal val="#ppt_x"/>
+                                          </p:val>
+                                        </p:tav>
+                                        <p:tav tm="100000">
+                                          <p:val>
+                                            <p:strVal val="#ppt_x"/>
+                                          </p:val>
+                                        </p:tav>
+                                      </p:tavLst>
+                                    </p:anim>
+                                    <p:anim calcmode="lin" valueType="num">
+                                      <p:cBhvr>
+                                        <p:cTn id="20" dur="500" fill="hold"/>
+                                        <p:tgtEl>
+                                          <p:spTgt spid="7"/>
+                                        </p:tgtEl>
+                                        <p:attrNameLst>
+                                          <p:attrName>ppt_y</p:attrName>
+                                        </p:attrNameLst>
+                                      </p:cBhvr>
+                                      <p:tavLst>
+                                        <p:tav tm="0">
+                                          <p:val>
+                                            <p:strVal val="#ppt_y+.1"/>
+                                          </p:val>
+                                        </p:tav>
+                                        <p:tav tm="100000">
+                                          <p:val>
+                                            <p:strVal val="#ppt_y"/>
+                                          </p:val>
+                                        </p:tav>
+                                      </p:tavLst>
+                                    </p:anim>
+                                  </p:childTnLst>
+                                </p:cTn>
+                              </p:par>
+                            </p:childTnLst>
+                          </p:cTn>
+                        </p:par>
+                      </p:childTnLst>
+                    </p:cTn>
+                  </p:par>
+                  <p:par>
+                    <p:cTn id="29" fill="hold">
+                      <p:stCondLst>
+                        <p:cond delay="indefinite"/>
+                      </p:stCondLst>
+                      <p:childTnLst>
+                        <p:par>
+                          <p:cTn id="30" fill="hold">
+                            <p:stCondLst>
+                              <p:cond delay="0"/>
+                            </p:stCondLst>
+                            <p:childTnLst>
+                              <p:par>
+                                <p:cTn id="28" presetID="42" presetClass="entr" presetSubtype="0" fill="hold" nodeType="clickEffect">
+                                  <p:stCondLst>
+                                    <p:cond delay="0"/>
+                                  </p:stCondLst>
+                                  <p:childTnLst>
+                                    <p:set>
+                                      <p:cBhvr>
+                                        <p:cTn id="24" dur="1" fill="hold">
                                           <p:stCondLst>
                                             <p:cond delay="0"/>
                                           </p:stCondLst>
@@ -6607,7 +7237,7 @@
                                     </p:set>
                                     <p:animEffect transition="in" filter="fade">
                                       <p:cBhvr>
-                                        <p:cTn id="11" dur="500"/>
+                                        <p:cTn id="25" dur="500"/>
                                         <p:tgtEl>
                                           <p:spTgt spid="8"/>
                                         </p:tgtEl>
@@ -6615,9 +7245,108 @@
                                     </p:animEffect>
                                     <p:anim calcmode="lin" valueType="num">
                                       <p:cBhvr>
-                                        <p:cTn id="12" dur="500" fill="hold"/>
+                                        <p:cTn id="26" dur="500" fill="hold"/>
                                         <p:tgtEl>
                                           <p:spTgt spid="8"/>
+                                        </p:tgtEl>
+                                        <p:attrNameLst>
+                                          <p:attrName>ppt_x</p:attrName>
+                                        </p:attrNameLst>
+                                      </p:cBhvr>
+                                      <p:tavLst>
+                                        <p:tav tm="0">
+                                          <p:val>
+                                            <p:strVal val="#ppt_x"/>
+                                          </p:val>
+                                        </p:tav>
+                                        <p:tav tm="100000">
+                                          <p:val>
+                                            <p:strVal val="#ppt_x"/>
+                                          </p:val>
+                                        </p:tav>
+                                      </p:tavLst>
+                                    </p:anim>
+                                    <p:anim calcmode="lin" valueType="num">
+                                      <p:cBhvr>
+                                        <p:cTn id="27" dur="500" fill="hold"/>
+                                        <p:tgtEl>
+                                          <p:spTgt spid="8"/>
+                                        </p:tgtEl>
+                                        <p:attrNameLst>
+                                          <p:attrName>ppt_y</p:attrName>
+                                        </p:attrNameLst>
+                                      </p:cBhvr>
+                                      <p:tavLst>
+                                        <p:tav tm="0">
+                                          <p:val>
+                                            <p:strVal val="#ppt_y+.1"/>
+                                          </p:val>
+                                        </p:tav>
+                                        <p:tav tm="100000">
+                                          <p:val>
+                                            <p:strVal val="#ppt_y"/>
+                                          </p:val>
+                                        </p:tav>
+                                      </p:tavLst>
+                                    </p:anim>
+                                  </p:childTnLst>
+                                </p:cTn>
+                              </p:par>
+                            </p:childTnLst>
+                          </p:cTn>
+                        </p:par>
+                      </p:childTnLst>
+                    </p:cTn>
+                  </p:par>
+                  <p:par>
+                    <p:cTn id="36" fill="hold">
+                      <p:stCondLst>
+                        <p:cond delay="indefinite"/>
+                      </p:stCondLst>
+                      <p:childTnLst>
+                        <p:par>
+                          <p:cTn id="37" fill="hold">
+                            <p:stCondLst>
+                              <p:cond delay="0"/>
+                            </p:stCondLst>
+                            <p:childTnLst>
+                              <p:par>
+                                <p:cTn id="35" presetID="53" presetClass="entr" presetSubtype="16" fill="hold" nodeType="clickEffect">
+                                  <p:stCondLst>
+                                    <p:cond delay="0"/>
+                                  </p:stCondLst>
+                                  <p:childTnLst>
+                                    <p:set>
+                                      <p:cBhvr>
+                                        <p:cTn id="31" dur="1" fill="hold">
+                                          <p:stCondLst>
+                                            <p:cond delay="0"/>
+                                          </p:stCondLst>
+                                        </p:cTn>
+                                        <p:tgtEl>
+                                          <p:spTgt spid="11"/>
+                                        </p:tgtEl>
+                                        <p:attrNameLst>
+                                          <p:attrName>style.visibility</p:attrName>
+                                        </p:attrNameLst>
+                                      </p:cBhvr>
+                                      <p:to>
+                                        <p:strVal val="visible"/>
+                                      </p:to>
+                                    </p:set>
+                                    <p:animEffect transition="in" filter="fade">
+                                      <p:cBhvr>
+                                        <p:cTn id="32" dur="500"/>
+                                        <p:tgtEl>
+                                          <p:spTgt spid="11"/>
+                                        </p:tgtEl>
+                                      </p:cBhvr>
+                                    </p:animEffect>
+                                    <p:anim calcmode="lin" valueType="num">
+                                      <p:cBhvr>
+                                        <p:cTn id="33" dur="500" fill="hold"/>
+                                        <p:tgtEl>
+                                          <p:spTgt spid="11"/>
                                         </p:tgtEl>
                                         <p:attrNameLst>
                                           <p:attrName>ppt_w</p:attrName>
@@ -6638,9 +7367,9 @@
                                     </p:anim>
                                     <p:anim calcmode="lin" valueType="num">
                                       <p:cBhvr>
-                                        <p:cTn id="13" dur="500" fill="hold"/>
+                                        <p:cTn id="34" dur="500" fill="hold"/>
                                         <p:tgtEl>
-                                          <p:spTgt spid="8"/>
+                                          <p:spTgt spid="11"/>
                                         </p:tgtEl>
                                         <p:attrNameLst>
                                           <p:attrName>ppt_h</p:attrName>
@@ -6669,32 +7398,32 @@
                     </p:cTn>
                   </p:par>
                   <p:par>
-                    <p:cTn id="22" fill="hold">
+                    <p:cTn id="43" fill="hold">
                       <p:stCondLst>
                         <p:cond delay="indefinite"/>
                       </p:stCondLst>
                       <p:childTnLst>
                         <p:par>
-                          <p:cTn id="23" fill="hold">
+                          <p:cTn id="44" fill="hold">
                             <p:stCondLst>
                               <p:cond delay="0"/>
                             </p:stCondLst>
                             <p:childTnLst>
                               <p:par>
-                                <p:cTn id="21" presetID="53" presetClass="entr" presetSubtype="16" fill="hold" nodeType="clickEffect">
+                                <p:cTn id="42" presetID="42" presetClass="entr" presetSubtype="0" fill="hold" nodeType="clickEffect">
                                   <p:stCondLst>
                                     <p:cond delay="0"/>
                                   </p:stCondLst>
                                   <p:childTnLst>
                                     <p:set>
                                       <p:cBhvr>
-                                        <p:cTn id="17" dur="1" fill="hold">
+                                        <p:cTn id="38" dur="1" fill="hold">
                                           <p:stCondLst>
                                             <p:cond delay="0"/>
                                           </p:stCondLst>
                                         </p:cTn>
                                         <p:tgtEl>
-                                          <p:spTgt spid="11"/>
+                                          <p:spTgt spid="12"/>
                                         </p:tgtEl>
                                         <p:attrNameLst>
                                           <p:attrName>style.visibility</p:attrName>
@@ -6706,17 +7435,215 @@
                                     </p:set>
                                     <p:animEffect transition="in" filter="fade">
                                       <p:cBhvr>
-                                        <p:cTn id="18" dur="500"/>
+                                        <p:cTn id="39" dur="500"/>
                                         <p:tgtEl>
-                                          <p:spTgt spid="11"/>
+                                          <p:spTgt spid="12"/>
                                         </p:tgtEl>
                                       </p:cBhvr>
                                     </p:animEffect>
                                     <p:anim calcmode="lin" valueType="num">
                                       <p:cBhvr>
-                                        <p:cTn id="19" dur="500" fill="hold"/>
+                                        <p:cTn id="40" dur="500" fill="hold"/>
                                         <p:tgtEl>
-                                          <p:spTgt spid="11"/>
+                                          <p:spTgt spid="12"/>
+                                        </p:tgtEl>
+                                        <p:attrNameLst>
+                                          <p:attrName>ppt_x</p:attrName>
+                                        </p:attrNameLst>
+                                      </p:cBhvr>
+                                      <p:tavLst>
+                                        <p:tav tm="0">
+                                          <p:val>
+                                            <p:strVal val="#ppt_x"/>
+                                          </p:val>
+                                        </p:tav>
+                                        <p:tav tm="100000">
+                                          <p:val>
+                                            <p:strVal val="#ppt_x"/>
+                                          </p:val>
+                                        </p:tav>
+                                      </p:tavLst>
+                                    </p:anim>
+                                    <p:anim calcmode="lin" valueType="num">
+                                      <p:cBhvr>
+                                        <p:cTn id="41" dur="500" fill="hold"/>
+                                        <p:tgtEl>
+                                          <p:spTgt spid="12"/>
+                                        </p:tgtEl>
+                                        <p:attrNameLst>
+                                          <p:attrName>ppt_y</p:attrName>
+                                        </p:attrNameLst>
+                                      </p:cBhvr>
+                                      <p:tavLst>
+                                        <p:tav tm="0">
+                                          <p:val>
+                                            <p:strVal val="#ppt_y+.1"/>
+                                          </p:val>
+                                        </p:tav>
+                                        <p:tav tm="100000">
+                                          <p:val>
+                                            <p:strVal val="#ppt_y"/>
+                                          </p:val>
+                                        </p:tav>
+                                      </p:tavLst>
+                                    </p:anim>
+                                  </p:childTnLst>
+                                </p:cTn>
+                              </p:par>
+                            </p:childTnLst>
+                          </p:cTn>
+                        </p:par>
+                      </p:childTnLst>
+                    </p:cTn>
+                  </p:par>
+                  <p:par>
+                    <p:cTn id="50" fill="hold">
+                      <p:stCondLst>
+                        <p:cond delay="indefinite"/>
+                      </p:stCondLst>
+                      <p:childTnLst>
+                        <p:par>
+                          <p:cTn id="51" fill="hold">
+                            <p:stCondLst>
+                              <p:cond delay="0"/>
+                            </p:stCondLst>
+                            <p:childTnLst>
+                              <p:par>
+                                <p:cTn id="49" presetID="42" presetClass="entr" presetSubtype="0" fill="hold" nodeType="clickEffect">
+                                  <p:stCondLst>
+                                    <p:cond delay="0"/>
+                                  </p:stCondLst>
+                                  <p:childTnLst>
+                                    <p:set>
+                                      <p:cBhvr>
+                                        <p:cTn id="45" dur="1" fill="hold">
+                                          <p:stCondLst>
+                                            <p:cond delay="0"/>
+                                          </p:stCondLst>
+                                        </p:cTn>
+                                        <p:tgtEl>
+                                          <p:spTgt spid="13"/>
+                                        </p:tgtEl>
+                                        <p:attrNameLst>
+                                          <p:attrName>style.visibility</p:attrName>
+                                        </p:attrNameLst>
+                                      </p:cBhvr>
+                                      <p:to>
+                                        <p:strVal val="visible"/>
+                                      </p:to>
+                                    </p:set>
+                                    <p:animEffect transition="in" filter="fade">
+                                      <p:cBhvr>
+                                        <p:cTn id="46" dur="500"/>
+                                        <p:tgtEl>
+                                          <p:spTgt spid="13"/>
+                                        </p:tgtEl>
+                                      </p:cBhvr>
+                                    </p:animEffect>
+                                    <p:anim calcmode="lin" valueType="num">
+                                      <p:cBhvr>
+                                        <p:cTn id="47" dur="500" fill="hold"/>
+                                        <p:tgtEl>
+                                          <p:spTgt spid="13"/>
+                                        </p:tgtEl>
+                                        <p:attrNameLst>
+                                          <p:attrName>ppt_x</p:attrName>
+                                        </p:attrNameLst>
+                                      </p:cBhvr>
+                                      <p:tavLst>
+                                        <p:tav tm="0">
+                                          <p:val>
+                                            <p:strVal val="#ppt_x"/>
+                                          </p:val>
+                                        </p:tav>
+                                        <p:tav tm="100000">
+                                          <p:val>
+                                            <p:strVal val="#ppt_x"/>
+                                          </p:val>
+                                        </p:tav>
+                                      </p:tavLst>
+                                    </p:anim>
+                                    <p:anim calcmode="lin" valueType="num">
+                                      <p:cBhvr>
+                                        <p:cTn id="48" dur="500" fill="hold"/>
+                                        <p:tgtEl>
+                                          <p:spTgt spid="13"/>
+                                        </p:tgtEl>
+                                        <p:attrNameLst>
+                                          <p:attrName>ppt_y</p:attrName>
+                                        </p:attrNameLst>
+                                      </p:cBhvr>
+                                      <p:tavLst>
+                                        <p:tav tm="0">
+                                          <p:val>
+                                            <p:strVal val="#ppt_y+.1"/>
+                                          </p:val>
+                                        </p:tav>
+                                        <p:tav tm="100000">
+                                          <p:val>
+                                            <p:strVal val="#ppt_y"/>
+                                          </p:val>
+                                        </p:tav>
+                                      </p:tavLst>
+                                    </p:anim>
+                                  </p:childTnLst>
+                                </p:cTn>
+                              </p:par>
+                            </p:childTnLst>
+                          </p:cTn>
+                        </p:par>
+                      </p:childTnLst>
+                    </p:cTn>
+                  </p:par>
+                  <p:par>
+                    <p:cTn id="57" fill="hold">
+                      <p:stCondLst>
+                        <p:cond delay="indefinite"/>
+                      </p:stCondLst>
+                      <p:childTnLst>
+                        <p:par>
+                          <p:cTn id="58" fill="hold">
+                            <p:stCondLst>
+                              <p:cond delay="0"/>
+                            </p:stCondLst>
+                            <p:childTnLst>
+                              <p:par>
+                                <p:cTn id="56" presetID="53" presetClass="entr" presetSubtype="16" fill="hold" nodeType="clickEffect">
+                                  <p:stCondLst>
+                                    <p:cond delay="0"/>
+                                  </p:stCondLst>
+                                  <p:childTnLst>
+                                    <p:set>
+                                      <p:cBhvr>
+                                        <p:cTn id="52" dur="1" fill="hold">
+                                          <p:stCondLst>
+                                            <p:cond delay="0"/>
+                                          </p:stCondLst>
+                                        </p:cTn>
+                                        <p:tgtEl>
+                                          <p:spTgt spid="16"/>
+                                        </p:tgtEl>
+                                        <p:attrNameLst>
+                                          <p:attrName>style.visibility</p:attrName>
+                                        </p:attrNameLst>
+                                      </p:cBhvr>
+                                      <p:to>
+                                        <p:strVal val="visible"/>
+                                      </p:to>
+                                    </p:set>
+                                    <p:animEffect transition="in" filter="fade">
+                                      <p:cBhvr>
+                                        <p:cTn id="53" dur="500"/>
+                                        <p:tgtEl>
+                                          <p:spTgt spid="16"/>
+                                        </p:tgtEl>
+                                      </p:cBhvr>
+                                    </p:animEffect>
+                                    <p:anim calcmode="lin" valueType="num">
+                                      <p:cBhvr>
+                                        <p:cTn id="54" dur="500" fill="hold"/>
+                                        <p:tgtEl>
+                                          <p:spTgt spid="16"/>
                                         </p:tgtEl>
                                         <p:attrNameLst>
                                           <p:attrName>ppt_w</p:attrName>
@@ -6737,9 +7664,9 @@
                                     </p:anim>
                                     <p:anim calcmode="lin" valueType="num">
                                       <p:cBhvr>
-                                        <p:cTn id="20" dur="500" fill="hold"/>
+                                        <p:cTn id="55" dur="500" fill="hold"/>
                                         <p:tgtEl>
-                                          <p:spTgt spid="11"/>
+                                          <p:spTgt spid="16"/>
                                         </p:tgtEl>
                                         <p:attrNameLst>
                                           <p:attrName>ppt_h</p:attrName>
@@ -6754,6 +7681,303 @@
                                         <p:tav tm="100000">
                                           <p:val>
                                             <p:strVal val="#ppt_h"/>
+                                          </p:val>
+                                        </p:tav>
+                                      </p:tavLst>
+                                    </p:anim>
+                                  </p:childTnLst>
+                                </p:cTn>
+                              </p:par>
+                            </p:childTnLst>
+                          </p:cTn>
+                        </p:par>
+                      </p:childTnLst>
+                    </p:cTn>
+                  </p:par>
+                  <p:par>
+                    <p:cTn id="64" fill="hold">
+                      <p:stCondLst>
+                        <p:cond delay="indefinite"/>
+                      </p:stCondLst>
+                      <p:childTnLst>
+                        <p:par>
+                          <p:cTn id="65" fill="hold">
+                            <p:stCondLst>
+                              <p:cond delay="0"/>
+                            </p:stCondLst>
+                            <p:childTnLst>
+                              <p:par>
+                                <p:cTn id="63" presetID="42" presetClass="entr" presetSubtype="0" fill="hold" nodeType="clickEffect">
+                                  <p:stCondLst>
+                                    <p:cond delay="0"/>
+                                  </p:stCondLst>
+                                  <p:childTnLst>
+                                    <p:set>
+                                      <p:cBhvr>
+                                        <p:cTn id="59" dur="1" fill="hold">
+                                          <p:stCondLst>
+                                            <p:cond delay="0"/>
+                                          </p:stCondLst>
+                                        </p:cTn>
+                                        <p:tgtEl>
+                                          <p:spTgt spid="17"/>
+                                        </p:tgtEl>
+                                        <p:attrNameLst>
+                                          <p:attrName>style.visibility</p:attrName>
+                                        </p:attrNameLst>
+                                      </p:cBhvr>
+                                      <p:to>
+                                        <p:strVal val="visible"/>
+                                      </p:to>
+                                    </p:set>
+                                    <p:animEffect transition="in" filter="fade">
+                                      <p:cBhvr>
+                                        <p:cTn id="60" dur="500"/>
+                                        <p:tgtEl>
+                                          <p:spTgt spid="17"/>
+                                        </p:tgtEl>
+                                      </p:cBhvr>
+                                    </p:animEffect>
+                                    <p:anim calcmode="lin" valueType="num">
+                                      <p:cBhvr>
+                                        <p:cTn id="61" dur="500" fill="hold"/>
+                                        <p:tgtEl>
+                                          <p:spTgt spid="17"/>
+                                        </p:tgtEl>
+                                        <p:attrNameLst>
+                                          <p:attrName>ppt_x</p:attrName>
+                                        </p:attrNameLst>
+                                      </p:cBhvr>
+                                      <p:tavLst>
+                                        <p:tav tm="0">
+                                          <p:val>
+                                            <p:strVal val="#ppt_x"/>
+                                          </p:val>
+                                        </p:tav>
+                                        <p:tav tm="100000">
+                                          <p:val>
+                                            <p:strVal val="#ppt_x"/>
+                                          </p:val>
+                                        </p:tav>
+                                      </p:tavLst>
+                                    </p:anim>
+                                    <p:anim calcmode="lin" valueType="num">
+                                      <p:cBhvr>
+                                        <p:cTn id="62" dur="500" fill="hold"/>
+                                        <p:tgtEl>
+                                          <p:spTgt spid="17"/>
+                                        </p:tgtEl>
+                                        <p:attrNameLst>
+                                          <p:attrName>ppt_y</p:attrName>
+                                        </p:attrNameLst>
+                                      </p:cBhvr>
+                                      <p:tavLst>
+                                        <p:tav tm="0">
+                                          <p:val>
+                                            <p:strVal val="#ppt_y+.1"/>
+                                          </p:val>
+                                        </p:tav>
+                                        <p:tav tm="100000">
+                                          <p:val>
+                                            <p:strVal val="#ppt_y"/>
+                                          </p:val>
+                                        </p:tav>
+                                      </p:tavLst>
+                                    </p:anim>
+                                  </p:childTnLst>
+                                </p:cTn>
+                              </p:par>
+                            </p:childTnLst>
+                          </p:cTn>
+                        </p:par>
+                      </p:childTnLst>
+                    </p:cTn>
+                  </p:par>
+                  <p:par>
+                    <p:cTn id="71" fill="hold">
+                      <p:stCondLst>
+                        <p:cond delay="indefinite"/>
+                      </p:stCondLst>
+                      <p:childTnLst>
+                        <p:par>
+                          <p:cTn id="72" fill="hold">
+                            <p:stCondLst>
+                              <p:cond delay="0"/>
+                            </p:stCondLst>
+                            <p:childTnLst>
+                              <p:par>
+                                <p:cTn id="70" presetID="42" presetClass="entr" presetSubtype="0" fill="hold" nodeType="clickEffect">
+                                  <p:stCondLst>
+                                    <p:cond delay="0"/>
+                                  </p:stCondLst>
+                                  <p:childTnLst>
+                                    <p:set>
+                                      <p:cBhvr>
+                                        <p:cTn id="66" dur="1" fill="hold">
+                                          <p:stCondLst>
+                                            <p:cond delay="0"/>
+                                          </p:stCondLst>
+                                        </p:cTn>
+                                        <p:tgtEl>
+                                          <p:spTgt spid="18"/>
+                                        </p:tgtEl>
+                                        <p:attrNameLst>
+                                          <p:attrName>style.visibility</p:attrName>
+                                        </p:attrNameLst>
+                                      </p:cBhvr>
+                                      <p:to>
+                                        <p:strVal val="visible"/>
+                                      </p:to>
+                                    </p:set>
+                                    <p:animEffect transition="in" filter="fade">
+                                      <p:cBhvr>
+                                        <p:cTn id="67" dur="500"/>
+                                        <p:tgtEl>
+                                          <p:spTgt spid="18"/>
+                                        </p:tgtEl>
+                                      </p:cBhvr>
+                                    </p:animEffect>
+                                    <p:anim calcmode="lin" valueType="num">
+                                      <p:cBhvr>
+                                        <p:cTn id="68" dur="500" fill="hold"/>
+                                        <p:tgtEl>
+                                          <p:spTgt spid="18"/>
+                                        </p:tgtEl>
+                                        <p:attrNameLst>
+                                          <p:attrName>ppt_x</p:attrName>
+                                        </p:attrNameLst>
+                                      </p:cBhvr>
+                                      <p:tavLst>
+                                        <p:tav tm="0">
+                                          <p:val>
+                                            <p:strVal val="#ppt_x"/>
+                                          </p:val>
+                                        </p:tav>
+                                        <p:tav tm="100000">
+                                          <p:val>
+                                            <p:strVal val="#ppt_x"/>
+                                          </p:val>
+                                        </p:tav>
+                                      </p:tavLst>
+                                    </p:anim>
+                                    <p:anim calcmode="lin" valueType="num">
+                                      <p:cBhvr>
+                                        <p:cTn id="69" dur="500" fill="hold"/>
+                                        <p:tgtEl>
+                                          <p:spTgt spid="18"/>
+                                        </p:tgtEl>
+                                        <p:attrNameLst>
+                                          <p:attrName>ppt_y</p:attrName>
+                                        </p:attrNameLst>
+                                      </p:cBhvr>
+                                      <p:tavLst>
+                                        <p:tav tm="0">
+                                          <p:val>
+                                            <p:strVal val="#ppt_y+.1"/>
+                                          </p:val>
+                                        </p:tav>
+                                        <p:tav tm="100000">
+                                          <p:val>
+                                            <p:strVal val="#ppt_y"/>
+                                          </p:val>
+                                        </p:tav>
+                                      </p:tavLst>
+                                    </p:anim>
+                                  </p:childTnLst>
+                                </p:cTn>
+                              </p:par>
+                            </p:childTnLst>
+                          </p:cTn>
+                        </p:par>
+                      </p:childTnLst>
+                    </p:cTn>
+                  </p:par>
+                  <p:par>
+                    <p:cTn id="78" fill="hold">
+                      <p:stCondLst>
+                        <p:cond delay="indefinite"/>
+                      </p:stCondLst>
+                      <p:childTnLst>
+                        <p:par>
+                          <p:cTn id="79" fill="hold">
+                            <p:stCondLst>
+                              <p:cond delay="0"/>
+                            </p:stCondLst>
+                            <p:childTnLst>
+                              <p:par>
+                                <p:cTn id="77" presetID="42" presetClass="entr" presetSubtype="0" fill="hold" nodeType="clickEffect">
+                                  <p:stCondLst>
+                                    <p:cond delay="0"/>
+                                  </p:stCondLst>
+                                  <p:childTnLst>
+                                    <p:set>
+                                      <p:cBhvr>
+                                        <p:cTn id="73" dur="1" fill="hold">
+                                          <p:stCondLst>
+                                            <p:cond delay="0"/>
+                                          </p:stCondLst>
+                                        </p:cTn>
+                                        <p:tgtEl>
+                                          <p:spTgt spid="19"/>
+                                        </p:tgtEl>
+                                        <p:attrNameLst>
+                                          <p:attrName>style.visibility</p:attrName>
+                                        </p:attrNameLst>
+                                      </p:cBhvr>
+                                      <p:to>
+                                        <p:strVal val="visible"/>
+                                      </p:to>
+                                    </p:set>
+                                    <p:animEffect transition="in" filter="fade">
+                                      <p:cBhvr>
+                                        <p:cTn id="74" dur="500"/>
+                                        <p:tgtEl>
+                                          <p:spTgt spid="19"/>
+                                        </p:tgtEl>
+                                      </p:cBhvr>
+                                    </p:animEffect>
+                                    <p:anim calcmode="lin" valueType="num">
+                                      <p:cBhvr>
+                                        <p:cTn id="75" dur="500" fill="hold"/>
+                                        <p:tgtEl>
+                                          <p:spTgt spid="19"/>
+                                        </p:tgtEl>
+                                        <p:attrNameLst>
+                                          <p:attrName>ppt_x</p:attrName>
+                                        </p:attrNameLst>
+                                      </p:cBhvr>
+                                      <p:tavLst>
+                                        <p:tav tm="0">
+                                          <p:val>
+                                            <p:strVal val="#ppt_x"/>
+                                          </p:val>
+                                        </p:tav>
+                                        <p:tav tm="100000">
+                                          <p:val>
+                                            <p:strVal val="#ppt_x"/>
+                                          </p:val>
+                                        </p:tav>
+                                      </p:tavLst>
+                                    </p:anim>
+                                    <p:anim calcmode="lin" valueType="num">
+                                      <p:cBhvr>
+                                        <p:cTn id="76" dur="500" fill="hold"/>
+                                        <p:tgtEl>
+                                          <p:spTgt spid="19"/>
+                                        </p:tgtEl>
+                                        <p:attrNameLst>
+                                          <p:attrName>ppt_y</p:attrName>
+                                        </p:attrNameLst>
+                                      </p:cBhvr>
+                                      <p:tavLst>
+                                        <p:tav tm="0">
+                                          <p:val>
+                                            <p:strVal val="#ppt_y+.1"/>
+                                          </p:val>
+                                        </p:tav>
+                                        <p:tav tm="100000">
+                                          <p:val>
+                                            <p:strVal val="#ppt_y"/>
                                           </p:val>
                                         </p:tav>
                                       </p:tavLst>

--- a/IEP/t2-lesson3-perpendicular-slopes-IEP.pptx
+++ b/IEP/t2-lesson3-perpendicular-slopes-IEP.pptx
@@ -9813,7 +9813,7 @@
         <p:spPr>
           <a:xfrm>
             <a:off x="6210148" y="4034028"/>
-            <a:ext cx="5295748" cy="2042160"/>
+            <a:ext cx="5295748" cy="2716530"/>
           </a:xfrm>
           <a:prstGeom prst="roundRect">
             <a:avLst>
@@ -9853,7 +9853,7 @@
         <p:spPr>
           <a:xfrm>
             <a:off x="6419698" y="4205478"/>
-            <a:ext cx="4876648" cy="294894"/>
+            <a:ext cx="4876648" cy="534924"/>
           </a:xfrm>
           <a:prstGeom prst="rect">
             <a:avLst/>
@@ -9892,17 +9892,27 @@
                 <a:latin typeface="Segoe UI"/>
                 <a:cs typeface="Segoe UI"/>
               </a:rPr>
-              <a:t xml:space="preserve"> What is the slope of </a:t>
-            </a:r>
-            <a:r>
-              <a:rPr lang="en-US" sz="1575" dirty="0" i="1">
+              <a:t xml:space="preserve"> A line passes through the points </a:t>
+            </a:r>
+            <a:r>
+              <a:rPr lang="en-US" sz="1575" dirty="0">
                 <a:solidFill>
                   <a:srgbClr val="16171D"/>
                 </a:solidFill>
                 <a:latin typeface="Cambria"/>
                 <a:cs typeface="Cambria"/>
               </a:rPr>
-              <a:t xml:space="preserve">y</a:t>
+              <a:t xml:space="preserve">(−1, 4)</a:t>
+            </a:r>
+            <a:r>
+              <a:rPr lang="en-US" sz="1575" dirty="0">
+                <a:solidFill>
+                  <a:srgbClr val="16171D"/>
+                </a:solidFill>
+                <a:latin typeface="Segoe UI"/>
+                <a:cs typeface="Segoe UI"/>
+              </a:rPr>
+              <a:t xml:space="preserve"> and </a:t>
             </a:r>
             <a:r>
               <a:rPr lang="en-US" sz="1575" dirty="0">
@@ -9912,37 +9922,17 @@
                 <a:latin typeface="Cambria"/>
                 <a:cs typeface="Cambria"/>
               </a:rPr>
-              <a:t xml:space="preserve"> = −3</a:t>
-            </a:r>
-            <a:r>
-              <a:rPr lang="en-US" sz="1575" dirty="0" i="1">
-                <a:solidFill>
-                  <a:srgbClr val="16171D"/>
-                </a:solidFill>
-                <a:latin typeface="Cambria"/>
-                <a:cs typeface="Cambria"/>
-              </a:rPr>
-              <a:t xml:space="preserve">x</a:t>
+              <a:t xml:space="preserve">(2, −2)</a:t>
             </a:r>
             <a:r>
               <a:rPr lang="en-US" sz="1575" dirty="0">
                 <a:solidFill>
                   <a:srgbClr val="16171D"/>
                 </a:solidFill>
-                <a:latin typeface="Cambria"/>
-                <a:cs typeface="Cambria"/>
-              </a:rPr>
-              <a:t xml:space="preserve"> + 5</a:t>
-            </a:r>
-            <a:r>
-              <a:rPr lang="en-US" sz="1575" dirty="0">
-                <a:solidFill>
-                  <a:srgbClr val="16171D"/>
-                </a:solidFill>
-                <a:latin typeface="Segoe UI"/>
-                <a:cs typeface="Segoe UI"/>
-              </a:rPr>
-              <a:t xml:space="preserve">?</a:t>
+                <a:latin typeface="Segoe UI"/>
+                <a:cs typeface="Segoe UI"/>
+              </a:rPr>
+              <a:t xml:space="preserve">. What is the slope of the line?</a:t>
             </a:r>
             <a:endParaRPr lang="en-US" sz="1575" dirty="0"/>
           </a:p>
@@ -9956,7 +9946,7 @@
         </p:nvSpPr>
         <p:spPr>
           <a:xfrm>
-            <a:off x="6419698" y="4538472"/>
+            <a:off x="6419698" y="4778502"/>
             <a:ext cx="4876648" cy="294894"/>
           </a:xfrm>
           <a:prstGeom prst="rect">
@@ -10006,7 +9996,7 @@
                 <a:latin typeface="Cambria"/>
                 <a:cs typeface="Cambria"/>
               </a:rPr>
-              <a:t xml:space="preserve">y</a:t>
+              <a:t xml:space="preserve">m</a:t>
             </a:r>
             <a:r>
               <a:rPr lang="en-US" sz="1575" dirty="0">
@@ -10016,7 +10006,7 @@
                 <a:latin typeface="Cambria"/>
                 <a:cs typeface="Cambria"/>
               </a:rPr>
-              <a:t xml:space="preserve"> = </a:t>
+              <a:t xml:space="preserve"> = (</a:t>
             </a:r>
             <a:r>
               <a:rPr lang="en-US" sz="1575" dirty="0" i="1">
@@ -10026,47 +10016,37 @@
                 <a:latin typeface="Cambria"/>
                 <a:cs typeface="Cambria"/>
               </a:rPr>
-              <a:t xml:space="preserve">m</a:t>
-            </a:r>
-            <a:r>
-              <a:rPr lang="en-US" sz="1575" dirty="0" i="1">
+              <a:t xml:space="preserve">y</a:t>
+            </a:r>
+            <a:r>
+              <a:rPr lang="en-US" sz="1575" dirty="0">
                 <a:solidFill>
                   <a:srgbClr val="16171D"/>
                 </a:solidFill>
                 <a:latin typeface="Cambria"/>
                 <a:cs typeface="Cambria"/>
               </a:rPr>
-              <a:t xml:space="preserve">x</a:t>
-            </a:r>
-            <a:r>
-              <a:rPr lang="en-US" sz="1575" dirty="0">
+              <a:t xml:space="preserve">₂ − </a:t>
+            </a:r>
+            <a:r>
+              <a:rPr lang="en-US" sz="1575" dirty="0" i="1">
                 <a:solidFill>
                   <a:srgbClr val="16171D"/>
                 </a:solidFill>
                 <a:latin typeface="Cambria"/>
                 <a:cs typeface="Cambria"/>
               </a:rPr>
-              <a:t xml:space="preserve"> + </a:t>
-            </a:r>
-            <a:r>
-              <a:rPr lang="en-US" sz="1575" dirty="0" i="1">
+              <a:t xml:space="preserve">y</a:t>
+            </a:r>
+            <a:r>
+              <a:rPr lang="en-US" sz="1575" dirty="0">
                 <a:solidFill>
                   <a:srgbClr val="16171D"/>
                 </a:solidFill>
                 <a:latin typeface="Cambria"/>
                 <a:cs typeface="Cambria"/>
               </a:rPr>
-              <a:t xml:space="preserve">b</a:t>
-            </a:r>
-            <a:r>
-              <a:rPr lang="en-US" sz="1575" dirty="0">
-                <a:solidFill>
-                  <a:srgbClr val="16171D"/>
-                </a:solidFill>
-                <a:latin typeface="Segoe UI"/>
-                <a:cs typeface="Segoe UI"/>
-              </a:rPr>
-              <a:t xml:space="preserve">, slope </a:t>
+              <a:t xml:space="preserve">₁) ÷ (</a:t>
             </a:r>
             <a:r>
               <a:rPr lang="en-US" sz="1575" dirty="0" i="1">
@@ -10076,7 +10056,37 @@
                 <a:latin typeface="Cambria"/>
                 <a:cs typeface="Cambria"/>
               </a:rPr>
-              <a:t xml:space="preserve">m</a:t>
+              <a:t xml:space="preserve">x</a:t>
+            </a:r>
+            <a:r>
+              <a:rPr lang="en-US" sz="1575" dirty="0">
+                <a:solidFill>
+                  <a:srgbClr val="16171D"/>
+                </a:solidFill>
+                <a:latin typeface="Cambria"/>
+                <a:cs typeface="Cambria"/>
+              </a:rPr>
+              <a:t xml:space="preserve">₂ − </a:t>
+            </a:r>
+            <a:r>
+              <a:rPr lang="en-US" sz="1575" dirty="0" i="1">
+                <a:solidFill>
+                  <a:srgbClr val="16171D"/>
+                </a:solidFill>
+                <a:latin typeface="Cambria"/>
+                <a:cs typeface="Cambria"/>
+              </a:rPr>
+              <a:t xml:space="preserve">x</a:t>
+            </a:r>
+            <a:r>
+              <a:rPr lang="en-US" sz="1575" dirty="0">
+                <a:solidFill>
+                  <a:srgbClr val="16171D"/>
+                </a:solidFill>
+                <a:latin typeface="Cambria"/>
+                <a:cs typeface="Cambria"/>
+              </a:rPr>
+              <a:t xml:space="preserve">₁)</a:t>
             </a:r>
             <a:endParaRPr lang="en-US" sz="1575" dirty="0"/>
           </a:p>
@@ -10090,8 +10100,8 @@
         </p:nvSpPr>
         <p:spPr>
           <a:xfrm>
-            <a:off x="6419698" y="4871466"/>
-            <a:ext cx="4876648" cy="1033272"/>
+            <a:off x="6419698" y="5111496"/>
+            <a:ext cx="4876648" cy="1467612"/>
           </a:xfrm>
           <a:prstGeom prst="roundRect">
             <a:avLst>
@@ -10134,7 +10144,7 @@
                 <a:latin typeface="Cambria"/>
                 <a:cs typeface="Cambria"/>
               </a:rPr>
-              <a:t xml:space="preserve">−3</a:t>
+              <a:t xml:space="preserve">−2</a:t>
             </a:r>
             <a:br>
               <a:rPr lang="en-US" sz="1425" dirty="0">
@@ -10163,67 +10173,67 @@
                 <a:latin typeface="Segoe UI"/>
                 <a:cs typeface="Segoe UI"/>
               </a:rPr>
-              <a:t xml:space="preserve"> Match </a:t>
-            </a:r>
-            <a:r>
-              <a:rPr lang="en-US" sz="1425" dirty="0" i="1">
+              <a:t xml:space="preserve"> Label the points: </a:t>
+            </a:r>
+            <a:r>
+              <a:rPr lang="en-US" sz="1425" dirty="0">
                 <a:solidFill>
                   <a:srgbClr val="16171D"/>
                 </a:solidFill>
                 <a:latin typeface="Cambria"/>
                 <a:cs typeface="Cambria"/>
               </a:rPr>
-              <a:t xml:space="preserve">y</a:t>
-            </a:r>
-            <a:r>
-              <a:rPr lang="en-US" sz="1425" dirty="0">
+              <a:t xml:space="preserve">(</a:t>
+            </a:r>
+            <a:r>
+              <a:rPr lang="en-US" sz="1425" dirty="0" i="1">
                 <a:solidFill>
                   <a:srgbClr val="16171D"/>
                 </a:solidFill>
                 <a:latin typeface="Cambria"/>
                 <a:cs typeface="Cambria"/>
               </a:rPr>
-              <a:t xml:space="preserve"> = −3</a:t>
-            </a:r>
-            <a:r>
-              <a:rPr lang="en-US" sz="1425" dirty="0" i="1">
+              <a:t xml:space="preserve">x</a:t>
+            </a:r>
+            <a:r>
+              <a:rPr lang="en-US" sz="1425" dirty="0">
                 <a:solidFill>
                   <a:srgbClr val="16171D"/>
                 </a:solidFill>
                 <a:latin typeface="Cambria"/>
                 <a:cs typeface="Cambria"/>
               </a:rPr>
-              <a:t xml:space="preserve">x</a:t>
-            </a:r>
-            <a:r>
-              <a:rPr lang="en-US" sz="1425" dirty="0">
+              <a:t xml:space="preserve">₁, </a:t>
+            </a:r>
+            <a:r>
+              <a:rPr lang="en-US" sz="1425" dirty="0" i="1">
                 <a:solidFill>
                   <a:srgbClr val="16171D"/>
                 </a:solidFill>
                 <a:latin typeface="Cambria"/>
                 <a:cs typeface="Cambria"/>
               </a:rPr>
-              <a:t xml:space="preserve"> + 5</a:t>
+              <a:t xml:space="preserve">y</a:t>
             </a:r>
             <a:r>
               <a:rPr lang="en-US" sz="1425" dirty="0">
-                <a:solidFill>
-                  <a:srgbClr val="16171D"/>
-                </a:solidFill>
-                <a:latin typeface="Segoe UI"/>
-                <a:cs typeface="Segoe UI"/>
-              </a:rPr>
-              <a:t xml:space="preserve"> to </a:t>
-            </a:r>
-            <a:r>
-              <a:rPr lang="en-US" sz="1425" dirty="0" i="1">
                 <a:solidFill>
                   <a:srgbClr val="16171D"/>
                 </a:solidFill>
                 <a:latin typeface="Cambria"/>
                 <a:cs typeface="Cambria"/>
               </a:rPr>
-              <a:t xml:space="preserve">y</a:t>
+              <a:t xml:space="preserve">₁) = (−1, 4)</a:t>
+            </a:r>
+            <a:r>
+              <a:rPr lang="en-US" sz="1425" dirty="0">
+                <a:solidFill>
+                  <a:srgbClr val="16171D"/>
+                </a:solidFill>
+                <a:latin typeface="Segoe UI"/>
+                <a:cs typeface="Segoe UI"/>
+              </a:rPr>
+              <a:t xml:space="preserve"> and </a:t>
             </a:r>
             <a:r>
               <a:rPr lang="en-US" sz="1425" dirty="0">
@@ -10233,7 +10243,7 @@
                 <a:latin typeface="Cambria"/>
                 <a:cs typeface="Cambria"/>
               </a:rPr>
-              <a:t xml:space="preserve"> = </a:t>
+              <a:t xml:space="preserve">(</a:t>
             </a:r>
             <a:r>
               <a:rPr lang="en-US" sz="1425" dirty="0" i="1">
@@ -10243,37 +10253,37 @@
                 <a:latin typeface="Cambria"/>
                 <a:cs typeface="Cambria"/>
               </a:rPr>
-              <a:t xml:space="preserve">m</a:t>
-            </a:r>
-            <a:r>
-              <a:rPr lang="en-US" sz="1425" dirty="0" i="1">
+              <a:t xml:space="preserve">x</a:t>
+            </a:r>
+            <a:r>
+              <a:rPr lang="en-US" sz="1425" dirty="0">
                 <a:solidFill>
                   <a:srgbClr val="16171D"/>
                 </a:solidFill>
                 <a:latin typeface="Cambria"/>
                 <a:cs typeface="Cambria"/>
               </a:rPr>
-              <a:t xml:space="preserve">x</a:t>
-            </a:r>
-            <a:r>
-              <a:rPr lang="en-US" sz="1425" dirty="0">
+              <a:t xml:space="preserve">₂, </a:t>
+            </a:r>
+            <a:r>
+              <a:rPr lang="en-US" sz="1425" dirty="0" i="1">
                 <a:solidFill>
                   <a:srgbClr val="16171D"/>
                 </a:solidFill>
                 <a:latin typeface="Cambria"/>
                 <a:cs typeface="Cambria"/>
               </a:rPr>
-              <a:t xml:space="preserve"> + </a:t>
-            </a:r>
-            <a:r>
-              <a:rPr lang="en-US" sz="1425" dirty="0" i="1">
+              <a:t xml:space="preserve">y</a:t>
+            </a:r>
+            <a:r>
+              <a:rPr lang="en-US" sz="1425" dirty="0">
                 <a:solidFill>
                   <a:srgbClr val="16171D"/>
                 </a:solidFill>
                 <a:latin typeface="Cambria"/>
                 <a:cs typeface="Cambria"/>
               </a:rPr>
-              <a:t xml:space="preserve">b</a:t>
+              <a:t xml:space="preserve">₂) = (2, −2)</a:t>
             </a:r>
             <a:r>
               <a:rPr lang="en-US" sz="1425" dirty="0">
@@ -10283,7 +10293,36 @@
                 <a:latin typeface="Segoe UI"/>
                 <a:cs typeface="Segoe UI"/>
               </a:rPr>
-              <a:t xml:space="preserve">: </a:t>
+              <a:t xml:space="preserve">.</a:t>
+            </a:r>
+            <a:br>
+              <a:rPr lang="en-US" sz="1425" dirty="0">
+                <a:solidFill>
+                  <a:srgbClr val="16171D"/>
+                </a:solidFill>
+                <a:latin typeface="Segoe UI"/>
+                <a:cs typeface="Segoe UI"/>
+              </a:rPr>
+            </a:br>
+            <a:r>
+              <a:rPr lang="en-US" sz="1425" dirty="0" b="1">
+                <a:solidFill>
+                  <a:srgbClr val="16171D"/>
+                </a:solidFill>
+                <a:latin typeface="Segoe UI"/>
+                <a:cs typeface="Segoe UI"/>
+              </a:rPr>
+              <a:t xml:space="preserve">2.</a:t>
+            </a:r>
+            <a:r>
+              <a:rPr lang="en-US" sz="1425" dirty="0">
+                <a:solidFill>
+                  <a:srgbClr val="16171D"/>
+                </a:solidFill>
+                <a:latin typeface="Segoe UI"/>
+                <a:cs typeface="Segoe UI"/>
+              </a:rPr>
+              <a:t xml:space="preserve"> Subtract the </a:t>
             </a:r>
             <a:r>
               <a:rPr lang="en-US" sz="1425" dirty="0" i="1">
@@ -10293,7 +10332,17 @@
                 <a:latin typeface="Cambria"/>
                 <a:cs typeface="Cambria"/>
               </a:rPr>
-              <a:t xml:space="preserve">m</a:t>
+              <a:t xml:space="preserve">y</a:t>
+            </a:r>
+            <a:r>
+              <a:rPr lang="en-US" sz="1425" dirty="0">
+                <a:solidFill>
+                  <a:srgbClr val="16171D"/>
+                </a:solidFill>
+                <a:latin typeface="Segoe UI"/>
+                <a:cs typeface="Segoe UI"/>
+              </a:rPr>
+              <a:t xml:space="preserve">-values: </a:t>
             </a:r>
             <a:r>
               <a:rPr lang="en-US" sz="1425" dirty="0">
@@ -10303,7 +10352,7 @@
                 <a:latin typeface="Cambria"/>
                 <a:cs typeface="Cambria"/>
               </a:rPr>
-              <a:t xml:space="preserve"> = −3</a:t>
+              <a:t xml:space="preserve">−2 − 4 = −6</a:t>
             </a:r>
             <a:r>
               <a:rPr lang="en-US" sz="1425" dirty="0">
@@ -10313,7 +10362,7 @@
                 <a:latin typeface="Segoe UI"/>
                 <a:cs typeface="Segoe UI"/>
               </a:rPr>
-              <a:t xml:space="preserve"> and </a:t>
+              <a:t xml:space="preserve">. Subtract the </a:t>
             </a:r>
             <a:r>
               <a:rPr lang="en-US" sz="1425" dirty="0" i="1">
@@ -10323,7 +10372,17 @@
                 <a:latin typeface="Cambria"/>
                 <a:cs typeface="Cambria"/>
               </a:rPr>
-              <a:t xml:space="preserve">b</a:t>
+              <a:t xml:space="preserve">x</a:t>
+            </a:r>
+            <a:r>
+              <a:rPr lang="en-US" sz="1425" dirty="0">
+                <a:solidFill>
+                  <a:srgbClr val="16171D"/>
+                </a:solidFill>
+                <a:latin typeface="Segoe UI"/>
+                <a:cs typeface="Segoe UI"/>
+              </a:rPr>
+              <a:t xml:space="preserve">-values: </a:t>
             </a:r>
             <a:r>
               <a:rPr lang="en-US" sz="1425" dirty="0">
@@ -10333,7 +10392,7 @@
                 <a:latin typeface="Cambria"/>
                 <a:cs typeface="Cambria"/>
               </a:rPr>
-              <a:t xml:space="preserve"> = 5</a:t>
+              <a:t xml:space="preserve">2 − (−1) = 3</a:t>
             </a:r>
             <a:r>
               <a:rPr lang="en-US" sz="1425" dirty="0">
@@ -10362,7 +10421,7 @@
                 <a:latin typeface="Segoe UI"/>
                 <a:cs typeface="Segoe UI"/>
               </a:rPr>
-              <a:t xml:space="preserve">2.</a:t>
+              <a:t xml:space="preserve">3.</a:t>
             </a:r>
             <a:r>
               <a:rPr lang="en-US" sz="1425" dirty="0">
@@ -10372,7 +10431,7 @@
                 <a:latin typeface="Segoe UI"/>
                 <a:cs typeface="Segoe UI"/>
               </a:rPr>
-              <a:t xml:space="preserve"> The slope is </a:t>
+              <a:t xml:space="preserve"> Divide: </a:t>
             </a:r>
             <a:r>
               <a:rPr lang="en-US" sz="1425" dirty="0">
@@ -10382,7 +10441,7 @@
                 <a:latin typeface="Cambria"/>
                 <a:cs typeface="Cambria"/>
               </a:rPr>
-              <a:t xml:space="preserve">−3</a:t>
+              <a:t xml:space="preserve">−6 ÷ 3 = −2</a:t>
             </a:r>
             <a:r>
               <a:rPr lang="en-US" sz="1425" dirty="0">
@@ -12164,7 +12223,7 @@
         <p:spPr>
           <a:xfrm>
             <a:off x="6210148" y="3816858"/>
-            <a:ext cx="5295748" cy="2065020"/>
+            <a:ext cx="5295748" cy="2979420"/>
           </a:xfrm>
           <a:prstGeom prst="roundRect">
             <a:avLst>
@@ -12204,7 +12263,7 @@
         <p:spPr>
           <a:xfrm>
             <a:off x="6419698" y="3988308"/>
-            <a:ext cx="4876648" cy="534924"/>
+            <a:ext cx="4876648" cy="774954"/>
           </a:xfrm>
           <a:prstGeom prst="rect">
             <a:avLst/>
@@ -12243,7 +12302,77 @@
                 <a:latin typeface="Segoe UI"/>
                 <a:cs typeface="Segoe UI"/>
               </a:rPr>
-              <a:t xml:space="preserve"> What is the product of the slopes of two perpendicular lines (neither vertical)?</a:t>
+              <a:t xml:space="preserve"> Which equation represents a line perpendicular to </a:t>
+            </a:r>
+            <a:r>
+              <a:rPr lang="en-US" sz="1575" dirty="0" i="1">
+                <a:solidFill>
+                  <a:srgbClr val="16171D"/>
+                </a:solidFill>
+                <a:latin typeface="Cambria"/>
+                <a:cs typeface="Cambria"/>
+              </a:rPr>
+              <a:t xml:space="preserve">y</a:t>
+            </a:r>
+            <a:r>
+              <a:rPr lang="en-US" sz="1575" dirty="0">
+                <a:solidFill>
+                  <a:srgbClr val="16171D"/>
+                </a:solidFill>
+                <a:latin typeface="Cambria"/>
+                <a:cs typeface="Cambria"/>
+              </a:rPr>
+              <a:t xml:space="preserve"> = 2</a:t>
+            </a:r>
+            <a:r>
+              <a:rPr lang="en-US" sz="1575" dirty="0" i="1">
+                <a:solidFill>
+                  <a:srgbClr val="16171D"/>
+                </a:solidFill>
+                <a:latin typeface="Cambria"/>
+                <a:cs typeface="Cambria"/>
+              </a:rPr>
+              <a:t xml:space="preserve">x</a:t>
+            </a:r>
+            <a:r>
+              <a:rPr lang="en-US" sz="1575" dirty="0">
+                <a:solidFill>
+                  <a:srgbClr val="16171D"/>
+                </a:solidFill>
+                <a:latin typeface="Cambria"/>
+                <a:cs typeface="Cambria"/>
+              </a:rPr>
+              <a:t xml:space="preserve"> + 3</a:t>
+            </a:r>
+            <a:r>
+              <a:rPr lang="en-US" sz="1575" dirty="0">
+                <a:solidFill>
+                  <a:srgbClr val="16171D"/>
+                </a:solidFill>
+                <a:latin typeface="Segoe UI"/>
+                <a:cs typeface="Segoe UI"/>
+              </a:rPr>
+              <a:t xml:space="preserve"> that passes through the point </a:t>
+            </a:r>
+            <a:r>
+              <a:rPr lang="en-US" sz="1575" dirty="0">
+                <a:solidFill>
+                  <a:srgbClr val="16171D"/>
+                </a:solidFill>
+                <a:latin typeface="Cambria"/>
+                <a:cs typeface="Cambria"/>
+              </a:rPr>
+              <a:t xml:space="preserve">(4, 1)</a:t>
+            </a:r>
+            <a:r>
+              <a:rPr lang="en-US" sz="1575" dirty="0">
+                <a:solidFill>
+                  <a:srgbClr val="16171D"/>
+                </a:solidFill>
+                <a:latin typeface="Segoe UI"/>
+                <a:cs typeface="Segoe UI"/>
+              </a:rPr>
+              <a:t xml:space="preserve">?</a:t>
             </a:r>
             <a:endParaRPr lang="en-US" sz="1575" dirty="0"/>
           </a:p>
@@ -12257,8 +12386,8 @@
         </p:nvSpPr>
         <p:spPr>
           <a:xfrm>
-            <a:off x="6419698" y="4561332"/>
-            <a:ext cx="4876648" cy="294894"/>
+            <a:off x="6419698" y="4801362"/>
+            <a:ext cx="4876648" cy="534924"/>
           </a:xfrm>
           <a:prstGeom prst="rect">
             <a:avLst/>
@@ -12297,7 +12426,7 @@
                 <a:latin typeface="Segoe UI"/>
                 <a:cs typeface="Segoe UI"/>
               </a:rPr>
-              <a:t xml:space="preserve"> </a:t>
+              <a:t xml:space="preserve"> perpendicular: flip and change the sign · </a:t>
             </a:r>
             <a:r>
               <a:rPr lang="en-US" sz="1575" dirty="0" i="1">
@@ -12307,7 +12436,7 @@
                 <a:latin typeface="Cambria"/>
                 <a:cs typeface="Cambria"/>
               </a:rPr>
-              <a:t xml:space="preserve">m</a:t>
+              <a:t xml:space="preserve">y</a:t>
             </a:r>
             <a:r>
               <a:rPr lang="en-US" sz="1575" dirty="0">
@@ -12317,7 +12446,7 @@
                 <a:latin typeface="Cambria"/>
                 <a:cs typeface="Cambria"/>
               </a:rPr>
-              <a:t xml:space="preserve">₁ · </a:t>
+              <a:t xml:space="preserve"> = </a:t>
             </a:r>
             <a:r>
               <a:rPr lang="en-US" sz="1575" dirty="0" i="1">
@@ -12330,14 +12459,34 @@
               <a:t xml:space="preserve">m</a:t>
             </a:r>
             <a:r>
-              <a:rPr lang="en-US" sz="1575" dirty="0">
+              <a:rPr lang="en-US" sz="1575" dirty="0" i="1">
                 <a:solidFill>
                   <a:srgbClr val="16171D"/>
                 </a:solidFill>
                 <a:latin typeface="Cambria"/>
                 <a:cs typeface="Cambria"/>
               </a:rPr>
-              <a:t xml:space="preserve">₂ = −1</a:t>
+              <a:t xml:space="preserve">x</a:t>
+            </a:r>
+            <a:r>
+              <a:rPr lang="en-US" sz="1575" dirty="0">
+                <a:solidFill>
+                  <a:srgbClr val="16171D"/>
+                </a:solidFill>
+                <a:latin typeface="Cambria"/>
+                <a:cs typeface="Cambria"/>
+              </a:rPr>
+              <a:t xml:space="preserve"> + </a:t>
+            </a:r>
+            <a:r>
+              <a:rPr lang="en-US" sz="1575" dirty="0" i="1">
+                <a:solidFill>
+                  <a:srgbClr val="16171D"/>
+                </a:solidFill>
+                <a:latin typeface="Cambria"/>
+                <a:cs typeface="Cambria"/>
+              </a:rPr>
+              <a:t xml:space="preserve">b</a:t>
             </a:r>
             <a:endParaRPr lang="en-US" sz="1575" dirty="0"/>
           </a:p>
@@ -12351,8 +12500,8 @@
         </p:nvSpPr>
         <p:spPr>
           <a:xfrm>
-            <a:off x="6419698" y="4894326"/>
-            <a:ext cx="4826135" cy="816102"/>
+            <a:off x="6419698" y="5374386"/>
+            <a:ext cx="4876648" cy="1250442"/>
           </a:xfrm>
           <a:prstGeom prst="roundRect">
             <a:avLst>
@@ -12388,14 +12537,44 @@
               <a:t xml:space="preserve">ANSWER   </a:t>
             </a:r>
             <a:r>
-              <a:rPr lang="en-US" sz="1425" dirty="0" b="1">
+              <a:rPr lang="en-US" sz="1425" dirty="0" b="1" i="1">
                 <a:solidFill>
                   <a:srgbClr val="16171D"/>
                 </a:solidFill>
                 <a:latin typeface="Cambria"/>
                 <a:cs typeface="Cambria"/>
               </a:rPr>
-              <a:t xml:space="preserve">−1</a:t>
+              <a:t xml:space="preserve">y</a:t>
+            </a:r>
+            <a:r>
+              <a:rPr lang="en-US" sz="1425" dirty="0" b="1">
+                <a:solidFill>
+                  <a:srgbClr val="16171D"/>
+                </a:solidFill>
+                <a:latin typeface="Cambria"/>
+                <a:cs typeface="Cambria"/>
+              </a:rPr>
+              <a:t xml:space="preserve"> = −½</a:t>
+            </a:r>
+            <a:r>
+              <a:rPr lang="en-US" sz="1425" dirty="0" b="1" i="1">
+                <a:solidFill>
+                  <a:srgbClr val="16171D"/>
+                </a:solidFill>
+                <a:latin typeface="Cambria"/>
+                <a:cs typeface="Cambria"/>
+              </a:rPr>
+              <a:t xml:space="preserve">x</a:t>
+            </a:r>
+            <a:r>
+              <a:rPr lang="en-US" sz="1425" dirty="0" b="1">
+                <a:solidFill>
+                  <a:srgbClr val="16171D"/>
+                </a:solidFill>
+                <a:latin typeface="Cambria"/>
+                <a:cs typeface="Cambria"/>
+              </a:rPr>
+              <a:t xml:space="preserve"> + 3</a:t>
             </a:r>
             <a:br>
               <a:rPr lang="en-US" sz="1425" dirty="0">
@@ -12424,27 +12603,17 @@
                 <a:latin typeface="Segoe UI"/>
                 <a:cs typeface="Segoe UI"/>
               </a:rPr>
-              <a:t xml:space="preserve"> Example: slopes </a:t>
-            </a:r>
-            <a:r>
-              <a:rPr lang="en-US" sz="1425" dirty="0">
+              <a:t xml:space="preserve"> Slope of </a:t>
+            </a:r>
+            <a:r>
+              <a:rPr lang="en-US" sz="1425" dirty="0" i="1">
                 <a:solidFill>
                   <a:srgbClr val="16171D"/>
                 </a:solidFill>
                 <a:latin typeface="Cambria"/>
                 <a:cs typeface="Cambria"/>
               </a:rPr>
-              <a:t xml:space="preserve">2</a:t>
-            </a:r>
-            <a:r>
-              <a:rPr lang="en-US" sz="1425" dirty="0">
-                <a:solidFill>
-                  <a:srgbClr val="16171D"/>
-                </a:solidFill>
-                <a:latin typeface="Segoe UI"/>
-                <a:cs typeface="Segoe UI"/>
-              </a:rPr>
-              <a:t xml:space="preserve"> and </a:t>
+              <a:t xml:space="preserve">y</a:t>
             </a:r>
             <a:r>
               <a:rPr lang="en-US" sz="1425" dirty="0">
@@ -12454,6 +12623,46 @@
                 <a:latin typeface="Cambria"/>
                 <a:cs typeface="Cambria"/>
               </a:rPr>
+              <a:t xml:space="preserve"> = 2</a:t>
+            </a:r>
+            <a:r>
+              <a:rPr lang="en-US" sz="1425" dirty="0" i="1">
+                <a:solidFill>
+                  <a:srgbClr val="16171D"/>
+                </a:solidFill>
+                <a:latin typeface="Cambria"/>
+                <a:cs typeface="Cambria"/>
+              </a:rPr>
+              <a:t xml:space="preserve">x</a:t>
+            </a:r>
+            <a:r>
+              <a:rPr lang="en-US" sz="1425" dirty="0">
+                <a:solidFill>
+                  <a:srgbClr val="16171D"/>
+                </a:solidFill>
+                <a:latin typeface="Cambria"/>
+                <a:cs typeface="Cambria"/>
+              </a:rPr>
+              <a:t xml:space="preserve"> + 3</a:t>
+            </a:r>
+            <a:r>
+              <a:rPr lang="en-US" sz="1425" dirty="0">
+                <a:solidFill>
+                  <a:srgbClr val="16171D"/>
+                </a:solidFill>
+                <a:latin typeface="Segoe UI"/>
+                <a:cs typeface="Segoe UI"/>
+              </a:rPr>
+              <a:t xml:space="preserve"> is 2. Flip and change the sign: </a:t>
+            </a:r>
+            <a:r>
+              <a:rPr lang="en-US" sz="1425" dirty="0">
+                <a:solidFill>
+                  <a:srgbClr val="16171D"/>
+                </a:solidFill>
+                <a:latin typeface="Cambria"/>
+                <a:cs typeface="Cambria"/>
+              </a:rPr>
               <a:t xml:space="preserve">−½</a:t>
             </a:r>
             <a:r>
@@ -12464,7 +12673,7 @@
                 <a:latin typeface="Segoe UI"/>
                 <a:cs typeface="Segoe UI"/>
               </a:rPr>
-              <a:t xml:space="preserve"> are perpendicular.</a:t>
+              <a:t xml:space="preserve">.</a:t>
             </a:r>
             <a:br>
               <a:rPr lang="en-US" sz="1425" dirty="0">
@@ -12493,7 +12702,7 @@
                 <a:latin typeface="Segoe UI"/>
                 <a:cs typeface="Segoe UI"/>
               </a:rPr>
-              <a:t xml:space="preserve"> </a:t>
+              <a:t xml:space="preserve"> Put in </a:t>
             </a:r>
             <a:r>
               <a:rPr lang="en-US" sz="1425" dirty="0">
@@ -12503,7 +12712,7 @@
                 <a:latin typeface="Cambria"/>
                 <a:cs typeface="Cambria"/>
               </a:rPr>
-              <a:t xml:space="preserve">2 · (−½) = −1</a:t>
+              <a:t xml:space="preserve">(4, 1)</a:t>
             </a:r>
             <a:r>
               <a:rPr lang="en-US" sz="1425" dirty="0">
@@ -12513,7 +12722,7 @@
                 <a:latin typeface="Segoe UI"/>
                 <a:cs typeface="Segoe UI"/>
               </a:rPr>
-              <a:t xml:space="preserve">. The product is always </a:t>
+              <a:t xml:space="preserve">: </a:t>
             </a:r>
             <a:r>
               <a:rPr lang="en-US" sz="1425" dirty="0">
@@ -12523,7 +12732,146 @@
                 <a:latin typeface="Cambria"/>
                 <a:cs typeface="Cambria"/>
               </a:rPr>
-              <a:t xml:space="preserve">−1</a:t>
+              <a:t xml:space="preserve">1 = −½(4) + </a:t>
+            </a:r>
+            <a:r>
+              <a:rPr lang="en-US" sz="1425" dirty="0" i="1">
+                <a:solidFill>
+                  <a:srgbClr val="16171D"/>
+                </a:solidFill>
+                <a:latin typeface="Cambria"/>
+                <a:cs typeface="Cambria"/>
+              </a:rPr>
+              <a:t xml:space="preserve">b</a:t>
+            </a:r>
+            <a:r>
+              <a:rPr lang="en-US" sz="1425" dirty="0">
+                <a:solidFill>
+                  <a:srgbClr val="16171D"/>
+                </a:solidFill>
+                <a:latin typeface="Cambria"/>
+                <a:cs typeface="Cambria"/>
+              </a:rPr>
+              <a:t xml:space="preserve"> = −2 + </a:t>
+            </a:r>
+            <a:r>
+              <a:rPr lang="en-US" sz="1425" dirty="0" i="1">
+                <a:solidFill>
+                  <a:srgbClr val="16171D"/>
+                </a:solidFill>
+                <a:latin typeface="Cambria"/>
+                <a:cs typeface="Cambria"/>
+              </a:rPr>
+              <a:t xml:space="preserve">b</a:t>
+            </a:r>
+            <a:r>
+              <a:rPr lang="en-US" sz="1425" dirty="0">
+                <a:solidFill>
+                  <a:srgbClr val="16171D"/>
+                </a:solidFill>
+                <a:latin typeface="Segoe UI"/>
+                <a:cs typeface="Segoe UI"/>
+              </a:rPr>
+              <a:t xml:space="preserve">.</a:t>
+            </a:r>
+            <a:br>
+              <a:rPr lang="en-US" sz="1425" dirty="0">
+                <a:solidFill>
+                  <a:srgbClr val="16171D"/>
+                </a:solidFill>
+                <a:latin typeface="Segoe UI"/>
+                <a:cs typeface="Segoe UI"/>
+              </a:rPr>
+            </a:br>
+            <a:r>
+              <a:rPr lang="en-US" sz="1425" dirty="0" b="1">
+                <a:solidFill>
+                  <a:srgbClr val="16171D"/>
+                </a:solidFill>
+                <a:latin typeface="Segoe UI"/>
+                <a:cs typeface="Segoe UI"/>
+              </a:rPr>
+              <a:t xml:space="preserve">3.</a:t>
+            </a:r>
+            <a:r>
+              <a:rPr lang="en-US" sz="1425" dirty="0">
+                <a:solidFill>
+                  <a:srgbClr val="16171D"/>
+                </a:solidFill>
+                <a:latin typeface="Segoe UI"/>
+                <a:cs typeface="Segoe UI"/>
+              </a:rPr>
+              <a:t xml:space="preserve"> </a:t>
+            </a:r>
+            <a:r>
+              <a:rPr lang="en-US" sz="1425" dirty="0" i="1">
+                <a:solidFill>
+                  <a:srgbClr val="16171D"/>
+                </a:solidFill>
+                <a:latin typeface="Cambria"/>
+                <a:cs typeface="Cambria"/>
+              </a:rPr>
+              <a:t xml:space="preserve">b</a:t>
+            </a:r>
+            <a:r>
+              <a:rPr lang="en-US" sz="1425" dirty="0">
+                <a:solidFill>
+                  <a:srgbClr val="16171D"/>
+                </a:solidFill>
+                <a:latin typeface="Cambria"/>
+                <a:cs typeface="Cambria"/>
+              </a:rPr>
+              <a:t xml:space="preserve"> = 3</a:t>
+            </a:r>
+            <a:r>
+              <a:rPr lang="en-US" sz="1425" dirty="0">
+                <a:solidFill>
+                  <a:srgbClr val="16171D"/>
+                </a:solidFill>
+                <a:latin typeface="Segoe UI"/>
+                <a:cs typeface="Segoe UI"/>
+              </a:rPr>
+              <a:t xml:space="preserve">: </a:t>
+            </a:r>
+            <a:r>
+              <a:rPr lang="en-US" sz="1425" dirty="0" i="1">
+                <a:solidFill>
+                  <a:srgbClr val="16171D"/>
+                </a:solidFill>
+                <a:latin typeface="Cambria"/>
+                <a:cs typeface="Cambria"/>
+              </a:rPr>
+              <a:t xml:space="preserve">y</a:t>
+            </a:r>
+            <a:r>
+              <a:rPr lang="en-US" sz="1425" dirty="0">
+                <a:solidFill>
+                  <a:srgbClr val="16171D"/>
+                </a:solidFill>
+                <a:latin typeface="Cambria"/>
+                <a:cs typeface="Cambria"/>
+              </a:rPr>
+              <a:t xml:space="preserve"> = −½</a:t>
+            </a:r>
+            <a:r>
+              <a:rPr lang="en-US" sz="1425" dirty="0" i="1">
+                <a:solidFill>
+                  <a:srgbClr val="16171D"/>
+                </a:solidFill>
+                <a:latin typeface="Cambria"/>
+                <a:cs typeface="Cambria"/>
+              </a:rPr>
+              <a:t xml:space="preserve">x</a:t>
+            </a:r>
+            <a:r>
+              <a:rPr lang="en-US" sz="1425" dirty="0">
+                <a:solidFill>
+                  <a:srgbClr val="16171D"/>
+                </a:solidFill>
+                <a:latin typeface="Cambria"/>
+                <a:cs typeface="Cambria"/>
+              </a:rPr>
+              <a:t xml:space="preserve"> + 3</a:t>
             </a:r>
             <a:r>
               <a:rPr lang="en-US" sz="1425" dirty="0">

--- a/IEP/t2-lesson3-perpendicular-slopes-IEP.pptx
+++ b/IEP/t2-lesson3-perpendicular-slopes-IEP.pptx
@@ -1879,7 +1879,7 @@
                 <a:latin typeface="Segoe UI"/>
                 <a:cs typeface="Segoe UI"/>
               </a:rPr>
-              <a:t xml:space="preserve">I do · Write it</a:t>
+              <a:t xml:space="preserve">I do · Write it · ★ Essential</a:t>
             </a:r>
             <a:endParaRPr lang="en-US" sz="1200" dirty="0"/>
           </a:p>
@@ -2785,7 +2785,7 @@
                 <a:latin typeface="Segoe UI"/>
                 <a:cs typeface="Segoe UI"/>
               </a:rPr>
-              <a:t xml:space="preserve">You do · Try it</a:t>
+              <a:t xml:space="preserve">You do · Try it · ★ Essential</a:t>
             </a:r>
             <a:endParaRPr lang="en-US" sz="1200" dirty="0"/>
           </a:p>
@@ -3808,7 +3808,7 @@
                 <a:latin typeface="Segoe UI"/>
                 <a:cs typeface="Segoe UI"/>
               </a:rPr>
-              <a:t xml:space="preserve">Check it · Step by step</a:t>
+              <a:t xml:space="preserve">Check it · Step by step · ★ Essential</a:t>
             </a:r>
             <a:endParaRPr lang="en-US" sz="1200" dirty="0"/>
           </a:p>
@@ -14705,7 +14705,7 @@
                 <a:latin typeface="Segoe UI"/>
                 <a:cs typeface="Segoe UI"/>
               </a:rPr>
-              <a:t xml:space="preserve">I do · Watch me</a:t>
+              <a:t xml:space="preserve">I do · Watch me · ★ Essential</a:t>
             </a:r>
             <a:endParaRPr lang="en-US" sz="1200" dirty="0"/>
           </a:p>
@@ -15645,7 +15645,7 @@
                 <a:latin typeface="Segoe UI"/>
                 <a:cs typeface="Segoe UI"/>
               </a:rPr>
-              <a:t xml:space="preserve">You do · Try it</a:t>
+              <a:t xml:space="preserve">You do · Try it · ★ Essential</a:t>
             </a:r>
             <a:endParaRPr lang="en-US" sz="1200" dirty="0"/>
           </a:p>
@@ -16658,7 +16658,7 @@
                 <a:latin typeface="Segoe UI"/>
                 <a:cs typeface="Segoe UI"/>
               </a:rPr>
-              <a:t xml:space="preserve">Check it · Step by step</a:t>
+              <a:t xml:space="preserve">Check it · Step by step · ★ Essential</a:t>
             </a:r>
             <a:endParaRPr lang="en-US" sz="1200" dirty="0"/>
           </a:p>
@@ -19601,7 +19601,7 @@
                 <a:latin typeface="Segoe UI"/>
                 <a:cs typeface="Segoe UI"/>
               </a:rPr>
-              <a:t xml:space="preserve">We do · Flat and straight-up lines</a:t>
+              <a:t xml:space="preserve">We do · Flat and straight-up lines · ★ Essential</a:t>
             </a:r>
             <a:endParaRPr lang="en-US" sz="1200" dirty="0"/>
           </a:p>
